--- a/docs/week3/workflow-v1.pptx
+++ b/docs/week3/workflow-v1.pptx
@@ -1239,8 +1239,8 @@
         </p:nvSpPr>
         <p:spPr>
           <a:xfrm>
-            <a:off x="731520" y="2103120"/>
-            <a:ext cx="10725912" cy="914400"/>
+            <a:off x="640080" y="2377440"/>
+            <a:ext cx="10881360" cy="914400"/>
           </a:xfrm>
           <a:prstGeom prst="rect">
             <a:avLst/>
@@ -1260,9 +1260,9 @@
                 <a:solidFill>
                   <a:srgbClr val="FFFFFF"/>
                 </a:solidFill>
-                <a:latin typeface="Cambria" pitchFamily="34" charset="0"/>
-                <a:ea typeface="Cambria" pitchFamily="34" charset="-122"/>
-                <a:cs typeface="Cambria" pitchFamily="34" charset="-120"/>
+                <a:latin typeface="Arial" pitchFamily="34" charset="0"/>
+                <a:ea typeface="Arial" pitchFamily="34"/>
+                <a:cs typeface="Arial" pitchFamily="34"/>
               </a:rPr>
               <a:t>Product Return Request</a:t>
             </a:r>
@@ -1278,8 +1278,8 @@
         </p:nvSpPr>
         <p:spPr>
           <a:xfrm>
-            <a:off x="731520" y="2880360"/>
-            <a:ext cx="10725912" cy="640080"/>
+            <a:off x="640080" y="3200400"/>
+            <a:ext cx="10881360" cy="548640"/>
           </a:xfrm>
           <a:prstGeom prst="rect">
             <a:avLst/>
@@ -1295,17 +1295,17 @@
               <a:buNone/>
             </a:pPr>
             <a:r>
-              <a:rPr lang="en-US" sz="2400" dirty="0">
+              <a:rPr lang="en-US" sz="2000" dirty="0">
                 <a:solidFill>
-                  <a:srgbClr val="CADCFC"/>
+                  <a:srgbClr val="0E8C86"/>
                 </a:solidFill>
                 <a:latin typeface="Calibri" pitchFamily="34" charset="0"/>
-                <a:ea typeface="Calibri" pitchFamily="34" charset="-122"/>
-                <a:cs typeface="Calibri" pitchFamily="34" charset="-120"/>
+                <a:ea typeface="Calibri" pitchFamily="34"/>
+                <a:cs typeface="Calibri" pitchFamily="34"/>
               </a:rPr>
               <a:t>Transaction Workflow</a:t>
             </a:r>
-            <a:endParaRPr lang="en-US" sz="2400" dirty="0"/>
+            <a:endParaRPr lang="en-US" sz="2000" dirty="0"/>
           </a:p>
         </p:txBody>
       </p:sp>
@@ -1317,8 +1317,8 @@
         </p:nvSpPr>
         <p:spPr>
           <a:xfrm>
-            <a:off x="731520" y="3749040"/>
-            <a:ext cx="10725912" cy="731520"/>
+            <a:off x="640080" y="4206240"/>
+            <a:ext cx="10881360" cy="320040"/>
           </a:xfrm>
           <a:prstGeom prst="rect">
             <a:avLst/>
@@ -1331,43 +1331,59 @@
           <a:lstStyle/>
           <a:p>
             <a:pPr indent="0" marL="0">
-              <a:lnSpc>
-                <a:spcPct val="130000"/>
-              </a:lnSpc>
               <a:buNone/>
             </a:pPr>
             <a:r>
-              <a:rPr lang="en-US" sz="1400" dirty="0">
+              <a:rPr lang="en-US" sz="1300" dirty="0">
                 <a:solidFill>
-                  <a:srgbClr val="CADCFC"/>
+                  <a:srgbClr val="AAB0C8"/>
                 </a:solidFill>
                 <a:latin typeface="Calibri" pitchFamily="34" charset="0"/>
-                <a:ea typeface="Calibri" pitchFamily="34" charset="-122"/>
-                <a:cs typeface="Calibri" pitchFamily="34" charset="-120"/>
+                <a:ea typeface="Calibri" pitchFamily="34"/>
+                <a:cs typeface="Calibri" pitchFamily="34"/>
               </a:rPr>
-              <a:t>MIS 3371 • Transaction Processing Systems I • Week 3</a:t>
+              <a:t>MIS 3371  •  Transaction Processing Systems I  •  Week 3</a:t>
             </a:r>
-            <a:endParaRPr lang="en-US" sz="1400" dirty="0"/>
+            <a:endParaRPr lang="en-US" sz="1300" dirty="0"/>
           </a:p>
+        </p:txBody>
+      </p:sp>
+      <p:sp>
+        <p:nvSpPr>
+          <p:cNvPr id="5" name="Text 3"/>
+          <p:cNvSpPr txBox="1"/>
+          <p:nvPr/>
+        </p:nvSpPr>
+        <p:spPr>
+          <a:xfrm>
+            <a:off x="640080" y="4526280"/>
+            <a:ext cx="10881360" cy="320040"/>
+          </a:xfrm>
+          <a:prstGeom prst="rect">
+            <a:avLst/>
+          </a:prstGeom>
+          <a:noFill/>
+          <a:ln/>
+        </p:spPr>
+        <p:txBody>
+          <a:bodyPr wrap="square" lIns="0" tIns="0" rIns="0" bIns="0" rtlCol="0" anchor="ctr"/>
+          <a:lstStyle/>
           <a:p>
             <a:pPr indent="0" marL="0">
-              <a:lnSpc>
-                <a:spcPct val="130000"/>
-              </a:lnSpc>
               <a:buNone/>
             </a:pPr>
             <a:r>
-              <a:rPr lang="en-US" sz="1400" dirty="0">
+              <a:rPr lang="en-US" sz="1300" dirty="0">
                 <a:solidFill>
-                  <a:srgbClr val="CADCFC"/>
+                  <a:srgbClr val="AAB0C8"/>
                 </a:solidFill>
                 <a:latin typeface="Calibri" pitchFamily="34" charset="0"/>
-                <a:ea typeface="Calibri" pitchFamily="34" charset="-122"/>
-                <a:cs typeface="Calibri" pitchFamily="34" charset="-120"/>
+                <a:ea typeface="Calibri" pitchFamily="34"/>
+                <a:cs typeface="Calibri" pitchFamily="34"/>
               </a:rPr>
               <a:t>Product Return Request Team</a:t>
             </a:r>
-            <a:endParaRPr lang="en-US" sz="1400" dirty="0"/>
+            <a:endParaRPr lang="en-US" sz="1300" dirty="0"/>
           </a:p>
         </p:txBody>
       </p:sp>
@@ -1411,8 +1427,8 @@
         </p:nvSpPr>
         <p:spPr>
           <a:xfrm>
-            <a:off x="548640" y="320040"/>
-            <a:ext cx="11091672" cy="548640"/>
+            <a:off x="457200" y="320040"/>
+            <a:ext cx="11247120" cy="548640"/>
           </a:xfrm>
           <a:prstGeom prst="rect">
             <a:avLst/>
@@ -1432,9 +1448,9 @@
                 <a:solidFill>
                   <a:srgbClr val="1E2761"/>
                 </a:solidFill>
-                <a:latin typeface="Cambria" pitchFamily="34" charset="0"/>
-                <a:ea typeface="Cambria" pitchFamily="34" charset="-122"/>
-                <a:cs typeface="Cambria" pitchFamily="34" charset="-120"/>
+                <a:latin typeface="Arial" pitchFamily="34" charset="0"/>
+                <a:ea typeface="Arial" pitchFamily="34"/>
+                <a:cs typeface="Arial" pitchFamily="34"/>
               </a:rPr>
               <a:t>Workflow Diagram</a:t>
             </a:r>
@@ -1450,8 +1466,8 @@
         </p:nvSpPr>
         <p:spPr>
           <a:xfrm>
-            <a:off x="548640" y="868680"/>
-            <a:ext cx="11091672" cy="320040"/>
+            <a:off x="457200" y="868680"/>
+            <a:ext cx="11247120" cy="320040"/>
           </a:xfrm>
           <a:prstGeom prst="rect">
             <a:avLst/>
@@ -1467,17 +1483,17 @@
               <a:buNone/>
             </a:pPr>
             <a:r>
-              <a:rPr lang="en-US" sz="1400" dirty="0">
+              <a:rPr lang="en-US" sz="1300" dirty="0">
                 <a:solidFill>
-                  <a:srgbClr val="555555"/>
+                  <a:srgbClr val="5B6072"/>
                 </a:solidFill>
                 <a:latin typeface="Calibri" pitchFamily="34" charset="0"/>
-                <a:ea typeface="Calibri" pitchFamily="34" charset="-122"/>
-                <a:cs typeface="Calibri" pitchFamily="34" charset="-120"/>
+                <a:ea typeface="Calibri" pitchFamily="34"/>
+                <a:cs typeface="Calibri" pitchFamily="34"/>
               </a:rPr>
-              <a:t>Activity 1 — exception path shown in red</a:t>
+              <a:t>Activity 1 — exception path shown as a navy-outlined box</a:t>
             </a:r>
-            <a:endParaRPr lang="en-US" sz="1400" dirty="0"/>
+            <a:endParaRPr lang="en-US" sz="1300" dirty="0"/>
           </a:p>
         </p:txBody>
       </p:sp>
@@ -1489,30 +1505,23 @@
         </p:nvSpPr>
         <p:spPr>
           <a:xfrm>
-            <a:off x="502920" y="1371600"/>
-            <a:ext cx="2331720" cy="566928"/>
+            <a:off x="365760" y="1463040"/>
+            <a:ext cx="1783080" cy="731520"/>
           </a:xfrm>
           <a:prstGeom prst="roundRect">
             <a:avLst>
-              <a:gd name="adj" fmla="val 12903"/>
+              <a:gd name="adj" fmla="val 6875"/>
             </a:avLst>
           </a:prstGeom>
           <a:solidFill>
-            <a:srgbClr val="CADCFC"/>
+            <a:srgbClr val="1E2761"/>
           </a:solidFill>
           <a:ln w="12700">
             <a:solidFill>
-              <a:srgbClr val="1E2761"/>
+              <a:srgbClr val="D5D9E0"/>
             </a:solidFill>
             <a:prstDash val="solid"/>
           </a:ln>
-          <a:effectLst>
-            <a:outerShdw sx="100000" sy="100000" kx="0" ky="0" algn="bl" rotWithShape="0" blurRad="38100" dist="25400" dir="5400000">
-              <a:srgbClr val="000000">
-                <a:alpha val="18000"/>
-              </a:srgbClr>
-            </a:outerShdw>
-          </a:effectLst>
         </p:spPr>
       </p:sp>
       <p:sp>
@@ -1523,8 +1532,8 @@
         </p:nvSpPr>
         <p:spPr>
           <a:xfrm>
-            <a:off x="502920" y="1371600"/>
-            <a:ext cx="2331720" cy="566928"/>
+            <a:off x="365760" y="1463040"/>
+            <a:ext cx="1783080" cy="731520"/>
           </a:xfrm>
           <a:prstGeom prst="rect">
             <a:avLst/>
@@ -1533,41 +1542,41 @@
           <a:ln/>
         </p:spPr>
         <p:txBody>
-          <a:bodyPr wrap="square" lIns="25400" tIns="25400" rIns="25400" bIns="25400" rtlCol="0" anchor="ctr"/>
+          <a:bodyPr wrap="square" lIns="0" tIns="0" rIns="0" bIns="0" rtlCol="0" anchor="ctr"/>
           <a:lstStyle/>
           <a:p>
             <a:pPr algn="ctr" indent="0" marL="0">
               <a:buNone/>
             </a:pPr>
             <a:r>
-              <a:rPr lang="en-US" sz="1050" dirty="0">
+              <a:rPr lang="en-US" sz="1100" dirty="0">
                 <a:solidFill>
-                  <a:srgbClr val="202020"/>
+                  <a:srgbClr val="FFFFFF"/>
                 </a:solidFill>
                 <a:latin typeface="Calibri" pitchFamily="34" charset="0"/>
-                <a:ea typeface="Calibri" pitchFamily="34" charset="-122"/>
-                <a:cs typeface="Calibri" pitchFamily="34" charset="-120"/>
+                <a:ea typeface="Calibri" pitchFamily="34"/>
+                <a:cs typeface="Calibri" pitchFamily="34"/>
               </a:rPr>
               <a:t>Customer submits</a:t>
             </a:r>
-            <a:endParaRPr lang="en-US" sz="1050" dirty="0"/>
+            <a:endParaRPr lang="en-US" sz="1100" dirty="0"/>
           </a:p>
           <a:p>
             <a:pPr algn="ctr" indent="0" marL="0">
               <a:buNone/>
             </a:pPr>
             <a:r>
-              <a:rPr lang="en-US" sz="1050" dirty="0">
+              <a:rPr lang="en-US" sz="1100" dirty="0">
                 <a:solidFill>
-                  <a:srgbClr val="202020"/>
+                  <a:srgbClr val="FFFFFF"/>
                 </a:solidFill>
                 <a:latin typeface="Calibri" pitchFamily="34" charset="0"/>
-                <a:ea typeface="Calibri" pitchFamily="34" charset="-122"/>
-                <a:cs typeface="Calibri" pitchFamily="34" charset="-120"/>
+                <a:ea typeface="Calibri" pitchFamily="34"/>
+                <a:cs typeface="Calibri" pitchFamily="34"/>
               </a:rPr>
               <a:t>return request</a:t>
             </a:r>
-            <a:endParaRPr lang="en-US" sz="1050" dirty="0"/>
+            <a:endParaRPr lang="en-US" sz="1100" dirty="0"/>
           </a:p>
         </p:txBody>
       </p:sp>
@@ -1579,66 +1588,35 @@
         </p:nvSpPr>
         <p:spPr>
           <a:xfrm>
-            <a:off x="2834640" y="1655064"/>
-            <a:ext cx="228600" cy="0"/>
-          </a:xfrm>
-          <a:prstGeom prst="line">
-            <a:avLst/>
-          </a:prstGeom>
-          <a:noFill/>
-          <a:ln w="19050">
-            <a:solidFill>
-              <a:srgbClr val="555555"/>
-            </a:solidFill>
-            <a:prstDash val="solid"/>
-            <a:tailEnd type="triangle"/>
-          </a:ln>
-        </p:spPr>
-      </p:sp>
-      <p:sp>
-        <p:nvSpPr>
-          <p:cNvPr id="7" name="Shape 5"/>
-          <p:cNvSpPr/>
-          <p:nvPr/>
-        </p:nvSpPr>
-        <p:spPr>
-          <a:xfrm>
-            <a:off x="3063240" y="1371600"/>
-            <a:ext cx="2331720" cy="566928"/>
+            <a:off x="2331720" y="1463040"/>
+            <a:ext cx="1783080" cy="731520"/>
           </a:xfrm>
           <a:prstGeom prst="roundRect">
             <a:avLst>
-              <a:gd name="adj" fmla="val 12903"/>
+              <a:gd name="adj" fmla="val 6875"/>
             </a:avLst>
           </a:prstGeom>
           <a:solidFill>
-            <a:srgbClr val="CADCFC"/>
+            <a:srgbClr val="1E2761"/>
           </a:solidFill>
           <a:ln w="12700">
             <a:solidFill>
-              <a:srgbClr val="1E2761"/>
+              <a:srgbClr val="D5D9E0"/>
             </a:solidFill>
             <a:prstDash val="solid"/>
           </a:ln>
-          <a:effectLst>
-            <a:outerShdw sx="100000" sy="100000" kx="0" ky="0" algn="bl" rotWithShape="0" blurRad="38100" dist="25400" dir="5400000">
-              <a:srgbClr val="000000">
-                <a:alpha val="18000"/>
-              </a:srgbClr>
-            </a:outerShdw>
-          </a:effectLst>
         </p:spPr>
       </p:sp>
       <p:sp>
         <p:nvSpPr>
-          <p:cNvPr id="8" name="Text 6"/>
+          <p:cNvPr id="7" name="Text 5"/>
           <p:cNvSpPr txBox="1"/>
           <p:nvPr/>
         </p:nvSpPr>
         <p:spPr>
           <a:xfrm>
-            <a:off x="3063240" y="1371600"/>
-            <a:ext cx="2331720" cy="566928"/>
+            <a:off x="2331720" y="1463040"/>
+            <a:ext cx="1783080" cy="731520"/>
           </a:xfrm>
           <a:prstGeom prst="rect">
             <a:avLst/>
@@ -1647,84 +1625,60 @@
           <a:ln/>
         </p:spPr>
         <p:txBody>
-          <a:bodyPr wrap="square" lIns="25400" tIns="25400" rIns="25400" bIns="25400" rtlCol="0" anchor="ctr"/>
+          <a:bodyPr wrap="square" lIns="0" tIns="0" rIns="0" bIns="0" rtlCol="0" anchor="ctr"/>
           <a:lstStyle/>
           <a:p>
             <a:pPr algn="ctr" indent="0" marL="0">
               <a:buNone/>
             </a:pPr>
             <a:r>
-              <a:rPr lang="en-US" sz="1050" dirty="0">
+              <a:rPr lang="en-US" sz="1100" dirty="0">
                 <a:solidFill>
-                  <a:srgbClr val="202020"/>
+                  <a:srgbClr val="FFFFFF"/>
                 </a:solidFill>
                 <a:latin typeface="Calibri" pitchFamily="34" charset="0"/>
-                <a:ea typeface="Calibri" pitchFamily="34" charset="-122"/>
-                <a:cs typeface="Calibri" pitchFamily="34" charset="-120"/>
+                <a:ea typeface="Calibri" pitchFamily="34"/>
+                <a:cs typeface="Calibri" pitchFamily="34"/>
               </a:rPr>
               <a:t>System validates</a:t>
             </a:r>
-            <a:endParaRPr lang="en-US" sz="1050" dirty="0"/>
+            <a:endParaRPr lang="en-US" sz="1100" dirty="0"/>
           </a:p>
           <a:p>
             <a:pPr algn="ctr" indent="0" marL="0">
               <a:buNone/>
             </a:pPr>
             <a:r>
-              <a:rPr lang="en-US" sz="1050" dirty="0">
+              <a:rPr lang="en-US" sz="1100" dirty="0">
                 <a:solidFill>
-                  <a:srgbClr val="202020"/>
+                  <a:srgbClr val="FFFFFF"/>
                 </a:solidFill>
                 <a:latin typeface="Calibri" pitchFamily="34" charset="0"/>
-                <a:ea typeface="Calibri" pitchFamily="34" charset="-122"/>
-                <a:cs typeface="Calibri" pitchFamily="34" charset="-120"/>
+                <a:ea typeface="Calibri" pitchFamily="34"/>
+                <a:cs typeface="Calibri" pitchFamily="34"/>
               </a:rPr>
               <a:t>order &amp; quantity</a:t>
             </a:r>
-            <a:endParaRPr lang="en-US" sz="1050" dirty="0"/>
+            <a:endParaRPr lang="en-US" sz="1100" dirty="0"/>
           </a:p>
         </p:txBody>
       </p:sp>
       <p:sp>
         <p:nvSpPr>
-          <p:cNvPr id="9" name="Shape 7"/>
+          <p:cNvPr id="8" name="Shape 6"/>
           <p:cNvSpPr/>
           <p:nvPr/>
         </p:nvSpPr>
         <p:spPr>
           <a:xfrm>
-            <a:off x="5394960" y="1655064"/>
-            <a:ext cx="228600" cy="0"/>
-          </a:xfrm>
-          <a:prstGeom prst="line">
-            <a:avLst/>
-          </a:prstGeom>
-          <a:noFill/>
-          <a:ln w="19050">
-            <a:solidFill>
-              <a:srgbClr val="555555"/>
-            </a:solidFill>
-            <a:prstDash val="solid"/>
-            <a:tailEnd type="triangle"/>
-          </a:ln>
-        </p:spPr>
-      </p:sp>
-      <p:sp>
-        <p:nvSpPr>
-          <p:cNvPr id="10" name="Shape 8"/>
-          <p:cNvSpPr/>
-          <p:nvPr/>
-        </p:nvSpPr>
-        <p:spPr>
-          <a:xfrm>
-            <a:off x="5692140" y="1234440"/>
-            <a:ext cx="2194560" cy="960120"/>
+            <a:off x="4343400" y="1325880"/>
+            <a:ext cx="1600200" cy="1005840"/>
           </a:xfrm>
           <a:prstGeom prst="diamond">
             <a:avLst/>
           </a:prstGeom>
           <a:solidFill>
-            <a:srgbClr val="FFF3CD"/>
+            <a:srgbClr val="E7E9F3"/>
           </a:solidFill>
           <a:ln w="12700">
             <a:solidFill>
@@ -1736,14 +1690,14 @@
       </p:sp>
       <p:sp>
         <p:nvSpPr>
-          <p:cNvPr id="11" name="Text 9"/>
+          <p:cNvPr id="9" name="Text 7"/>
           <p:cNvSpPr txBox="1"/>
           <p:nvPr/>
         </p:nvSpPr>
         <p:spPr>
           <a:xfrm>
-            <a:off x="5692140" y="1234440"/>
-            <a:ext cx="2194560" cy="960120"/>
+            <a:off x="4343400" y="1325880"/>
+            <a:ext cx="1600200" cy="1005840"/>
           </a:xfrm>
           <a:prstGeom prst="rect">
             <a:avLst/>
@@ -1752,58 +1706,139 @@
           <a:ln/>
         </p:spPr>
         <p:txBody>
-          <a:bodyPr wrap="square" lIns="12700" tIns="12700" rIns="12700" bIns="12700" rtlCol="0" anchor="ctr"/>
+          <a:bodyPr wrap="square" lIns="0" tIns="0" rIns="0" bIns="0" rtlCol="0" anchor="ctr"/>
           <a:lstStyle/>
           <a:p>
             <a:pPr algn="ctr" indent="0" marL="0">
               <a:buNone/>
             </a:pPr>
             <a:r>
-              <a:rPr lang="en-US" sz="900" dirty="0">
+              <a:rPr lang="en-US" sz="1100" b="1" dirty="0">
                 <a:solidFill>
-                  <a:srgbClr val="202020"/>
+                  <a:srgbClr val="1E2761"/>
                 </a:solidFill>
                 <a:latin typeface="Calibri" pitchFamily="34" charset="0"/>
-                <a:ea typeface="Calibri" pitchFamily="34" charset="-122"/>
-                <a:cs typeface="Calibri" pitchFamily="34" charset="-120"/>
+                <a:ea typeface="Calibri" pitchFamily="34"/>
+                <a:cs typeface="Calibri" pitchFamily="34"/>
               </a:rPr>
               <a:t>Within 30-day</a:t>
             </a:r>
-            <a:endParaRPr lang="en-US" sz="900" dirty="0"/>
+            <a:endParaRPr lang="en-US" sz="1100" dirty="0"/>
           </a:p>
           <a:p>
             <a:pPr algn="ctr" indent="0" marL="0">
               <a:buNone/>
             </a:pPr>
             <a:r>
-              <a:rPr lang="en-US" sz="900" dirty="0">
+              <a:rPr lang="en-US" sz="1100" b="1" dirty="0">
                 <a:solidFill>
-                  <a:srgbClr val="202020"/>
+                  <a:srgbClr val="1E2761"/>
                 </a:solidFill>
                 <a:latin typeface="Calibri" pitchFamily="34" charset="0"/>
-                <a:ea typeface="Calibri" pitchFamily="34" charset="-122"/>
-                <a:cs typeface="Calibri" pitchFamily="34" charset="-120"/>
+                <a:ea typeface="Calibri" pitchFamily="34"/>
+                <a:cs typeface="Calibri" pitchFamily="34"/>
               </a:rPr>
-              <a:t>window, not final-sale,</a:t>
+              <a:t>window, not final-</a:t>
             </a:r>
-            <a:endParaRPr lang="en-US" sz="900" dirty="0"/>
+            <a:endParaRPr lang="en-US" sz="1100" dirty="0"/>
           </a:p>
           <a:p>
             <a:pPr algn="ctr" indent="0" marL="0">
               <a:buNone/>
             </a:pPr>
             <a:r>
-              <a:rPr lang="en-US" sz="900" dirty="0">
+              <a:rPr lang="en-US" sz="1100" b="1" dirty="0">
                 <a:solidFill>
-                  <a:srgbClr val="202020"/>
+                  <a:srgbClr val="1E2761"/>
                 </a:solidFill>
                 <a:latin typeface="Calibri" pitchFamily="34" charset="0"/>
-                <a:ea typeface="Calibri" pitchFamily="34" charset="-122"/>
-                <a:cs typeface="Calibri" pitchFamily="34" charset="-120"/>
+                <a:ea typeface="Calibri" pitchFamily="34"/>
+                <a:cs typeface="Calibri" pitchFamily="34"/>
               </a:rPr>
-              <a:t>qty OK?</a:t>
+              <a:t>sale, qty OK?</a:t>
             </a:r>
-            <a:endParaRPr lang="en-US" sz="900" dirty="0"/>
+            <a:endParaRPr lang="en-US" sz="1100" dirty="0"/>
+          </a:p>
+        </p:txBody>
+      </p:sp>
+      <p:sp>
+        <p:nvSpPr>
+          <p:cNvPr id="10" name="Shape 8"/>
+          <p:cNvSpPr/>
+          <p:nvPr/>
+        </p:nvSpPr>
+        <p:spPr>
+          <a:xfrm>
+            <a:off x="6309360" y="1325880"/>
+            <a:ext cx="1600200" cy="1005840"/>
+          </a:xfrm>
+          <a:prstGeom prst="diamond">
+            <a:avLst/>
+          </a:prstGeom>
+          <a:solidFill>
+            <a:srgbClr val="E7E9F3"/>
+          </a:solidFill>
+          <a:ln w="12700">
+            <a:solidFill>
+              <a:srgbClr val="1E2761"/>
+            </a:solidFill>
+            <a:prstDash val="solid"/>
+          </a:ln>
+        </p:spPr>
+      </p:sp>
+      <p:sp>
+        <p:nvSpPr>
+          <p:cNvPr id="11" name="Text 9"/>
+          <p:cNvSpPr txBox="1"/>
+          <p:nvPr/>
+        </p:nvSpPr>
+        <p:spPr>
+          <a:xfrm>
+            <a:off x="6309360" y="1325880"/>
+            <a:ext cx="1600200" cy="1005840"/>
+          </a:xfrm>
+          <a:prstGeom prst="rect">
+            <a:avLst/>
+          </a:prstGeom>
+          <a:noFill/>
+          <a:ln/>
+        </p:spPr>
+        <p:txBody>
+          <a:bodyPr wrap="square" lIns="0" tIns="0" rIns="0" bIns="0" rtlCol="0" anchor="ctr"/>
+          <a:lstStyle/>
+          <a:p>
+            <a:pPr algn="ctr" indent="0" marL="0">
+              <a:buNone/>
+            </a:pPr>
+            <a:r>
+              <a:rPr lang="en-US" sz="1100" b="1" dirty="0">
+                <a:solidFill>
+                  <a:srgbClr val="1E2761"/>
+                </a:solidFill>
+                <a:latin typeface="Calibri" pitchFamily="34" charset="0"/>
+                <a:ea typeface="Calibri" pitchFamily="34"/>
+                <a:cs typeface="Calibri" pitchFamily="34"/>
+              </a:rPr>
+              <a:t>Reason = Defective</a:t>
+            </a:r>
+            <a:endParaRPr lang="en-US" sz="1100" dirty="0"/>
+          </a:p>
+          <a:p>
+            <a:pPr algn="ctr" indent="0" marL="0">
+              <a:buNone/>
+            </a:pPr>
+            <a:r>
+              <a:rPr lang="en-US" sz="1100" b="1" dirty="0">
+                <a:solidFill>
+                  <a:srgbClr val="1E2761"/>
+                </a:solidFill>
+                <a:latin typeface="Calibri" pitchFamily="34" charset="0"/>
+                <a:ea typeface="Calibri" pitchFamily="34"/>
+                <a:cs typeface="Calibri" pitchFamily="34"/>
+              </a:rPr>
+              <a:t>AND value &gt; $200?</a:t>
+            </a:r>
+            <a:endParaRPr lang="en-US" sz="1100" dirty="0"/>
           </a:p>
         </p:txBody>
       </p:sp>
@@ -1815,16 +1850,82 @@
         </p:nvSpPr>
         <p:spPr>
           <a:xfrm>
-            <a:off x="7955280" y="1655064"/>
-            <a:ext cx="228600" cy="0"/>
+            <a:off x="8275320" y="1463040"/>
+            <a:ext cx="1691640" cy="731520"/>
+          </a:xfrm>
+          <a:prstGeom prst="roundRect">
+            <a:avLst>
+              <a:gd name="adj" fmla="val 6875"/>
+            </a:avLst>
+          </a:prstGeom>
+          <a:solidFill>
+            <a:srgbClr val="0E8C86"/>
+          </a:solidFill>
+          <a:ln w="12700">
+            <a:solidFill>
+              <a:srgbClr val="D5D9E0"/>
+            </a:solidFill>
+            <a:prstDash val="solid"/>
+          </a:ln>
+        </p:spPr>
+      </p:sp>
+      <p:sp>
+        <p:nvSpPr>
+          <p:cNvPr id="13" name="Text 11"/>
+          <p:cNvSpPr txBox="1"/>
+          <p:nvPr/>
+        </p:nvSpPr>
+        <p:spPr>
+          <a:xfrm>
+            <a:off x="8275320" y="1463040"/>
+            <a:ext cx="1691640" cy="731520"/>
+          </a:xfrm>
+          <a:prstGeom prst="rect">
+            <a:avLst/>
+          </a:prstGeom>
+          <a:noFill/>
+          <a:ln/>
+        </p:spPr>
+        <p:txBody>
+          <a:bodyPr wrap="square" lIns="0" tIns="0" rIns="0" bIns="0" rtlCol="0" anchor="ctr"/>
+          <a:lstStyle/>
+          <a:p>
+            <a:pPr algn="ctr" indent="0" marL="0">
+              <a:buNone/>
+            </a:pPr>
+            <a:r>
+              <a:rPr lang="en-US" sz="1100" b="1" dirty="0">
+                <a:solidFill>
+                  <a:srgbClr val="FFFFFF"/>
+                </a:solidFill>
+                <a:latin typeface="Calibri" pitchFamily="34" charset="0"/>
+                <a:ea typeface="Calibri" pitchFamily="34"/>
+                <a:cs typeface="Calibri" pitchFamily="34"/>
+              </a:rPr>
+              <a:t>Approved</a:t>
+            </a:r>
+            <a:endParaRPr lang="en-US" sz="1100" dirty="0"/>
+          </a:p>
+        </p:txBody>
+      </p:sp>
+      <p:sp>
+        <p:nvSpPr>
+          <p:cNvPr id="14" name="Shape 12"/>
+          <p:cNvSpPr/>
+          <p:nvPr/>
+        </p:nvSpPr>
+        <p:spPr>
+          <a:xfrm>
+            <a:off x="2148840" y="1828800"/>
+            <a:ext cx="182880" cy="9144"/>
           </a:xfrm>
           <a:prstGeom prst="line">
             <a:avLst/>
           </a:prstGeom>
           <a:noFill/>
-          <a:ln w="19050">
+          <a:ln w="12700">
             <a:solidFill>
-              <a:srgbClr val="1E6B4E"/>
+              <a:srgbClr val="1E2761"/>
             </a:solidFill>
             <a:prstDash val="solid"/>
             <a:tailEnd type="triangle"/>
@@ -1833,14 +1934,354 @@
       </p:sp>
       <p:sp>
         <p:nvSpPr>
-          <p:cNvPr id="13" name="Text 11"/>
+          <p:cNvPr id="15" name="Shape 13"/>
+          <p:cNvSpPr/>
+          <p:nvPr/>
+        </p:nvSpPr>
+        <p:spPr>
+          <a:xfrm>
+            <a:off x="4114800" y="1828800"/>
+            <a:ext cx="228600" cy="9144"/>
+          </a:xfrm>
+          <a:prstGeom prst="line">
+            <a:avLst/>
+          </a:prstGeom>
+          <a:noFill/>
+          <a:ln w="12700">
+            <a:solidFill>
+              <a:srgbClr val="1E2761"/>
+            </a:solidFill>
+            <a:prstDash val="solid"/>
+            <a:tailEnd type="triangle"/>
+          </a:ln>
+        </p:spPr>
+      </p:sp>
+      <p:sp>
+        <p:nvSpPr>
+          <p:cNvPr id="16" name="Shape 14"/>
+          <p:cNvSpPr/>
+          <p:nvPr/>
+        </p:nvSpPr>
+        <p:spPr>
+          <a:xfrm>
+            <a:off x="5943600" y="1828800"/>
+            <a:ext cx="365760" cy="9144"/>
+          </a:xfrm>
+          <a:prstGeom prst="line">
+            <a:avLst/>
+          </a:prstGeom>
+          <a:noFill/>
+          <a:ln w="12700">
+            <a:solidFill>
+              <a:srgbClr val="1E2761"/>
+            </a:solidFill>
+            <a:prstDash val="solid"/>
+            <a:tailEnd type="triangle"/>
+          </a:ln>
+        </p:spPr>
+      </p:sp>
+      <p:sp>
+        <p:nvSpPr>
+          <p:cNvPr id="17" name="Text 15"/>
           <p:cNvSpPr txBox="1"/>
           <p:nvPr/>
         </p:nvSpPr>
         <p:spPr>
           <a:xfrm>
-            <a:off x="8092440" y="1051560"/>
-            <a:ext cx="548640" cy="228600"/>
+            <a:off x="5943600" y="1051560"/>
+            <a:ext cx="365760" cy="228600"/>
+          </a:xfrm>
+          <a:prstGeom prst="rect">
+            <a:avLst/>
+          </a:prstGeom>
+          <a:noFill/>
+          <a:ln/>
+        </p:spPr>
+        <p:txBody>
+          <a:bodyPr wrap="square" lIns="0" tIns="0" rIns="0" bIns="0" rtlCol="0" anchor="ctr"/>
+          <a:lstStyle/>
+          <a:p>
+            <a:pPr algn="ctr" indent="0" marL="0">
+              <a:buNone/>
+            </a:pPr>
+            <a:r>
+              <a:rPr lang="en-US" sz="950" b="1" dirty="0">
+                <a:solidFill>
+                  <a:srgbClr val="1E2761"/>
+                </a:solidFill>
+                <a:latin typeface="Calibri" pitchFamily="34" charset="0"/>
+                <a:ea typeface="Calibri" pitchFamily="34"/>
+                <a:cs typeface="Calibri" pitchFamily="34"/>
+              </a:rPr>
+              <a:t>Yes</a:t>
+            </a:r>
+            <a:endParaRPr lang="en-US" sz="950" dirty="0"/>
+          </a:p>
+        </p:txBody>
+      </p:sp>
+      <p:sp>
+        <p:nvSpPr>
+          <p:cNvPr id="18" name="Shape 16"/>
+          <p:cNvSpPr/>
+          <p:nvPr/>
+        </p:nvSpPr>
+        <p:spPr>
+          <a:xfrm>
+            <a:off x="7909560" y="1828800"/>
+            <a:ext cx="365760" cy="9144"/>
+          </a:xfrm>
+          <a:prstGeom prst="line">
+            <a:avLst/>
+          </a:prstGeom>
+          <a:noFill/>
+          <a:ln w="12700">
+            <a:solidFill>
+              <a:srgbClr val="1E2761"/>
+            </a:solidFill>
+            <a:prstDash val="solid"/>
+            <a:tailEnd type="triangle"/>
+          </a:ln>
+        </p:spPr>
+      </p:sp>
+      <p:sp>
+        <p:nvSpPr>
+          <p:cNvPr id="19" name="Text 17"/>
+          <p:cNvSpPr txBox="1"/>
+          <p:nvPr/>
+        </p:nvSpPr>
+        <p:spPr>
+          <a:xfrm>
+            <a:off x="7909560" y="1051560"/>
+            <a:ext cx="365760" cy="228600"/>
+          </a:xfrm>
+          <a:prstGeom prst="rect">
+            <a:avLst/>
+          </a:prstGeom>
+          <a:noFill/>
+          <a:ln/>
+        </p:spPr>
+        <p:txBody>
+          <a:bodyPr wrap="square" lIns="0" tIns="0" rIns="0" bIns="0" rtlCol="0" anchor="ctr"/>
+          <a:lstStyle/>
+          <a:p>
+            <a:pPr algn="ctr" indent="0" marL="0">
+              <a:buNone/>
+            </a:pPr>
+            <a:r>
+              <a:rPr lang="en-US" sz="950" b="1" dirty="0">
+                <a:solidFill>
+                  <a:srgbClr val="1E2761"/>
+                </a:solidFill>
+                <a:latin typeface="Calibri" pitchFamily="34" charset="0"/>
+                <a:ea typeface="Calibri" pitchFamily="34"/>
+                <a:cs typeface="Calibri" pitchFamily="34"/>
+              </a:rPr>
+              <a:t>No</a:t>
+            </a:r>
+            <a:endParaRPr lang="en-US" sz="950" dirty="0"/>
+          </a:p>
+        </p:txBody>
+      </p:sp>
+      <p:sp>
+        <p:nvSpPr>
+          <p:cNvPr id="20" name="Shape 18"/>
+          <p:cNvSpPr/>
+          <p:nvPr/>
+        </p:nvSpPr>
+        <p:spPr>
+          <a:xfrm>
+            <a:off x="4320540" y="2697480"/>
+            <a:ext cx="1645920" cy="731520"/>
+          </a:xfrm>
+          <a:prstGeom prst="roundRect">
+            <a:avLst>
+              <a:gd name="adj" fmla="val 6875"/>
+            </a:avLst>
+          </a:prstGeom>
+          <a:solidFill>
+            <a:srgbClr val="FFFFFF"/>
+          </a:solidFill>
+          <a:ln w="12700">
+            <a:solidFill>
+              <a:srgbClr val="1E2761"/>
+            </a:solidFill>
+            <a:prstDash val="solid"/>
+          </a:ln>
+        </p:spPr>
+      </p:sp>
+      <p:sp>
+        <p:nvSpPr>
+          <p:cNvPr id="21" name="Text 19"/>
+          <p:cNvSpPr txBox="1"/>
+          <p:nvPr/>
+        </p:nvSpPr>
+        <p:spPr>
+          <a:xfrm>
+            <a:off x="4320540" y="2697480"/>
+            <a:ext cx="1645920" cy="731520"/>
+          </a:xfrm>
+          <a:prstGeom prst="rect">
+            <a:avLst/>
+          </a:prstGeom>
+          <a:noFill/>
+          <a:ln/>
+        </p:spPr>
+        <p:txBody>
+          <a:bodyPr wrap="square" lIns="0" tIns="0" rIns="0" bIns="0" rtlCol="0" anchor="ctr"/>
+          <a:lstStyle/>
+          <a:p>
+            <a:pPr algn="ctr" indent="0" marL="0">
+              <a:buNone/>
+            </a:pPr>
+            <a:r>
+              <a:rPr lang="en-US" sz="1100" b="1" dirty="0">
+                <a:solidFill>
+                  <a:srgbClr val="1E2761"/>
+                </a:solidFill>
+                <a:latin typeface="Calibri" pitchFamily="34" charset="0"/>
+                <a:ea typeface="Calibri" pitchFamily="34"/>
+                <a:cs typeface="Calibri" pitchFamily="34"/>
+              </a:rPr>
+              <a:t>Auto-Reject</a:t>
+            </a:r>
+            <a:endParaRPr lang="en-US" sz="1100" dirty="0"/>
+          </a:p>
+          <a:p>
+            <a:pPr algn="ctr" indent="0" marL="0">
+              <a:buNone/>
+            </a:pPr>
+            <a:r>
+              <a:rPr lang="en-US" sz="1100" b="1" dirty="0">
+                <a:solidFill>
+                  <a:srgbClr val="1E2761"/>
+                </a:solidFill>
+                <a:latin typeface="Calibri" pitchFamily="34" charset="0"/>
+                <a:ea typeface="Calibri" pitchFamily="34"/>
+                <a:cs typeface="Calibri" pitchFamily="34"/>
+              </a:rPr>
+              <a:t>(BR-1 / BR-2 / BR-3)</a:t>
+            </a:r>
+            <a:endParaRPr lang="en-US" sz="1100" dirty="0"/>
+          </a:p>
+        </p:txBody>
+      </p:sp>
+      <p:sp>
+        <p:nvSpPr>
+          <p:cNvPr id="22" name="Shape 20"/>
+          <p:cNvSpPr/>
+          <p:nvPr/>
+        </p:nvSpPr>
+        <p:spPr>
+          <a:xfrm>
+            <a:off x="6103620" y="2697480"/>
+            <a:ext cx="1920240" cy="731520"/>
+          </a:xfrm>
+          <a:prstGeom prst="roundRect">
+            <a:avLst>
+              <a:gd name="adj" fmla="val 6875"/>
+            </a:avLst>
+          </a:prstGeom>
+          <a:solidFill>
+            <a:srgbClr val="1E2761"/>
+          </a:solidFill>
+          <a:ln w="12700">
+            <a:solidFill>
+              <a:srgbClr val="D5D9E0"/>
+            </a:solidFill>
+            <a:prstDash val="solid"/>
+          </a:ln>
+        </p:spPr>
+      </p:sp>
+      <p:sp>
+        <p:nvSpPr>
+          <p:cNvPr id="23" name="Text 21"/>
+          <p:cNvSpPr txBox="1"/>
+          <p:nvPr/>
+        </p:nvSpPr>
+        <p:spPr>
+          <a:xfrm>
+            <a:off x="6103620" y="2697480"/>
+            <a:ext cx="1920240" cy="731520"/>
+          </a:xfrm>
+          <a:prstGeom prst="rect">
+            <a:avLst/>
+          </a:prstGeom>
+          <a:noFill/>
+          <a:ln/>
+        </p:spPr>
+        <p:txBody>
+          <a:bodyPr wrap="square" lIns="0" tIns="0" rIns="0" bIns="0" rtlCol="0" anchor="ctr"/>
+          <a:lstStyle/>
+          <a:p>
+            <a:pPr algn="ctr" indent="0" marL="0">
+              <a:buNone/>
+            </a:pPr>
+            <a:r>
+              <a:rPr lang="en-US" sz="1100" dirty="0">
+                <a:solidFill>
+                  <a:srgbClr val="FFFFFF"/>
+                </a:solidFill>
+                <a:latin typeface="Calibri" pitchFamily="34" charset="0"/>
+                <a:ea typeface="Calibri" pitchFamily="34"/>
+                <a:cs typeface="Calibri" pitchFamily="34"/>
+              </a:rPr>
+              <a:t>Route to Supervisor</a:t>
+            </a:r>
+            <a:endParaRPr lang="en-US" sz="1100" dirty="0"/>
+          </a:p>
+          <a:p>
+            <a:pPr algn="ctr" indent="0" marL="0">
+              <a:buNone/>
+            </a:pPr>
+            <a:r>
+              <a:rPr lang="en-US" sz="1100" dirty="0">
+                <a:solidFill>
+                  <a:srgbClr val="FFFFFF"/>
+                </a:solidFill>
+                <a:latin typeface="Calibri" pitchFamily="34" charset="0"/>
+                <a:ea typeface="Calibri" pitchFamily="34"/>
+                <a:cs typeface="Calibri" pitchFamily="34"/>
+              </a:rPr>
+              <a:t>for review</a:t>
+            </a:r>
+            <a:endParaRPr lang="en-US" sz="1100" dirty="0"/>
+          </a:p>
+        </p:txBody>
+      </p:sp>
+      <p:sp>
+        <p:nvSpPr>
+          <p:cNvPr id="24" name="Shape 22"/>
+          <p:cNvSpPr/>
+          <p:nvPr/>
+        </p:nvSpPr>
+        <p:spPr>
+          <a:xfrm>
+            <a:off x="5143500" y="2331720"/>
+            <a:ext cx="9144" cy="365760"/>
+          </a:xfrm>
+          <a:prstGeom prst="line">
+            <a:avLst/>
+          </a:prstGeom>
+          <a:noFill/>
+          <a:ln w="12700">
+            <a:solidFill>
+              <a:srgbClr val="1E2761"/>
+            </a:solidFill>
+            <a:prstDash val="solid"/>
+            <a:tailEnd type="triangle"/>
+          </a:ln>
+        </p:spPr>
+      </p:sp>
+      <p:sp>
+        <p:nvSpPr>
+          <p:cNvPr id="25" name="Text 23"/>
+          <p:cNvSpPr txBox="1"/>
+          <p:nvPr/>
+        </p:nvSpPr>
+        <p:spPr>
+          <a:xfrm>
+            <a:off x="3063240" y="2404872"/>
+            <a:ext cx="1645920" cy="228600"/>
           </a:xfrm>
           <a:prstGeom prst="rect">
             <a:avLst/>
@@ -1856,132 +2297,54 @@
               <a:buNone/>
             </a:pPr>
             <a:r>
-              <a:rPr lang="en-US" sz="900" b="1" dirty="0">
+              <a:rPr lang="en-US" sz="950" b="1" dirty="0">
                 <a:solidFill>
-                  <a:srgbClr val="1E6B4E"/>
+                  <a:srgbClr val="1E2761"/>
                 </a:solidFill>
+                <a:latin typeface="Calibri" pitchFamily="34" charset="0"/>
+                <a:ea typeface="Calibri" pitchFamily="34"/>
+                <a:cs typeface="Calibri" pitchFamily="34"/>
               </a:rPr>
-              <a:t>Yes</a:t>
+              <a:t>No</a:t>
             </a:r>
-            <a:endParaRPr lang="en-US" sz="900" dirty="0"/>
+            <a:endParaRPr lang="en-US" sz="950" dirty="0"/>
           </a:p>
         </p:txBody>
       </p:sp>
       <p:sp>
         <p:nvSpPr>
-          <p:cNvPr id="14" name="Shape 12"/>
+          <p:cNvPr id="26" name="Shape 24"/>
           <p:cNvSpPr/>
           <p:nvPr/>
         </p:nvSpPr>
         <p:spPr>
           <a:xfrm>
-            <a:off x="8252460" y="1234440"/>
-            <a:ext cx="2194560" cy="960120"/>
+            <a:off x="7109460" y="2331720"/>
+            <a:ext cx="9144" cy="365760"/>
           </a:xfrm>
-          <a:prstGeom prst="diamond">
+          <a:prstGeom prst="line">
             <a:avLst/>
           </a:prstGeom>
-          <a:solidFill>
-            <a:srgbClr val="FFF3CD"/>
-          </a:solidFill>
+          <a:noFill/>
           <a:ln w="12700">
             <a:solidFill>
               <a:srgbClr val="1E2761"/>
             </a:solidFill>
             <a:prstDash val="solid"/>
-          </a:ln>
-        </p:spPr>
-      </p:sp>
-      <p:sp>
-        <p:nvSpPr>
-          <p:cNvPr id="15" name="Text 13"/>
-          <p:cNvSpPr txBox="1"/>
-          <p:nvPr/>
-        </p:nvSpPr>
-        <p:spPr>
-          <a:xfrm>
-            <a:off x="8252460" y="1234440"/>
-            <a:ext cx="2194560" cy="960120"/>
-          </a:xfrm>
-          <a:prstGeom prst="rect">
-            <a:avLst/>
-          </a:prstGeom>
-          <a:noFill/>
-          <a:ln/>
-        </p:spPr>
-        <p:txBody>
-          <a:bodyPr wrap="square" lIns="12700" tIns="12700" rIns="12700" bIns="12700" rtlCol="0" anchor="ctr"/>
-          <a:lstStyle/>
-          <a:p>
-            <a:pPr algn="ctr" indent="0" marL="0">
-              <a:buNone/>
-            </a:pPr>
-            <a:r>
-              <a:rPr lang="en-US" sz="900" dirty="0">
-                <a:solidFill>
-                  <a:srgbClr val="202020"/>
-                </a:solidFill>
-                <a:latin typeface="Calibri" pitchFamily="34" charset="0"/>
-                <a:ea typeface="Calibri" pitchFamily="34" charset="-122"/>
-                <a:cs typeface="Calibri" pitchFamily="34" charset="-120"/>
-              </a:rPr>
-              <a:t>Reason = Defective</a:t>
-            </a:r>
-            <a:endParaRPr lang="en-US" sz="900" dirty="0"/>
-          </a:p>
-          <a:p>
-            <a:pPr algn="ctr" indent="0" marL="0">
-              <a:buNone/>
-            </a:pPr>
-            <a:r>
-              <a:rPr lang="en-US" sz="900" dirty="0">
-                <a:solidFill>
-                  <a:srgbClr val="202020"/>
-                </a:solidFill>
-                <a:latin typeface="Calibri" pitchFamily="34" charset="0"/>
-                <a:ea typeface="Calibri" pitchFamily="34" charset="-122"/>
-                <a:cs typeface="Calibri" pitchFamily="34" charset="-120"/>
-              </a:rPr>
-              <a:t>AND value &gt; $200?</a:t>
-            </a:r>
-            <a:endParaRPr lang="en-US" sz="900" dirty="0"/>
-          </a:p>
-        </p:txBody>
-      </p:sp>
-      <p:sp>
-        <p:nvSpPr>
-          <p:cNvPr id="16" name="Shape 14"/>
-          <p:cNvSpPr/>
-          <p:nvPr/>
-        </p:nvSpPr>
-        <p:spPr>
-          <a:xfrm>
-            <a:off x="10515600" y="1655064"/>
-            <a:ext cx="0" cy="0"/>
-          </a:xfrm>
-          <a:prstGeom prst="line">
-            <a:avLst/>
-          </a:prstGeom>
-          <a:noFill/>
-          <a:ln w="19050">
-            <a:solidFill>
-              <a:srgbClr val="1E6B4E"/>
-            </a:solidFill>
-            <a:prstDash val="solid"/>
             <a:tailEnd type="triangle"/>
           </a:ln>
         </p:spPr>
       </p:sp>
       <p:sp>
         <p:nvSpPr>
-          <p:cNvPr id="17" name="Text 15"/>
+          <p:cNvPr id="27" name="Text 25"/>
           <p:cNvSpPr txBox="1"/>
           <p:nvPr/>
         </p:nvSpPr>
         <p:spPr>
           <a:xfrm>
-            <a:off x="10652760" y="1051560"/>
-            <a:ext cx="548640" cy="228600"/>
+            <a:off x="7955280" y="2404872"/>
+            <a:ext cx="1645920" cy="228600"/>
           </a:xfrm>
           <a:prstGeom prst="rect">
             <a:avLst/>
@@ -1997,124 +2360,57 @@
               <a:buNone/>
             </a:pPr>
             <a:r>
-              <a:rPr lang="en-US" sz="900" b="1" dirty="0">
+              <a:rPr lang="en-US" sz="950" b="1" dirty="0">
                 <a:solidFill>
-                  <a:srgbClr val="1E6B4E"/>
+                  <a:srgbClr val="1E2761"/>
                 </a:solidFill>
+                <a:latin typeface="Calibri" pitchFamily="34" charset="0"/>
+                <a:ea typeface="Calibri" pitchFamily="34"/>
+                <a:cs typeface="Calibri" pitchFamily="34"/>
               </a:rPr>
-              <a:t>No</a:t>
+              <a:t>Yes</a:t>
             </a:r>
-            <a:endParaRPr lang="en-US" sz="900" dirty="0"/>
+            <a:endParaRPr lang="en-US" sz="950" dirty="0"/>
           </a:p>
         </p:txBody>
       </p:sp>
       <p:sp>
         <p:nvSpPr>
-          <p:cNvPr id="18" name="Shape 16"/>
+          <p:cNvPr id="28" name="Shape 26"/>
           <p:cNvSpPr/>
           <p:nvPr/>
         </p:nvSpPr>
         <p:spPr>
           <a:xfrm>
-            <a:off x="10515600" y="1371600"/>
-            <a:ext cx="1188720" cy="566928"/>
+            <a:off x="5280660" y="3794760"/>
+            <a:ext cx="1691640" cy="685800"/>
           </a:xfrm>
           <a:prstGeom prst="roundRect">
             <a:avLst>
-              <a:gd name="adj" fmla="val 12903"/>
+              <a:gd name="adj" fmla="val 7333"/>
             </a:avLst>
           </a:prstGeom>
           <a:solidFill>
-            <a:srgbClr val="E4F2EB"/>
+            <a:srgbClr val="0E8C86"/>
           </a:solidFill>
           <a:ln w="12700">
             <a:solidFill>
-              <a:srgbClr val="1E2761"/>
+              <a:srgbClr val="D5D9E0"/>
             </a:solidFill>
             <a:prstDash val="solid"/>
           </a:ln>
-          <a:effectLst>
-            <a:outerShdw sx="100000" sy="100000" kx="0" ky="0" algn="bl" rotWithShape="0" blurRad="38100" dist="25400" dir="5400000">
-              <a:srgbClr val="000000">
-                <a:alpha val="18000"/>
-              </a:srgbClr>
-            </a:outerShdw>
-          </a:effectLst>
         </p:spPr>
       </p:sp>
       <p:sp>
         <p:nvSpPr>
-          <p:cNvPr id="19" name="Text 17"/>
+          <p:cNvPr id="29" name="Text 27"/>
           <p:cNvSpPr txBox="1"/>
           <p:nvPr/>
         </p:nvSpPr>
         <p:spPr>
           <a:xfrm>
-            <a:off x="10515600" y="1371600"/>
-            <a:ext cx="1188720" cy="566928"/>
-          </a:xfrm>
-          <a:prstGeom prst="rect">
-            <a:avLst/>
-          </a:prstGeom>
-          <a:noFill/>
-          <a:ln/>
-        </p:spPr>
-        <p:txBody>
-          <a:bodyPr wrap="square" lIns="25400" tIns="25400" rIns="25400" bIns="25400" rtlCol="0" anchor="ctr"/>
-          <a:lstStyle/>
-          <a:p>
-            <a:pPr algn="ctr" indent="0" marL="0">
-              <a:buNone/>
-            </a:pPr>
-            <a:r>
-              <a:rPr lang="en-US" sz="1050" b="1" dirty="0">
-                <a:solidFill>
-                  <a:srgbClr val="1E6B4E"/>
-                </a:solidFill>
-                <a:latin typeface="Calibri" pitchFamily="34" charset="0"/>
-                <a:ea typeface="Calibri" pitchFamily="34" charset="-122"/>
-                <a:cs typeface="Calibri" pitchFamily="34" charset="-120"/>
-              </a:rPr>
-              <a:t>Auto-Approved</a:t>
-            </a:r>
-            <a:endParaRPr lang="en-US" sz="1050" dirty="0"/>
-          </a:p>
-        </p:txBody>
-      </p:sp>
-      <p:sp>
-        <p:nvSpPr>
-          <p:cNvPr id="20" name="Shape 18"/>
-          <p:cNvSpPr/>
-          <p:nvPr/>
-        </p:nvSpPr>
-        <p:spPr>
-          <a:xfrm>
-            <a:off x="9349740" y="2194560"/>
-            <a:ext cx="0" cy="548640"/>
-          </a:xfrm>
-          <a:prstGeom prst="line">
-            <a:avLst/>
-          </a:prstGeom>
-          <a:noFill/>
-          <a:ln w="19050">
-            <a:solidFill>
-              <a:srgbClr val="8A6D00"/>
-            </a:solidFill>
-            <a:prstDash val="solid"/>
-            <a:tailEnd type="triangle"/>
-          </a:ln>
-        </p:spPr>
-      </p:sp>
-      <p:sp>
-        <p:nvSpPr>
-          <p:cNvPr id="21" name="Text 19"/>
-          <p:cNvSpPr txBox="1"/>
-          <p:nvPr/>
-        </p:nvSpPr>
-        <p:spPr>
-          <a:xfrm>
-            <a:off x="9441180" y="2331720"/>
-            <a:ext cx="548640" cy="228600"/>
+            <a:off x="5280660" y="3794760"/>
+            <a:ext cx="1691640" cy="685800"/>
           </a:xfrm>
           <a:prstGeom prst="rect">
             <a:avLst/>
@@ -2126,39 +2422,59 @@
           <a:bodyPr wrap="square" lIns="0" tIns="0" rIns="0" bIns="0" rtlCol="0" anchor="ctr"/>
           <a:lstStyle/>
           <a:p>
-            <a:pPr indent="0" marL="0">
+            <a:pPr algn="ctr" indent="0" marL="0">
               <a:buNone/>
             </a:pPr>
             <a:r>
-              <a:rPr lang="en-US" sz="900" b="1" dirty="0">
+              <a:rPr lang="en-US" sz="1100" b="1" dirty="0">
                 <a:solidFill>
-                  <a:srgbClr val="8A6D00"/>
+                  <a:srgbClr val="FFFFFF"/>
                 </a:solidFill>
+                <a:latin typeface="Calibri" pitchFamily="34" charset="0"/>
+                <a:ea typeface="Calibri" pitchFamily="34"/>
+                <a:cs typeface="Calibri" pitchFamily="34"/>
               </a:rPr>
-              <a:t>Yes</a:t>
+              <a:t>Supervisor</a:t>
             </a:r>
-            <a:endParaRPr lang="en-US" sz="900" dirty="0"/>
+            <a:endParaRPr lang="en-US" sz="1100" dirty="0"/>
+          </a:p>
+          <a:p>
+            <a:pPr algn="ctr" indent="0" marL="0">
+              <a:buNone/>
+            </a:pPr>
+            <a:r>
+              <a:rPr lang="en-US" sz="1100" b="1" dirty="0">
+                <a:solidFill>
+                  <a:srgbClr val="FFFFFF"/>
+                </a:solidFill>
+                <a:latin typeface="Calibri" pitchFamily="34" charset="0"/>
+                <a:ea typeface="Calibri" pitchFamily="34"/>
+                <a:cs typeface="Calibri" pitchFamily="34"/>
+              </a:rPr>
+              <a:t>Approves</a:t>
+            </a:r>
+            <a:endParaRPr lang="en-US" sz="1100" dirty="0"/>
           </a:p>
         </p:txBody>
       </p:sp>
       <p:sp>
         <p:nvSpPr>
-          <p:cNvPr id="22" name="Shape 20"/>
+          <p:cNvPr id="30" name="Shape 28"/>
           <p:cNvSpPr/>
           <p:nvPr/>
         </p:nvSpPr>
         <p:spPr>
           <a:xfrm>
-            <a:off x="7909560" y="2743200"/>
-            <a:ext cx="2880360" cy="566928"/>
+            <a:off x="7246620" y="3794760"/>
+            <a:ext cx="1691640" cy="685800"/>
           </a:xfrm>
           <a:prstGeom prst="roundRect">
             <a:avLst>
-              <a:gd name="adj" fmla="val 12903"/>
+              <a:gd name="adj" fmla="val 7333"/>
             </a:avLst>
           </a:prstGeom>
           <a:solidFill>
-            <a:srgbClr val="FFF3CD"/>
+            <a:srgbClr val="FFFFFF"/>
           </a:solidFill>
           <a:ln w="12700">
             <a:solidFill>
@@ -2166,381 +2482,18 @@
             </a:solidFill>
             <a:prstDash val="solid"/>
           </a:ln>
-          <a:effectLst>
-            <a:outerShdw sx="100000" sy="100000" kx="0" ky="0" algn="bl" rotWithShape="0" blurRad="38100" dist="25400" dir="5400000">
-              <a:srgbClr val="000000">
-                <a:alpha val="18000"/>
-              </a:srgbClr>
-            </a:outerShdw>
-          </a:effectLst>
         </p:spPr>
       </p:sp>
       <p:sp>
         <p:nvSpPr>
-          <p:cNvPr id="23" name="Text 21"/>
+          <p:cNvPr id="31" name="Text 29"/>
           <p:cNvSpPr txBox="1"/>
           <p:nvPr/>
         </p:nvSpPr>
         <p:spPr>
           <a:xfrm>
-            <a:off x="7909560" y="2743200"/>
-            <a:ext cx="2880360" cy="566928"/>
-          </a:xfrm>
-          <a:prstGeom prst="rect">
-            <a:avLst/>
-          </a:prstGeom>
-          <a:noFill/>
-          <a:ln/>
-        </p:spPr>
-        <p:txBody>
-          <a:bodyPr wrap="square" lIns="25400" tIns="25400" rIns="25400" bIns="25400" rtlCol="0" anchor="ctr"/>
-          <a:lstStyle/>
-          <a:p>
-            <a:pPr algn="ctr" indent="0" marL="0">
-              <a:buNone/>
-            </a:pPr>
-            <a:r>
-              <a:rPr lang="en-US" sz="1050" dirty="0">
-                <a:solidFill>
-                  <a:srgbClr val="202020"/>
-                </a:solidFill>
-                <a:latin typeface="Calibri" pitchFamily="34" charset="0"/>
-                <a:ea typeface="Calibri" pitchFamily="34" charset="-122"/>
-                <a:cs typeface="Calibri" pitchFamily="34" charset="-120"/>
-              </a:rPr>
-              <a:t>Route to Supervisor</a:t>
-            </a:r>
-            <a:endParaRPr lang="en-US" sz="1050" dirty="0"/>
-          </a:p>
-          <a:p>
-            <a:pPr algn="ctr" indent="0" marL="0">
-              <a:buNone/>
-            </a:pPr>
-            <a:r>
-              <a:rPr lang="en-US" sz="1050" dirty="0">
-                <a:solidFill>
-                  <a:srgbClr val="202020"/>
-                </a:solidFill>
-                <a:latin typeface="Calibri" pitchFamily="34" charset="0"/>
-                <a:ea typeface="Calibri" pitchFamily="34" charset="-122"/>
-                <a:cs typeface="Calibri" pitchFamily="34" charset="-120"/>
-              </a:rPr>
-              <a:t>for review</a:t>
-            </a:r>
-            <a:endParaRPr lang="en-US" sz="1050" dirty="0"/>
-          </a:p>
-        </p:txBody>
-      </p:sp>
-      <p:sp>
-        <p:nvSpPr>
-          <p:cNvPr id="24" name="Shape 22"/>
-          <p:cNvSpPr/>
-          <p:nvPr/>
-        </p:nvSpPr>
-        <p:spPr>
-          <a:xfrm>
-            <a:off x="7360920" y="4041648"/>
-            <a:ext cx="1554480" cy="566928"/>
-          </a:xfrm>
-          <a:prstGeom prst="roundRect">
-            <a:avLst>
-              <a:gd name="adj" fmla="val 12903"/>
-            </a:avLst>
-          </a:prstGeom>
-          <a:solidFill>
-            <a:srgbClr val="E4F2EB"/>
-          </a:solidFill>
-          <a:ln w="12700">
-            <a:solidFill>
-              <a:srgbClr val="1E2761"/>
-            </a:solidFill>
-            <a:prstDash val="solid"/>
-          </a:ln>
-          <a:effectLst>
-            <a:outerShdw sx="100000" sy="100000" kx="0" ky="0" algn="bl" rotWithShape="0" blurRad="38100" dist="25400" dir="5400000">
-              <a:srgbClr val="000000">
-                <a:alpha val="18000"/>
-              </a:srgbClr>
-            </a:outerShdw>
-          </a:effectLst>
-        </p:spPr>
-      </p:sp>
-      <p:sp>
-        <p:nvSpPr>
-          <p:cNvPr id="25" name="Text 23"/>
-          <p:cNvSpPr txBox="1"/>
-          <p:nvPr/>
-        </p:nvSpPr>
-        <p:spPr>
-          <a:xfrm>
-            <a:off x="7360920" y="4041648"/>
-            <a:ext cx="1554480" cy="566928"/>
-          </a:xfrm>
-          <a:prstGeom prst="rect">
-            <a:avLst/>
-          </a:prstGeom>
-          <a:noFill/>
-          <a:ln/>
-        </p:spPr>
-        <p:txBody>
-          <a:bodyPr wrap="square" lIns="25400" tIns="25400" rIns="25400" bIns="25400" rtlCol="0" anchor="ctr"/>
-          <a:lstStyle/>
-          <a:p>
-            <a:pPr algn="ctr" indent="0" marL="0">
-              <a:buNone/>
-            </a:pPr>
-            <a:r>
-              <a:rPr lang="en-US" sz="1050" dirty="0">
-                <a:solidFill>
-                  <a:srgbClr val="1E6B4E"/>
-                </a:solidFill>
-                <a:latin typeface="Calibri" pitchFamily="34" charset="0"/>
-                <a:ea typeface="Calibri" pitchFamily="34" charset="-122"/>
-                <a:cs typeface="Calibri" pitchFamily="34" charset="-120"/>
-              </a:rPr>
-              <a:t>Supervisor</a:t>
-            </a:r>
-            <a:endParaRPr lang="en-US" sz="1050" dirty="0"/>
-          </a:p>
-          <a:p>
-            <a:pPr algn="ctr" indent="0" marL="0">
-              <a:buNone/>
-            </a:pPr>
-            <a:r>
-              <a:rPr lang="en-US" sz="1050" dirty="0">
-                <a:solidFill>
-                  <a:srgbClr val="1E6B4E"/>
-                </a:solidFill>
-                <a:latin typeface="Calibri" pitchFamily="34" charset="0"/>
-                <a:ea typeface="Calibri" pitchFamily="34" charset="-122"/>
-                <a:cs typeface="Calibri" pitchFamily="34" charset="-120"/>
-              </a:rPr>
-              <a:t>Approves</a:t>
-            </a:r>
-            <a:endParaRPr lang="en-US" sz="1050" dirty="0"/>
-          </a:p>
-        </p:txBody>
-      </p:sp>
-      <p:sp>
-        <p:nvSpPr>
-          <p:cNvPr id="26" name="Shape 24"/>
-          <p:cNvSpPr/>
-          <p:nvPr/>
-        </p:nvSpPr>
-        <p:spPr>
-          <a:xfrm>
-            <a:off x="9098280" y="4041648"/>
-            <a:ext cx="1554480" cy="566928"/>
-          </a:xfrm>
-          <a:prstGeom prst="roundRect">
-            <a:avLst>
-              <a:gd name="adj" fmla="val 12903"/>
-            </a:avLst>
-          </a:prstGeom>
-          <a:solidFill>
-            <a:srgbClr val="FBE4E8"/>
-          </a:solidFill>
-          <a:ln w="12700">
-            <a:solidFill>
-              <a:srgbClr val="1E2761"/>
-            </a:solidFill>
-            <a:prstDash val="solid"/>
-          </a:ln>
-          <a:effectLst>
-            <a:outerShdw sx="100000" sy="100000" kx="0" ky="0" algn="bl" rotWithShape="0" blurRad="38100" dist="25400" dir="5400000">
-              <a:srgbClr val="000000">
-                <a:alpha val="18000"/>
-              </a:srgbClr>
-            </a:outerShdw>
-          </a:effectLst>
-        </p:spPr>
-      </p:sp>
-      <p:sp>
-        <p:nvSpPr>
-          <p:cNvPr id="27" name="Text 25"/>
-          <p:cNvSpPr txBox="1"/>
-          <p:nvPr/>
-        </p:nvSpPr>
-        <p:spPr>
-          <a:xfrm>
-            <a:off x="9098280" y="4041648"/>
-            <a:ext cx="1554480" cy="566928"/>
-          </a:xfrm>
-          <a:prstGeom prst="rect">
-            <a:avLst/>
-          </a:prstGeom>
-          <a:noFill/>
-          <a:ln/>
-        </p:spPr>
-        <p:txBody>
-          <a:bodyPr wrap="square" lIns="25400" tIns="25400" rIns="25400" bIns="25400" rtlCol="0" anchor="ctr"/>
-          <a:lstStyle/>
-          <a:p>
-            <a:pPr algn="ctr" indent="0" marL="0">
-              <a:buNone/>
-            </a:pPr>
-            <a:r>
-              <a:rPr lang="en-US" sz="1050" dirty="0">
-                <a:solidFill>
-                  <a:srgbClr val="9B1B30"/>
-                </a:solidFill>
-                <a:latin typeface="Calibri" pitchFamily="34" charset="0"/>
-                <a:ea typeface="Calibri" pitchFamily="34" charset="-122"/>
-                <a:cs typeface="Calibri" pitchFamily="34" charset="-120"/>
-              </a:rPr>
-              <a:t>Supervisor</a:t>
-            </a:r>
-            <a:endParaRPr lang="en-US" sz="1050" dirty="0"/>
-          </a:p>
-          <a:p>
-            <a:pPr algn="ctr" indent="0" marL="0">
-              <a:buNone/>
-            </a:pPr>
-            <a:r>
-              <a:rPr lang="en-US" sz="1050" dirty="0">
-                <a:solidFill>
-                  <a:srgbClr val="9B1B30"/>
-                </a:solidFill>
-                <a:latin typeface="Calibri" pitchFamily="34" charset="0"/>
-                <a:ea typeface="Calibri" pitchFamily="34" charset="-122"/>
-                <a:cs typeface="Calibri" pitchFamily="34" charset="-120"/>
-              </a:rPr>
-              <a:t>Rejects</a:t>
-            </a:r>
-            <a:endParaRPr lang="en-US" sz="1050" dirty="0"/>
-          </a:p>
-        </p:txBody>
-      </p:sp>
-      <p:sp>
-        <p:nvSpPr>
-          <p:cNvPr id="28" name="Shape 26"/>
-          <p:cNvSpPr/>
-          <p:nvPr/>
-        </p:nvSpPr>
-        <p:spPr>
-          <a:xfrm>
-            <a:off x="8138160" y="4041648"/>
-            <a:ext cx="0" cy="-731520"/>
-          </a:xfrm>
-          <a:prstGeom prst="line">
-            <a:avLst/>
-          </a:prstGeom>
-          <a:noFill/>
-          <a:ln w="19050">
-            <a:solidFill>
-              <a:srgbClr val="1E6B4E"/>
-            </a:solidFill>
-            <a:prstDash val="solid"/>
-            <a:tailEnd type="triangle"/>
-          </a:ln>
-        </p:spPr>
-      </p:sp>
-      <p:sp>
-        <p:nvSpPr>
-          <p:cNvPr id="29" name="Shape 27"/>
-          <p:cNvSpPr/>
-          <p:nvPr/>
-        </p:nvSpPr>
-        <p:spPr>
-          <a:xfrm>
-            <a:off x="9875520" y="4041648"/>
-            <a:ext cx="0" cy="-731520"/>
-          </a:xfrm>
-          <a:prstGeom prst="line">
-            <a:avLst/>
-          </a:prstGeom>
-          <a:noFill/>
-          <a:ln w="19050">
-            <a:solidFill>
-              <a:srgbClr val="9B1B30"/>
-            </a:solidFill>
-            <a:prstDash val="solid"/>
-            <a:tailEnd type="triangle"/>
-          </a:ln>
-        </p:spPr>
-      </p:sp>
-      <p:sp>
-        <p:nvSpPr>
-          <p:cNvPr id="30" name="Shape 28"/>
-          <p:cNvSpPr/>
-          <p:nvPr/>
-        </p:nvSpPr>
-        <p:spPr>
-          <a:xfrm>
-            <a:off x="6789420" y="2194560"/>
-            <a:ext cx="0" cy="274320"/>
-          </a:xfrm>
-          <a:prstGeom prst="line">
-            <a:avLst/>
-          </a:prstGeom>
-          <a:noFill/>
-          <a:ln w="19050">
-            <a:solidFill>
-              <a:srgbClr val="9B1B30"/>
-            </a:solidFill>
-            <a:prstDash val="solid"/>
-            <a:tailEnd type="none"/>
-          </a:ln>
-        </p:spPr>
-      </p:sp>
-      <p:sp>
-        <p:nvSpPr>
-          <p:cNvPr id="31" name="Shape 29"/>
-          <p:cNvSpPr/>
-          <p:nvPr/>
-        </p:nvSpPr>
-        <p:spPr>
-          <a:xfrm>
-            <a:off x="6789420" y="2468880"/>
-            <a:ext cx="-5143500" cy="0"/>
-          </a:xfrm>
-          <a:prstGeom prst="line">
-            <a:avLst/>
-          </a:prstGeom>
-          <a:noFill/>
-          <a:ln w="19050">
-            <a:solidFill>
-              <a:srgbClr val="9B1B30"/>
-            </a:solidFill>
-            <a:prstDash val="solid"/>
-            <a:tailEnd type="none"/>
-          </a:ln>
-        </p:spPr>
-      </p:sp>
-      <p:sp>
-        <p:nvSpPr>
-          <p:cNvPr id="32" name="Shape 30"/>
-          <p:cNvSpPr/>
-          <p:nvPr/>
-        </p:nvSpPr>
-        <p:spPr>
-          <a:xfrm>
-            <a:off x="1645920" y="2468880"/>
-            <a:ext cx="0" cy="274320"/>
-          </a:xfrm>
-          <a:prstGeom prst="line">
-            <a:avLst/>
-          </a:prstGeom>
-          <a:noFill/>
-          <a:ln w="19050">
-            <a:solidFill>
-              <a:srgbClr val="9B1B30"/>
-            </a:solidFill>
-            <a:prstDash val="solid"/>
-            <a:tailEnd type="triangle"/>
-          </a:ln>
-        </p:spPr>
-      </p:sp>
-      <p:sp>
-        <p:nvSpPr>
-          <p:cNvPr id="33" name="Text 31"/>
-          <p:cNvSpPr txBox="1"/>
-          <p:nvPr/>
-        </p:nvSpPr>
-        <p:spPr>
-          <a:xfrm>
-            <a:off x="3154680" y="2176272"/>
-            <a:ext cx="1737360" cy="228600"/>
+            <a:off x="7246620" y="3794760"/>
+            <a:ext cx="1691640" cy="685800"/>
           </a:xfrm>
           <a:prstGeom prst="rect">
             <a:avLst/>
@@ -2552,65 +2505,174 @@
           <a:bodyPr wrap="square" lIns="0" tIns="0" rIns="0" bIns="0" rtlCol="0" anchor="ctr"/>
           <a:lstStyle/>
           <a:p>
-            <a:pPr indent="0" marL="0">
+            <a:pPr algn="ctr" indent="0" marL="0">
               <a:buNone/>
             </a:pPr>
             <a:r>
-              <a:rPr lang="en-US" sz="900" b="1" dirty="0">
+              <a:rPr lang="en-US" sz="1100" b="1" dirty="0">
                 <a:solidFill>
-                  <a:srgbClr val="9B1B30"/>
+                  <a:srgbClr val="1E2761"/>
                 </a:solidFill>
+                <a:latin typeface="Calibri" pitchFamily="34" charset="0"/>
+                <a:ea typeface="Calibri" pitchFamily="34"/>
+                <a:cs typeface="Calibri" pitchFamily="34"/>
               </a:rPr>
-              <a:t>No (exception)</a:t>
+              <a:t>Supervisor</a:t>
             </a:r>
-            <a:endParaRPr lang="en-US" sz="900" dirty="0"/>
+            <a:endParaRPr lang="en-US" sz="1100" dirty="0"/>
+          </a:p>
+          <a:p>
+            <a:pPr algn="ctr" indent="0" marL="0">
+              <a:buNone/>
+            </a:pPr>
+            <a:r>
+              <a:rPr lang="en-US" sz="1100" b="1" dirty="0">
+                <a:solidFill>
+                  <a:srgbClr val="1E2761"/>
+                </a:solidFill>
+                <a:latin typeface="Calibri" pitchFamily="34" charset="0"/>
+                <a:ea typeface="Calibri" pitchFamily="34"/>
+                <a:cs typeface="Calibri" pitchFamily="34"/>
+              </a:rPr>
+              <a:t>Rejects</a:t>
+            </a:r>
+            <a:endParaRPr lang="en-US" sz="1100" dirty="0"/>
           </a:p>
         </p:txBody>
       </p:sp>
       <p:sp>
         <p:nvSpPr>
-          <p:cNvPr id="34" name="Shape 32"/>
+          <p:cNvPr id="32" name="Shape 30"/>
           <p:cNvSpPr/>
           <p:nvPr/>
         </p:nvSpPr>
         <p:spPr>
           <a:xfrm>
-            <a:off x="777240" y="2743200"/>
-            <a:ext cx="1737360" cy="566928"/>
+            <a:off x="7063740" y="3429000"/>
+            <a:ext cx="9144" cy="137160"/>
           </a:xfrm>
-          <a:prstGeom prst="roundRect">
-            <a:avLst>
-              <a:gd name="adj" fmla="val 12903"/>
-            </a:avLst>
+          <a:prstGeom prst="line">
+            <a:avLst/>
           </a:prstGeom>
-          <a:solidFill>
-            <a:srgbClr val="FBE4E8"/>
-          </a:solidFill>
+          <a:noFill/>
           <a:ln w="12700">
             <a:solidFill>
               <a:srgbClr val="1E2761"/>
             </a:solidFill>
             <a:prstDash val="solid"/>
+            <a:tailEnd type="triangle"/>
           </a:ln>
-          <a:effectLst>
-            <a:outerShdw sx="100000" sy="100000" kx="0" ky="0" algn="bl" rotWithShape="0" blurRad="38100" dist="25400" dir="5400000">
-              <a:srgbClr val="000000">
-                <a:alpha val="18000"/>
-              </a:srgbClr>
-            </a:outerShdw>
-          </a:effectLst>
         </p:spPr>
       </p:sp>
       <p:sp>
         <p:nvSpPr>
-          <p:cNvPr id="35" name="Text 33"/>
+          <p:cNvPr id="33" name="Shape 31"/>
+          <p:cNvSpPr/>
+          <p:nvPr/>
+        </p:nvSpPr>
+        <p:spPr>
+          <a:xfrm>
+            <a:off x="6126480" y="3566160"/>
+            <a:ext cx="1965960" cy="9144"/>
+          </a:xfrm>
+          <a:prstGeom prst="line">
+            <a:avLst/>
+          </a:prstGeom>
+          <a:noFill/>
+          <a:ln w="12700">
+            <a:solidFill>
+              <a:srgbClr val="1E2761"/>
+            </a:solidFill>
+            <a:prstDash val="solid"/>
+            <a:tailEnd type="triangle"/>
+          </a:ln>
+        </p:spPr>
+      </p:sp>
+      <p:sp>
+        <p:nvSpPr>
+          <p:cNvPr id="34" name="Shape 32"/>
+          <p:cNvSpPr/>
+          <p:nvPr/>
+        </p:nvSpPr>
+        <p:spPr>
+          <a:xfrm>
+            <a:off x="6126480" y="3566160"/>
+            <a:ext cx="9144" cy="228600"/>
+          </a:xfrm>
+          <a:prstGeom prst="line">
+            <a:avLst/>
+          </a:prstGeom>
+          <a:noFill/>
+          <a:ln w="12700">
+            <a:solidFill>
+              <a:srgbClr val="0E8C86"/>
+            </a:solidFill>
+            <a:prstDash val="solid"/>
+            <a:tailEnd type="triangle"/>
+          </a:ln>
+        </p:spPr>
+      </p:sp>
+      <p:sp>
+        <p:nvSpPr>
+          <p:cNvPr id="35" name="Shape 33"/>
+          <p:cNvSpPr/>
+          <p:nvPr/>
+        </p:nvSpPr>
+        <p:spPr>
+          <a:xfrm>
+            <a:off x="8092440" y="3566160"/>
+            <a:ext cx="9144" cy="228600"/>
+          </a:xfrm>
+          <a:prstGeom prst="line">
+            <a:avLst/>
+          </a:prstGeom>
+          <a:noFill/>
+          <a:ln w="12700">
+            <a:solidFill>
+              <a:srgbClr val="1E2761"/>
+            </a:solidFill>
+            <a:prstDash val="solid"/>
+            <a:tailEnd type="triangle"/>
+          </a:ln>
+        </p:spPr>
+      </p:sp>
+      <p:sp>
+        <p:nvSpPr>
+          <p:cNvPr id="36" name="Shape 34"/>
+          <p:cNvSpPr/>
+          <p:nvPr/>
+        </p:nvSpPr>
+        <p:spPr>
+          <a:xfrm>
+            <a:off x="1188720" y="5760720"/>
+            <a:ext cx="2103120" cy="731520"/>
+          </a:xfrm>
+          <a:prstGeom prst="roundRect">
+            <a:avLst>
+              <a:gd name="adj" fmla="val 6875"/>
+            </a:avLst>
+          </a:prstGeom>
+          <a:solidFill>
+            <a:srgbClr val="1E2761"/>
+          </a:solidFill>
+          <a:ln w="12700">
+            <a:solidFill>
+              <a:srgbClr val="D5D9E0"/>
+            </a:solidFill>
+            <a:prstDash val="solid"/>
+          </a:ln>
+        </p:spPr>
+      </p:sp>
+      <p:sp>
+        <p:nvSpPr>
+          <p:cNvPr id="37" name="Text 35"/>
           <p:cNvSpPr txBox="1"/>
           <p:nvPr/>
         </p:nvSpPr>
         <p:spPr>
           <a:xfrm>
-            <a:off x="777240" y="2743200"/>
-            <a:ext cx="1737360" cy="566928"/>
+            <a:off x="1188720" y="5760720"/>
+            <a:ext cx="2103120" cy="731520"/>
           </a:xfrm>
           <a:prstGeom prst="rect">
             <a:avLst/>
@@ -2619,88 +2681,81 @@
           <a:ln/>
         </p:spPr>
         <p:txBody>
-          <a:bodyPr wrap="square" lIns="25400" tIns="25400" rIns="25400" bIns="25400" rtlCol="0" anchor="ctr"/>
+          <a:bodyPr wrap="square" lIns="0" tIns="0" rIns="0" bIns="0" rtlCol="0" anchor="ctr"/>
           <a:lstStyle/>
           <a:p>
             <a:pPr algn="ctr" indent="0" marL="0">
               <a:buNone/>
             </a:pPr>
             <a:r>
-              <a:rPr lang="en-US" sz="1050" b="1" dirty="0">
+              <a:rPr lang="en-US" sz="1100" dirty="0">
                 <a:solidFill>
-                  <a:srgbClr val="9B1B30"/>
+                  <a:srgbClr val="FFFFFF"/>
                 </a:solidFill>
                 <a:latin typeface="Calibri" pitchFamily="34" charset="0"/>
-                <a:ea typeface="Calibri" pitchFamily="34" charset="-122"/>
-                <a:cs typeface="Calibri" pitchFamily="34" charset="-120"/>
+                <a:ea typeface="Calibri" pitchFamily="34"/>
+                <a:cs typeface="Calibri" pitchFamily="34"/>
               </a:rPr>
-              <a:t>Auto-Reject</a:t>
+              <a:t>Assign Return ID</a:t>
             </a:r>
-            <a:endParaRPr lang="en-US" sz="1050" dirty="0"/>
+            <a:endParaRPr lang="en-US" sz="1100" dirty="0"/>
           </a:p>
           <a:p>
             <a:pPr algn="ctr" indent="0" marL="0">
               <a:buNone/>
             </a:pPr>
             <a:r>
-              <a:rPr lang="en-US" sz="1050" b="1" dirty="0">
+              <a:rPr lang="en-US" sz="1100" dirty="0">
                 <a:solidFill>
-                  <a:srgbClr val="9B1B30"/>
+                  <a:srgbClr val="FFFFFF"/>
                 </a:solidFill>
                 <a:latin typeface="Calibri" pitchFamily="34" charset="0"/>
-                <a:ea typeface="Calibri" pitchFamily="34" charset="-122"/>
-                <a:cs typeface="Calibri" pitchFamily="34" charset="-120"/>
+                <a:ea typeface="Calibri" pitchFamily="34"/>
+                <a:cs typeface="Calibri" pitchFamily="34"/>
               </a:rPr>
-              <a:t>(BR-1 / BR-2 / BR-3)</a:t>
+              <a:t>&amp; set status</a:t>
             </a:r>
-            <a:endParaRPr lang="en-US" sz="1050" dirty="0"/>
+            <a:endParaRPr lang="en-US" sz="1100" dirty="0"/>
           </a:p>
         </p:txBody>
       </p:sp>
       <p:sp>
         <p:nvSpPr>
-          <p:cNvPr id="36" name="Shape 34"/>
+          <p:cNvPr id="38" name="Shape 36"/>
           <p:cNvSpPr/>
           <p:nvPr/>
         </p:nvSpPr>
         <p:spPr>
           <a:xfrm>
-            <a:off x="3063240" y="5065776"/>
-            <a:ext cx="2331720" cy="566928"/>
+            <a:off x="3566160" y="5760720"/>
+            <a:ext cx="2377440" cy="731520"/>
           </a:xfrm>
           <a:prstGeom prst="roundRect">
             <a:avLst>
-              <a:gd name="adj" fmla="val 12903"/>
+              <a:gd name="adj" fmla="val 6875"/>
             </a:avLst>
           </a:prstGeom>
           <a:solidFill>
-            <a:srgbClr val="CADCFC"/>
+            <a:srgbClr val="1E2761"/>
           </a:solidFill>
           <a:ln w="12700">
             <a:solidFill>
-              <a:srgbClr val="1E2761"/>
+              <a:srgbClr val="D5D9E0"/>
             </a:solidFill>
             <a:prstDash val="solid"/>
           </a:ln>
-          <a:effectLst>
-            <a:outerShdw sx="100000" sy="100000" kx="0" ky="0" algn="bl" rotWithShape="0" blurRad="38100" dist="25400" dir="5400000">
-              <a:srgbClr val="000000">
-                <a:alpha val="18000"/>
-              </a:srgbClr>
-            </a:outerShdw>
-          </a:effectLst>
         </p:spPr>
       </p:sp>
       <p:sp>
         <p:nvSpPr>
-          <p:cNvPr id="37" name="Text 35"/>
+          <p:cNvPr id="39" name="Text 37"/>
           <p:cNvSpPr txBox="1"/>
           <p:nvPr/>
         </p:nvSpPr>
         <p:spPr>
           <a:xfrm>
-            <a:off x="3063240" y="5065776"/>
-            <a:ext cx="2331720" cy="566928"/>
+            <a:off x="3566160" y="5760720"/>
+            <a:ext cx="2377440" cy="731520"/>
           </a:xfrm>
           <a:prstGeom prst="rect">
             <a:avLst/>
@@ -2709,112 +2764,81 @@
           <a:ln/>
         </p:spPr>
         <p:txBody>
-          <a:bodyPr wrap="square" lIns="25400" tIns="25400" rIns="25400" bIns="25400" rtlCol="0" anchor="ctr"/>
+          <a:bodyPr wrap="square" lIns="0" tIns="0" rIns="0" bIns="0" rtlCol="0" anchor="ctr"/>
           <a:lstStyle/>
           <a:p>
             <a:pPr algn="ctr" indent="0" marL="0">
               <a:buNone/>
             </a:pPr>
             <a:r>
-              <a:rPr lang="en-US" sz="1050" dirty="0">
+              <a:rPr lang="en-US" sz="1100" dirty="0">
                 <a:solidFill>
-                  <a:srgbClr val="202020"/>
+                  <a:srgbClr val="FFFFFF"/>
                 </a:solidFill>
                 <a:latin typeface="Calibri" pitchFamily="34" charset="0"/>
-                <a:ea typeface="Calibri" pitchFamily="34" charset="-122"/>
-                <a:cs typeface="Calibri" pitchFamily="34" charset="-120"/>
+                <a:ea typeface="Calibri" pitchFamily="34"/>
+                <a:cs typeface="Calibri" pitchFamily="34"/>
               </a:rPr>
-              <a:t>Assign Return ID</a:t>
+              <a:t>Customer ships item /</a:t>
             </a:r>
-            <a:endParaRPr lang="en-US" sz="1050" dirty="0"/>
+            <a:endParaRPr lang="en-US" sz="1100" dirty="0"/>
           </a:p>
           <a:p>
             <a:pPr algn="ctr" indent="0" marL="0">
               <a:buNone/>
             </a:pPr>
             <a:r>
-              <a:rPr lang="en-US" sz="1050" dirty="0">
+              <a:rPr lang="en-US" sz="1100" dirty="0">
                 <a:solidFill>
-                  <a:srgbClr val="202020"/>
+                  <a:srgbClr val="FFFFFF"/>
                 </a:solidFill>
                 <a:latin typeface="Calibri" pitchFamily="34" charset="0"/>
-                <a:ea typeface="Calibri" pitchFamily="34" charset="-122"/>
-                <a:cs typeface="Calibri" pitchFamily="34" charset="-120"/>
+                <a:ea typeface="Calibri" pitchFamily="34"/>
+                <a:cs typeface="Calibri" pitchFamily="34"/>
               </a:rPr>
-              <a:t>&amp; set status</a:t>
+              <a:t>resolution issued</a:t>
             </a:r>
-            <a:endParaRPr lang="en-US" sz="1050" dirty="0"/>
+            <a:endParaRPr lang="en-US" sz="1100" dirty="0"/>
           </a:p>
         </p:txBody>
       </p:sp>
       <p:sp>
         <p:nvSpPr>
-          <p:cNvPr id="38" name="Shape 36"/>
+          <p:cNvPr id="40" name="Shape 38"/>
           <p:cNvSpPr/>
           <p:nvPr/>
         </p:nvSpPr>
         <p:spPr>
           <a:xfrm>
-            <a:off x="5394960" y="5349240"/>
-            <a:ext cx="228600" cy="0"/>
-          </a:xfrm>
-          <a:prstGeom prst="line">
-            <a:avLst/>
-          </a:prstGeom>
-          <a:noFill/>
-          <a:ln w="19050">
-            <a:solidFill>
-              <a:srgbClr val="555555"/>
-            </a:solidFill>
-            <a:prstDash val="solid"/>
-            <a:tailEnd type="triangle"/>
-          </a:ln>
-        </p:spPr>
-      </p:sp>
-      <p:sp>
-        <p:nvSpPr>
-          <p:cNvPr id="39" name="Shape 37"/>
-          <p:cNvSpPr/>
-          <p:nvPr/>
-        </p:nvSpPr>
-        <p:spPr>
-          <a:xfrm>
-            <a:off x="5623560" y="5065776"/>
-            <a:ext cx="2331720" cy="566928"/>
+            <a:off x="6217920" y="5760720"/>
+            <a:ext cx="1737360" cy="731520"/>
           </a:xfrm>
           <a:prstGeom prst="roundRect">
             <a:avLst>
-              <a:gd name="adj" fmla="val 12903"/>
+              <a:gd name="adj" fmla="val 6875"/>
             </a:avLst>
           </a:prstGeom>
           <a:solidFill>
-            <a:srgbClr val="CADCFC"/>
+            <a:srgbClr val="0E8C86"/>
           </a:solidFill>
           <a:ln w="12700">
             <a:solidFill>
-              <a:srgbClr val="1E2761"/>
+              <a:srgbClr val="D5D9E0"/>
             </a:solidFill>
             <a:prstDash val="solid"/>
           </a:ln>
-          <a:effectLst>
-            <a:outerShdw sx="100000" sy="100000" kx="0" ky="0" algn="bl" rotWithShape="0" blurRad="38100" dist="25400" dir="5400000">
-              <a:srgbClr val="000000">
-                <a:alpha val="18000"/>
-              </a:srgbClr>
-            </a:outerShdw>
-          </a:effectLst>
         </p:spPr>
       </p:sp>
       <p:sp>
         <p:nvSpPr>
-          <p:cNvPr id="40" name="Text 38"/>
+          <p:cNvPr id="41" name="Text 39"/>
           <p:cNvSpPr txBox="1"/>
           <p:nvPr/>
         </p:nvSpPr>
         <p:spPr>
           <a:xfrm>
-            <a:off x="5623560" y="5065776"/>
-            <a:ext cx="2331720" cy="566928"/>
+            <a:off x="6217920" y="5760720"/>
+            <a:ext cx="1737360" cy="731520"/>
           </a:xfrm>
           <a:prstGeom prst="rect">
             <a:avLst/>
@@ -2823,62 +2847,45 @@
           <a:ln/>
         </p:spPr>
         <p:txBody>
-          <a:bodyPr wrap="square" lIns="25400" tIns="25400" rIns="25400" bIns="25400" rtlCol="0" anchor="ctr"/>
+          <a:bodyPr wrap="square" lIns="0" tIns="0" rIns="0" bIns="0" rtlCol="0" anchor="ctr"/>
           <a:lstStyle/>
           <a:p>
             <a:pPr algn="ctr" indent="0" marL="0">
               <a:buNone/>
             </a:pPr>
             <a:r>
-              <a:rPr lang="en-US" sz="1050" dirty="0">
+              <a:rPr lang="en-US" sz="1100" b="1" dirty="0">
                 <a:solidFill>
-                  <a:srgbClr val="202020"/>
+                  <a:srgbClr val="FFFFFF"/>
                 </a:solidFill>
                 <a:latin typeface="Calibri" pitchFamily="34" charset="0"/>
-                <a:ea typeface="Calibri" pitchFamily="34" charset="-122"/>
-                <a:cs typeface="Calibri" pitchFamily="34" charset="-120"/>
+                <a:ea typeface="Calibri" pitchFamily="34"/>
+                <a:cs typeface="Calibri" pitchFamily="34"/>
               </a:rPr>
-              <a:t>Customer ships item /</a:t>
+              <a:t>Completed</a:t>
             </a:r>
-            <a:endParaRPr lang="en-US" sz="1050" dirty="0"/>
-          </a:p>
-          <a:p>
-            <a:pPr algn="ctr" indent="0" marL="0">
-              <a:buNone/>
-            </a:pPr>
-            <a:r>
-              <a:rPr lang="en-US" sz="1050" dirty="0">
-                <a:solidFill>
-                  <a:srgbClr val="202020"/>
-                </a:solidFill>
-                <a:latin typeface="Calibri" pitchFamily="34" charset="0"/>
-                <a:ea typeface="Calibri" pitchFamily="34" charset="-122"/>
-                <a:cs typeface="Calibri" pitchFamily="34" charset="-120"/>
-              </a:rPr>
-              <a:t>resolution issued</a:t>
-            </a:r>
-            <a:endParaRPr lang="en-US" sz="1050" dirty="0"/>
+            <a:endParaRPr lang="en-US" sz="1100" dirty="0"/>
           </a:p>
         </p:txBody>
       </p:sp>
       <p:sp>
         <p:nvSpPr>
-          <p:cNvPr id="41" name="Shape 39"/>
+          <p:cNvPr id="42" name="Shape 40"/>
           <p:cNvSpPr/>
           <p:nvPr/>
         </p:nvSpPr>
         <p:spPr>
           <a:xfrm>
-            <a:off x="7955280" y="5349240"/>
-            <a:ext cx="228600" cy="0"/>
+            <a:off x="3291840" y="6126480"/>
+            <a:ext cx="274320" cy="9144"/>
           </a:xfrm>
           <a:prstGeom prst="line">
             <a:avLst/>
           </a:prstGeom>
           <a:noFill/>
-          <a:ln w="19050">
+          <a:ln w="12700">
             <a:solidFill>
-              <a:srgbClr val="555555"/>
+              <a:srgbClr val="1E2761"/>
             </a:solidFill>
             <a:prstDash val="solid"/>
             <a:tailEnd type="triangle"/>
@@ -2887,76 +2894,27 @@
       </p:sp>
       <p:sp>
         <p:nvSpPr>
-          <p:cNvPr id="42" name="Shape 40"/>
+          <p:cNvPr id="43" name="Shape 41"/>
           <p:cNvSpPr/>
           <p:nvPr/>
         </p:nvSpPr>
         <p:spPr>
           <a:xfrm>
-            <a:off x="8183880" y="5065776"/>
-            <a:ext cx="2331720" cy="566928"/>
+            <a:off x="5943600" y="6126480"/>
+            <a:ext cx="274320" cy="9144"/>
           </a:xfrm>
-          <a:prstGeom prst="roundRect">
-            <a:avLst>
-              <a:gd name="adj" fmla="val 12903"/>
-            </a:avLst>
+          <a:prstGeom prst="line">
+            <a:avLst/>
           </a:prstGeom>
-          <a:solidFill>
-            <a:srgbClr val="E4F2EB"/>
-          </a:solidFill>
+          <a:noFill/>
           <a:ln w="12700">
             <a:solidFill>
               <a:srgbClr val="1E2761"/>
             </a:solidFill>
             <a:prstDash val="solid"/>
+            <a:tailEnd type="triangle"/>
           </a:ln>
-          <a:effectLst>
-            <a:outerShdw sx="100000" sy="100000" kx="0" ky="0" algn="bl" rotWithShape="0" blurRad="38100" dist="25400" dir="5400000">
-              <a:srgbClr val="000000">
-                <a:alpha val="18000"/>
-              </a:srgbClr>
-            </a:outerShdw>
-          </a:effectLst>
         </p:spPr>
-      </p:sp>
-      <p:sp>
-        <p:nvSpPr>
-          <p:cNvPr id="43" name="Text 41"/>
-          <p:cNvSpPr txBox="1"/>
-          <p:nvPr/>
-        </p:nvSpPr>
-        <p:spPr>
-          <a:xfrm>
-            <a:off x="8183880" y="5065776"/>
-            <a:ext cx="2331720" cy="566928"/>
-          </a:xfrm>
-          <a:prstGeom prst="rect">
-            <a:avLst/>
-          </a:prstGeom>
-          <a:noFill/>
-          <a:ln/>
-        </p:spPr>
-        <p:txBody>
-          <a:bodyPr wrap="square" lIns="25400" tIns="25400" rIns="25400" bIns="25400" rtlCol="0" anchor="ctr"/>
-          <a:lstStyle/>
-          <a:p>
-            <a:pPr algn="ctr" indent="0" marL="0">
-              <a:buNone/>
-            </a:pPr>
-            <a:r>
-              <a:rPr lang="en-US" sz="1050" b="1" dirty="0">
-                <a:solidFill>
-                  <a:srgbClr val="1E6B4E"/>
-                </a:solidFill>
-                <a:latin typeface="Calibri" pitchFamily="34" charset="0"/>
-                <a:ea typeface="Calibri" pitchFamily="34" charset="-122"/>
-                <a:cs typeface="Calibri" pitchFamily="34" charset="-120"/>
-              </a:rPr>
-              <a:t>Completed</a:t>
-            </a:r>
-            <a:endParaRPr lang="en-US" sz="1050" dirty="0"/>
-          </a:p>
-        </p:txBody>
       </p:sp>
       <p:sp>
         <p:nvSpPr>
@@ -2966,19 +2924,19 @@
         </p:nvSpPr>
         <p:spPr>
           <a:xfrm>
-            <a:off x="11704320" y="1655064"/>
-            <a:ext cx="0" cy="2066544"/>
+            <a:off x="9121140" y="2194560"/>
+            <a:ext cx="9144" cy="3154680"/>
           </a:xfrm>
           <a:prstGeom prst="line">
             <a:avLst/>
           </a:prstGeom>
           <a:noFill/>
-          <a:ln w="19050">
+          <a:ln w="12700">
             <a:solidFill>
-              <a:srgbClr val="1E6B4E"/>
+              <a:srgbClr val="0E8C86"/>
             </a:solidFill>
             <a:prstDash val="solid"/>
-            <a:tailEnd type="none"/>
+            <a:tailEnd type="triangle"/>
           </a:ln>
         </p:spPr>
       </p:sp>
@@ -2989,20 +2947,20 @@
           <p:nvPr/>
         </p:nvSpPr>
         <p:spPr>
-          <a:xfrm>
-            <a:off x="11704320" y="3721608"/>
-            <a:ext cx="-7475220" cy="0"/>
+          <a:xfrm flipH="1">
+            <a:off x="2240280" y="5349240"/>
+            <a:ext cx="6880860" cy="9144"/>
           </a:xfrm>
           <a:prstGeom prst="line">
             <a:avLst/>
           </a:prstGeom>
           <a:noFill/>
-          <a:ln w="19050">
+          <a:ln w="12700">
             <a:solidFill>
-              <a:srgbClr val="1E6B4E"/>
+              <a:srgbClr val="0E8C86"/>
             </a:solidFill>
             <a:prstDash val="solid"/>
-            <a:tailEnd type="none"/>
+            <a:tailEnd type="triangle"/>
           </a:ln>
         </p:spPr>
       </p:sp>
@@ -3014,16 +2972,88 @@
         </p:nvSpPr>
         <p:spPr>
           <a:xfrm>
-            <a:off x="4229100" y="3721608"/>
-            <a:ext cx="0" cy="1344168"/>
+            <a:off x="2240280" y="5349240"/>
+            <a:ext cx="9144" cy="411480"/>
           </a:xfrm>
           <a:prstGeom prst="line">
             <a:avLst/>
           </a:prstGeom>
           <a:noFill/>
-          <a:ln w="19050">
+          <a:ln w="12700">
             <a:solidFill>
-              <a:srgbClr val="1E6B4E"/>
+              <a:srgbClr val="0E8C86"/>
+            </a:solidFill>
+            <a:prstDash val="solid"/>
+            <a:tailEnd type="triangle"/>
+          </a:ln>
+        </p:spPr>
+      </p:sp>
+      <p:sp>
+        <p:nvSpPr>
+          <p:cNvPr id="47" name="Shape 45"/>
+          <p:cNvSpPr/>
+          <p:nvPr/>
+        </p:nvSpPr>
+        <p:spPr>
+          <a:xfrm>
+            <a:off x="6126480" y="4480560"/>
+            <a:ext cx="9144" cy="548640"/>
+          </a:xfrm>
+          <a:prstGeom prst="line">
+            <a:avLst/>
+          </a:prstGeom>
+          <a:noFill/>
+          <a:ln w="12700">
+            <a:solidFill>
+              <a:srgbClr val="0E8C86"/>
+            </a:solidFill>
+            <a:prstDash val="solid"/>
+            <a:tailEnd type="triangle"/>
+          </a:ln>
+        </p:spPr>
+      </p:sp>
+      <p:sp>
+        <p:nvSpPr>
+          <p:cNvPr id="48" name="Shape 46"/>
+          <p:cNvSpPr/>
+          <p:nvPr/>
+        </p:nvSpPr>
+        <p:spPr>
+          <a:xfrm flipH="1">
+            <a:off x="1783080" y="5029200"/>
+            <a:ext cx="4343400" cy="9144"/>
+          </a:xfrm>
+          <a:prstGeom prst="line">
+            <a:avLst/>
+          </a:prstGeom>
+          <a:noFill/>
+          <a:ln w="12700">
+            <a:solidFill>
+              <a:srgbClr val="0E8C86"/>
+            </a:solidFill>
+            <a:prstDash val="solid"/>
+            <a:tailEnd type="triangle"/>
+          </a:ln>
+        </p:spPr>
+      </p:sp>
+      <p:sp>
+        <p:nvSpPr>
+          <p:cNvPr id="49" name="Shape 47"/>
+          <p:cNvSpPr/>
+          <p:nvPr/>
+        </p:nvSpPr>
+        <p:spPr>
+          <a:xfrm>
+            <a:off x="1783080" y="5029200"/>
+            <a:ext cx="9144" cy="731520"/>
+          </a:xfrm>
+          <a:prstGeom prst="line">
+            <a:avLst/>
+          </a:prstGeom>
+          <a:noFill/>
+          <a:ln w="12700">
+            <a:solidFill>
+              <a:srgbClr val="0E8C86"/>
             </a:solidFill>
             <a:prstDash val="solid"/>
             <a:tailEnd type="triangle"/>
@@ -3070,8 +3100,8 @@
         </p:nvSpPr>
         <p:spPr>
           <a:xfrm>
-            <a:off x="548640" y="320040"/>
-            <a:ext cx="11091672" cy="548640"/>
+            <a:off x="457200" y="320040"/>
+            <a:ext cx="11247120" cy="548640"/>
           </a:xfrm>
           <a:prstGeom prst="rect">
             <a:avLst/>
@@ -3091,9 +3121,9 @@
                 <a:solidFill>
                   <a:srgbClr val="1E2761"/>
                 </a:solidFill>
-                <a:latin typeface="Cambria" pitchFamily="34" charset="0"/>
-                <a:ea typeface="Cambria" pitchFamily="34" charset="-122"/>
-                <a:cs typeface="Cambria" pitchFamily="34" charset="-120"/>
+                <a:latin typeface="Arial" pitchFamily="34" charset="0"/>
+                <a:ea typeface="Arial" pitchFamily="34"/>
+                <a:cs typeface="Arial" pitchFamily="34"/>
               </a:rPr>
               <a:t>Decision Points &amp; Exception Path</a:t>
             </a:r>
@@ -3110,17 +3140,138 @@
         <p:spPr>
           <a:xfrm>
             <a:off x="548640" y="1463040"/>
-            <a:ext cx="11091672" cy="1188720"/>
+            <a:ext cx="11064240" cy="1463040"/>
           </a:xfrm>
           <a:prstGeom prst="roundRect">
             <a:avLst>
-              <a:gd name="adj" fmla="val 6154"/>
+              <a:gd name="adj" fmla="val 3438"/>
             </a:avLst>
           </a:prstGeom>
           <a:solidFill>
-            <a:srgbClr val="F4F6FC"/>
+            <a:srgbClr val="F7F8FA"/>
           </a:solidFill>
-          <a:ln w="9525">
+          <a:ln w="12700">
+            <a:solidFill>
+              <a:srgbClr val="D5D9E0"/>
+            </a:solidFill>
+            <a:prstDash val="solid"/>
+          </a:ln>
+        </p:spPr>
+      </p:sp>
+      <p:sp>
+        <p:nvSpPr>
+          <p:cNvPr id="4" name="Text 2"/>
+          <p:cNvSpPr txBox="1"/>
+          <p:nvPr/>
+        </p:nvSpPr>
+        <p:spPr>
+          <a:xfrm>
+            <a:off x="822960" y="1645920"/>
+            <a:ext cx="10515600" cy="1097280"/>
+          </a:xfrm>
+          <a:prstGeom prst="rect">
+            <a:avLst/>
+          </a:prstGeom>
+          <a:noFill/>
+          <a:ln/>
+        </p:spPr>
+        <p:txBody>
+          <a:bodyPr wrap="square" lIns="0" tIns="0" rIns="0" bIns="0" rtlCol="0" anchor="ctr"/>
+          <a:lstStyle/>
+          <a:p>
+            <a:pPr indent="0" marL="0">
+              <a:lnSpc>
+                <a:spcPct val="130000"/>
+              </a:lnSpc>
+              <a:buNone/>
+            </a:pPr>
+            <a:r>
+              <a:rPr lang="en-US" sz="1300" b="1" dirty="0">
+                <a:solidFill>
+                  <a:srgbClr val="1E2761"/>
+                </a:solidFill>
+                <a:latin typeface="Calibri" pitchFamily="34" charset="0"/>
+                <a:ea typeface="Calibri" pitchFamily="34"/>
+                <a:cs typeface="Calibri" pitchFamily="34"/>
+              </a:rPr>
+              <a:t>Decision Point 1 — Eligibility check (Step 3):  </a:t>
+            </a:r>
+            <a:pPr indent="0" marL="0">
+              <a:lnSpc>
+                <a:spcPct val="130000"/>
+              </a:lnSpc>
+              <a:buNone/>
+            </a:pPr>
+            <a:r>
+              <a:rPr lang="en-US" sz="1300" dirty="0">
+                <a:solidFill>
+                  <a:srgbClr val="222533"/>
+                </a:solidFill>
+                <a:latin typeface="Calibri" pitchFamily="34" charset="0"/>
+                <a:ea typeface="Calibri" pitchFamily="34"/>
+                <a:cs typeface="Calibri" pitchFamily="34"/>
+              </a:rPr>
+              <a:t>Is the request within the 30-day window and not final-sale/clearance?
+</a:t>
+            </a:r>
+            <a:pPr indent="0" marL="0">
+              <a:lnSpc>
+                <a:spcPct val="130000"/>
+              </a:lnSpc>
+              <a:buNone/>
+            </a:pPr>
+            <a:r>
+              <a:rPr lang="en-US" sz="1300" b="1" dirty="0">
+                <a:solidFill>
+                  <a:srgbClr val="1E2761"/>
+                </a:solidFill>
+                <a:latin typeface="Calibri" pitchFamily="34" charset="0"/>
+                <a:ea typeface="Calibri" pitchFamily="34"/>
+                <a:cs typeface="Calibri" pitchFamily="34"/>
+              </a:rPr>
+              <a:t>Decision Point 2 — High-value defective routing (Step 4):  </a:t>
+            </a:r>
+            <a:pPr indent="0" marL="0">
+              <a:lnSpc>
+                <a:spcPct val="130000"/>
+              </a:lnSpc>
+              <a:buNone/>
+            </a:pPr>
+            <a:r>
+              <a:rPr lang="en-US" sz="1300" dirty="0">
+                <a:solidFill>
+                  <a:srgbClr val="222533"/>
+                </a:solidFill>
+                <a:latin typeface="Calibri" pitchFamily="34" charset="0"/>
+                <a:ea typeface="Calibri" pitchFamily="34"/>
+                <a:cs typeface="Calibri" pitchFamily="34"/>
+              </a:rPr>
+              <a:t>Is the reason “Defective” and the item value over $200 (BR-4)?</a:t>
+            </a:r>
+            <a:endParaRPr lang="en-US" sz="1300" dirty="0"/>
+          </a:p>
+        </p:txBody>
+      </p:sp>
+      <p:sp>
+        <p:nvSpPr>
+          <p:cNvPr id="5" name="Shape 3"/>
+          <p:cNvSpPr/>
+          <p:nvPr/>
+        </p:nvSpPr>
+        <p:spPr>
+          <a:xfrm>
+            <a:off x="548640" y="3200400"/>
+            <a:ext cx="11064240" cy="1645920"/>
+          </a:xfrm>
+          <a:prstGeom prst="roundRect">
+            <a:avLst>
+              <a:gd name="adj" fmla="val 3056"/>
+            </a:avLst>
+          </a:prstGeom>
+          <a:solidFill>
+            <a:srgbClr val="FFFFFF"/>
+          </a:solidFill>
+          <a:ln w="12700">
             <a:solidFill>
               <a:srgbClr val="1E2761"/>
             </a:solidFill>
@@ -3130,14 +3281,14 @@
       </p:sp>
       <p:sp>
         <p:nvSpPr>
-          <p:cNvPr id="4" name="Text 2"/>
+          <p:cNvPr id="6" name="Text 4"/>
           <p:cNvSpPr txBox="1"/>
           <p:nvPr/>
         </p:nvSpPr>
         <p:spPr>
           <a:xfrm>
-            <a:off x="822960" y="1600200"/>
-            <a:ext cx="10543032" cy="457200"/>
+            <a:off x="822960" y="3383280"/>
+            <a:ext cx="10515600" cy="320040"/>
           </a:xfrm>
           <a:prstGeom prst="rect">
             <a:avLst/>
@@ -3153,113 +3304,19 @@
               <a:buNone/>
             </a:pPr>
             <a:r>
-              <a:rPr lang="en-US" sz="1300" b="1" dirty="0">
+              <a:rPr lang="en-US" sz="1400" b="1" dirty="0">
                 <a:solidFill>
                   <a:srgbClr val="1E2761"/>
                 </a:solidFill>
                 <a:latin typeface="Calibri" pitchFamily="34" charset="0"/>
-                <a:ea typeface="Calibri" pitchFamily="34" charset="-122"/>
-                <a:cs typeface="Calibri" pitchFamily="34" charset="-120"/>
+                <a:ea typeface="Calibri" pitchFamily="34"/>
+                <a:cs typeface="Calibri" pitchFamily="34"/>
               </a:rPr>
-              <a:t>Decision Point 1 — Eligibility check (Step 3): </a:t>
+              <a:t>Exception Path (Steps 2–3)</a:t>
             </a:r>
-            <a:pPr indent="0" marL="0">
-              <a:buNone/>
-            </a:pPr>
-            <a:r>
-              <a:rPr lang="en-US" sz="1300" dirty="0">
-                <a:solidFill>
-                  <a:srgbClr val="202020"/>
-                </a:solidFill>
-                <a:latin typeface="Calibri" pitchFamily="34" charset="0"/>
-                <a:ea typeface="Calibri" pitchFamily="34" charset="-122"/>
-                <a:cs typeface="Calibri" pitchFamily="34" charset="-120"/>
-              </a:rPr>
-              <a:t>Is the request within the 30-day window and not final-sale/clearance?</a:t>
-            </a:r>
-            <a:endParaRPr lang="en-US" sz="1300" dirty="0"/>
+            <a:endParaRPr lang="en-US" sz="1400" dirty="0"/>
           </a:p>
         </p:txBody>
-      </p:sp>
-      <p:sp>
-        <p:nvSpPr>
-          <p:cNvPr id="5" name="Text 3"/>
-          <p:cNvSpPr txBox="1"/>
-          <p:nvPr/>
-        </p:nvSpPr>
-        <p:spPr>
-          <a:xfrm>
-            <a:off x="822960" y="2103120"/>
-            <a:ext cx="10543032" cy="457200"/>
-          </a:xfrm>
-          <a:prstGeom prst="rect">
-            <a:avLst/>
-          </a:prstGeom>
-          <a:noFill/>
-          <a:ln/>
-        </p:spPr>
-        <p:txBody>
-          <a:bodyPr wrap="square" lIns="0" tIns="0" rIns="0" bIns="0" rtlCol="0" anchor="ctr"/>
-          <a:lstStyle/>
-          <a:p>
-            <a:pPr indent="0" marL="0">
-              <a:buNone/>
-            </a:pPr>
-            <a:r>
-              <a:rPr lang="en-US" sz="1300" b="1" dirty="0">
-                <a:solidFill>
-                  <a:srgbClr val="1E2761"/>
-                </a:solidFill>
-                <a:latin typeface="Calibri" pitchFamily="34" charset="0"/>
-                <a:ea typeface="Calibri" pitchFamily="34" charset="-122"/>
-                <a:cs typeface="Calibri" pitchFamily="34" charset="-120"/>
-              </a:rPr>
-              <a:t>Decision Point 2 — High-value defective routing (Step 4): </a:t>
-            </a:r>
-            <a:pPr indent="0" marL="0">
-              <a:buNone/>
-            </a:pPr>
-            <a:r>
-              <a:rPr lang="en-US" sz="1300" dirty="0">
-                <a:solidFill>
-                  <a:srgbClr val="202020"/>
-                </a:solidFill>
-                <a:latin typeface="Calibri" pitchFamily="34" charset="0"/>
-                <a:ea typeface="Calibri" pitchFamily="34" charset="-122"/>
-                <a:cs typeface="Calibri" pitchFamily="34" charset="-120"/>
-              </a:rPr>
-              <a:t>Is the reason “Defective” and the item value over $200 (BR-4)?</a:t>
-            </a:r>
-            <a:endParaRPr lang="en-US" sz="1300" dirty="0"/>
-          </a:p>
-        </p:txBody>
-      </p:sp>
-      <p:sp>
-        <p:nvSpPr>
-          <p:cNvPr id="6" name="Shape 4"/>
-          <p:cNvSpPr/>
-          <p:nvPr/>
-        </p:nvSpPr>
-        <p:spPr>
-          <a:xfrm>
-            <a:off x="548640" y="2880360"/>
-            <a:ext cx="11091672" cy="1371600"/>
-          </a:xfrm>
-          <a:prstGeom prst="roundRect">
-            <a:avLst>
-              <a:gd name="adj" fmla="val 5333"/>
-            </a:avLst>
-          </a:prstGeom>
-          <a:solidFill>
-            <a:srgbClr val="FBE4E8"/>
-          </a:solidFill>
-          <a:ln w="9525">
-            <a:solidFill>
-              <a:srgbClr val="9B1B30"/>
-            </a:solidFill>
-            <a:prstDash val="solid"/>
-          </a:ln>
-        </p:spPr>
       </p:sp>
       <p:sp>
         <p:nvSpPr>
@@ -3269,47 +3326,8 @@
         </p:nvSpPr>
         <p:spPr>
           <a:xfrm>
-            <a:off x="822960" y="3017520"/>
-            <a:ext cx="10543032" cy="320040"/>
-          </a:xfrm>
-          <a:prstGeom prst="rect">
-            <a:avLst/>
-          </a:prstGeom>
-          <a:noFill/>
-          <a:ln/>
-        </p:spPr>
-        <p:txBody>
-          <a:bodyPr wrap="square" lIns="0" tIns="0" rIns="0" bIns="0" rtlCol="0" anchor="ctr"/>
-          <a:lstStyle/>
-          <a:p>
-            <a:pPr indent="0" marL="0">
-              <a:buNone/>
-            </a:pPr>
-            <a:r>
-              <a:rPr lang="en-US" sz="1500" b="1" dirty="0">
-                <a:solidFill>
-                  <a:srgbClr val="9B1B30"/>
-                </a:solidFill>
-                <a:latin typeface="Calibri" pitchFamily="34" charset="0"/>
-                <a:ea typeface="Calibri" pitchFamily="34" charset="-122"/>
-                <a:cs typeface="Calibri" pitchFamily="34" charset="-120"/>
-              </a:rPr>
-              <a:t>Exception Path (Steps 2–3)</a:t>
-            </a:r>
-            <a:endParaRPr lang="en-US" sz="1500" dirty="0"/>
-          </a:p>
-        </p:txBody>
-      </p:sp>
-      <p:sp>
-        <p:nvSpPr>
-          <p:cNvPr id="8" name="Text 6"/>
-          <p:cNvSpPr txBox="1"/>
-          <p:nvPr/>
-        </p:nvSpPr>
-        <p:spPr>
-          <a:xfrm>
-            <a:off x="822960" y="3383280"/>
-            <a:ext cx="10543032" cy="822960"/>
+            <a:off x="822960" y="3794760"/>
+            <a:ext cx="10515600" cy="914400"/>
           </a:xfrm>
           <a:prstGeom prst="rect">
             <a:avLst/>
@@ -3323,22 +3341,22 @@
           <a:p>
             <a:pPr indent="0" marL="0">
               <a:lnSpc>
-                <a:spcPct val="125000"/>
+                <a:spcPct val="130000"/>
               </a:lnSpc>
               <a:buNone/>
             </a:pPr>
             <a:r>
-              <a:rPr lang="en-US" sz="1250" dirty="0">
+              <a:rPr lang="en-US" sz="1300" dirty="0">
                 <a:solidFill>
-                  <a:srgbClr val="202020"/>
+                  <a:srgbClr val="222533"/>
                 </a:solidFill>
                 <a:latin typeface="Calibri" pitchFamily="34" charset="0"/>
-                <a:ea typeface="Calibri" pitchFamily="34" charset="-122"/>
-                <a:cs typeface="Calibri" pitchFamily="34" charset="-120"/>
+                <a:ea typeface="Calibri" pitchFamily="34"/>
+                <a:cs typeface="Calibri" pitchFamily="34"/>
               </a:rPr>
               <a:t>An order that fails validation — unknown order, quantity exceeding the original purchase, a purchase date more than 30 days old, or a final-sale/clearance item — is automatically rejected with a specific reason (BR-1, BR-2, BR-3) rather than silently failing or requiring manual intervention.</a:t>
             </a:r>
-            <a:endParaRPr lang="en-US" sz="1250" dirty="0"/>
+            <a:endParaRPr lang="en-US" sz="1300" dirty="0"/>
           </a:p>
         </p:txBody>
       </p:sp>
@@ -3382,8 +3400,8 @@
         </p:nvSpPr>
         <p:spPr>
           <a:xfrm>
-            <a:off x="548640" y="320040"/>
-            <a:ext cx="11091672" cy="548640"/>
+            <a:off x="457200" y="320040"/>
+            <a:ext cx="11247120" cy="548640"/>
           </a:xfrm>
           <a:prstGeom prst="rect">
             <a:avLst/>
@@ -3403,9 +3421,9 @@
                 <a:solidFill>
                   <a:srgbClr val="1E2761"/>
                 </a:solidFill>
-                <a:latin typeface="Cambria" pitchFamily="34" charset="0"/>
-                <a:ea typeface="Cambria" pitchFamily="34" charset="-122"/>
-                <a:cs typeface="Cambria" pitchFamily="34" charset="-120"/>
+                <a:latin typeface="Arial" pitchFamily="34" charset="0"/>
+                <a:ea typeface="Arial" pitchFamily="34"/>
+                <a:cs typeface="Arial" pitchFamily="34"/>
               </a:rPr>
               <a:t>Workflow Worksheet (1 of 2)</a:t>
             </a:r>
@@ -3421,8 +3439,8 @@
         </p:nvSpPr>
         <p:spPr>
           <a:xfrm>
-            <a:off x="548640" y="868680"/>
-            <a:ext cx="11091672" cy="320040"/>
+            <a:off x="457200" y="868680"/>
+            <a:ext cx="11247120" cy="320040"/>
           </a:xfrm>
           <a:prstGeom prst="rect">
             <a:avLst/>
@@ -3438,17 +3456,17 @@
               <a:buNone/>
             </a:pPr>
             <a:r>
-              <a:rPr lang="en-US" sz="1400" dirty="0">
+              <a:rPr lang="en-US" sz="1300" dirty="0">
                 <a:solidFill>
-                  <a:srgbClr val="555555"/>
+                  <a:srgbClr val="5B6072"/>
                 </a:solidFill>
                 <a:latin typeface="Calibri" pitchFamily="34" charset="0"/>
-                <a:ea typeface="Calibri" pitchFamily="34" charset="-122"/>
-                <a:cs typeface="Calibri" pitchFamily="34" charset="-120"/>
+                <a:ea typeface="Calibri" pitchFamily="34"/>
+                <a:cs typeface="Calibri" pitchFamily="34"/>
               </a:rPr>
               <a:t>Columns: # | Actor | Action | Decision / Condition | Outcome / Next Step</a:t>
             </a:r>
-            <a:endParaRPr lang="en-US" sz="1400" dirty="0"/>
+            <a:endParaRPr lang="en-US" sz="1300" dirty="0"/>
           </a:p>
         </p:txBody>
       </p:sp>
@@ -3467,21 +3485,21 @@
           </p:nvPr>
         </p:nvGraphicFramePr>
         <p:xfrm>
-          <a:off x="457200" y="1371600"/>
-          <a:ext cx="11274552" cy="914400"/>
+          <a:off x="457200" y="1554480"/>
+          <a:ext cx="11247120" cy="914400"/>
         </p:xfrm>
         <a:graphic>
           <a:graphicData uri="http://schemas.openxmlformats.org/drawingml/2006/table">
             <a:tbl>
               <a:tblPr/>
               <a:tblGrid>
-                <a:gridCol w="457200"/>
-                <a:gridCol w="1554480"/>
+                <a:gridCol w="548640"/>
+                <a:gridCol w="1371600"/>
+                <a:gridCol w="3291840"/>
                 <a:gridCol w="3017520"/>
                 <a:gridCol w="3017520"/>
-                <a:gridCol w="3291840"/>
               </a:tblGrid>
-              <a:tr h="658368">
+              <a:tr h="0">
                 <a:tc>
                   <a:txBody>
                     <a:bodyPr/>
@@ -3496,8 +3514,8 @@
                             <a:srgbClr val="FFFFFF"/>
                           </a:solidFill>
                           <a:latin typeface="Calibri" pitchFamily="34" charset="0"/>
-                          <a:ea typeface="Calibri" pitchFamily="34" charset="-122"/>
-                          <a:cs typeface="Calibri" pitchFamily="34" charset="-120"/>
+                          <a:ea typeface="Calibri" pitchFamily="34"/>
+                          <a:cs typeface="Calibri" pitchFamily="34"/>
                         </a:rPr>
                         <a:t>#</a:t>
                       </a:r>
@@ -3511,7 +3529,7 @@
                   <a:tcPr marL="91440" marR="91440" marT="45720" marB="45720" anchor="ctr">
                     <a:lnL w="9525" cap="flat" cmpd="sng" algn="ctr">
                       <a:solidFill>
-                        <a:srgbClr val="D9D9D9"/>
+                        <a:srgbClr val="D5D9E0"/>
                       </a:solidFill>
                       <a:prstDash val="solid"/>
                       <a:round/>
@@ -3520,7 +3538,7 @@
                     </a:lnL>
                     <a:lnR w="9525" cap="flat" cmpd="sng" algn="ctr">
                       <a:solidFill>
-                        <a:srgbClr val="D9D9D9"/>
+                        <a:srgbClr val="D5D9E0"/>
                       </a:solidFill>
                       <a:prstDash val="solid"/>
                       <a:round/>
@@ -3529,7 +3547,7 @@
                     </a:lnR>
                     <a:lnT w="9525" cap="flat" cmpd="sng" algn="ctr">
                       <a:solidFill>
-                        <a:srgbClr val="D9D9D9"/>
+                        <a:srgbClr val="D5D9E0"/>
                       </a:solidFill>
                       <a:prstDash val="solid"/>
                       <a:round/>
@@ -3538,7 +3556,7 @@
                     </a:lnT>
                     <a:lnB w="9525" cap="flat" cmpd="sng" algn="ctr">
                       <a:solidFill>
-                        <a:srgbClr val="D9D9D9"/>
+                        <a:srgbClr val="D5D9E0"/>
                       </a:solidFill>
                       <a:prstDash val="solid"/>
                       <a:round/>
@@ -3564,8 +3582,8 @@
                             <a:srgbClr val="FFFFFF"/>
                           </a:solidFill>
                           <a:latin typeface="Calibri" pitchFamily="34" charset="0"/>
-                          <a:ea typeface="Calibri" pitchFamily="34" charset="-122"/>
-                          <a:cs typeface="Calibri" pitchFamily="34" charset="-120"/>
+                          <a:ea typeface="Calibri" pitchFamily="34"/>
+                          <a:cs typeface="Calibri" pitchFamily="34"/>
                         </a:rPr>
                         <a:t>Actor</a:t>
                       </a:r>
@@ -3579,7 +3597,7 @@
                   <a:tcPr marL="91440" marR="91440" marT="45720" marB="45720" anchor="ctr">
                     <a:lnL w="9525" cap="flat" cmpd="sng" algn="ctr">
                       <a:solidFill>
-                        <a:srgbClr val="D9D9D9"/>
+                        <a:srgbClr val="D5D9E0"/>
                       </a:solidFill>
                       <a:prstDash val="solid"/>
                       <a:round/>
@@ -3588,7 +3606,7 @@
                     </a:lnL>
                     <a:lnR w="9525" cap="flat" cmpd="sng" algn="ctr">
                       <a:solidFill>
-                        <a:srgbClr val="D9D9D9"/>
+                        <a:srgbClr val="D5D9E0"/>
                       </a:solidFill>
                       <a:prstDash val="solid"/>
                       <a:round/>
@@ -3597,7 +3615,7 @@
                     </a:lnR>
                     <a:lnT w="9525" cap="flat" cmpd="sng" algn="ctr">
                       <a:solidFill>
-                        <a:srgbClr val="D9D9D9"/>
+                        <a:srgbClr val="D5D9E0"/>
                       </a:solidFill>
                       <a:prstDash val="solid"/>
                       <a:round/>
@@ -3606,7 +3624,7 @@
                     </a:lnT>
                     <a:lnB w="9525" cap="flat" cmpd="sng" algn="ctr">
                       <a:solidFill>
-                        <a:srgbClr val="D9D9D9"/>
+                        <a:srgbClr val="D5D9E0"/>
                       </a:solidFill>
                       <a:prstDash val="solid"/>
                       <a:round/>
@@ -3632,8 +3650,8 @@
                             <a:srgbClr val="FFFFFF"/>
                           </a:solidFill>
                           <a:latin typeface="Calibri" pitchFamily="34" charset="0"/>
-                          <a:ea typeface="Calibri" pitchFamily="34" charset="-122"/>
-                          <a:cs typeface="Calibri" pitchFamily="34" charset="-120"/>
+                          <a:ea typeface="Calibri" pitchFamily="34"/>
+                          <a:cs typeface="Calibri" pitchFamily="34"/>
                         </a:rPr>
                         <a:t>Action</a:t>
                       </a:r>
@@ -3647,7 +3665,7 @@
                   <a:tcPr marL="91440" marR="91440" marT="45720" marB="45720" anchor="ctr">
                     <a:lnL w="9525" cap="flat" cmpd="sng" algn="ctr">
                       <a:solidFill>
-                        <a:srgbClr val="D9D9D9"/>
+                        <a:srgbClr val="D5D9E0"/>
                       </a:solidFill>
                       <a:prstDash val="solid"/>
                       <a:round/>
@@ -3656,7 +3674,7 @@
                     </a:lnL>
                     <a:lnR w="9525" cap="flat" cmpd="sng" algn="ctr">
                       <a:solidFill>
-                        <a:srgbClr val="D9D9D9"/>
+                        <a:srgbClr val="D5D9E0"/>
                       </a:solidFill>
                       <a:prstDash val="solid"/>
                       <a:round/>
@@ -3665,7 +3683,7 @@
                     </a:lnR>
                     <a:lnT w="9525" cap="flat" cmpd="sng" algn="ctr">
                       <a:solidFill>
-                        <a:srgbClr val="D9D9D9"/>
+                        <a:srgbClr val="D5D9E0"/>
                       </a:solidFill>
                       <a:prstDash val="solid"/>
                       <a:round/>
@@ -3674,7 +3692,7 @@
                     </a:lnT>
                     <a:lnB w="9525" cap="flat" cmpd="sng" algn="ctr">
                       <a:solidFill>
-                        <a:srgbClr val="D9D9D9"/>
+                        <a:srgbClr val="D5D9E0"/>
                       </a:solidFill>
                       <a:prstDash val="solid"/>
                       <a:round/>
@@ -3700,8 +3718,8 @@
                             <a:srgbClr val="FFFFFF"/>
                           </a:solidFill>
                           <a:latin typeface="Calibri" pitchFamily="34" charset="0"/>
-                          <a:ea typeface="Calibri" pitchFamily="34" charset="-122"/>
-                          <a:cs typeface="Calibri" pitchFamily="34" charset="-120"/>
+                          <a:ea typeface="Calibri" pitchFamily="34"/>
+                          <a:cs typeface="Calibri" pitchFamily="34"/>
                         </a:rPr>
                         <a:t>Decision / Condition</a:t>
                       </a:r>
@@ -3715,7 +3733,7 @@
                   <a:tcPr marL="91440" marR="91440" marT="45720" marB="45720" anchor="ctr">
                     <a:lnL w="9525" cap="flat" cmpd="sng" algn="ctr">
                       <a:solidFill>
-                        <a:srgbClr val="D9D9D9"/>
+                        <a:srgbClr val="D5D9E0"/>
                       </a:solidFill>
                       <a:prstDash val="solid"/>
                       <a:round/>
@@ -3724,7 +3742,7 @@
                     </a:lnL>
                     <a:lnR w="9525" cap="flat" cmpd="sng" algn="ctr">
                       <a:solidFill>
-                        <a:srgbClr val="D9D9D9"/>
+                        <a:srgbClr val="D5D9E0"/>
                       </a:solidFill>
                       <a:prstDash val="solid"/>
                       <a:round/>
@@ -3733,7 +3751,7 @@
                     </a:lnR>
                     <a:lnT w="9525" cap="flat" cmpd="sng" algn="ctr">
                       <a:solidFill>
-                        <a:srgbClr val="D9D9D9"/>
+                        <a:srgbClr val="D5D9E0"/>
                       </a:solidFill>
                       <a:prstDash val="solid"/>
                       <a:round/>
@@ -3742,7 +3760,7 @@
                     </a:lnT>
                     <a:lnB w="9525" cap="flat" cmpd="sng" algn="ctr">
                       <a:solidFill>
-                        <a:srgbClr val="D9D9D9"/>
+                        <a:srgbClr val="D5D9E0"/>
                       </a:solidFill>
                       <a:prstDash val="solid"/>
                       <a:round/>
@@ -3768,8 +3786,8 @@
                             <a:srgbClr val="FFFFFF"/>
                           </a:solidFill>
                           <a:latin typeface="Calibri" pitchFamily="34" charset="0"/>
-                          <a:ea typeface="Calibri" pitchFamily="34" charset="-122"/>
-                          <a:cs typeface="Calibri" pitchFamily="34" charset="-120"/>
+                          <a:ea typeface="Calibri" pitchFamily="34"/>
+                          <a:cs typeface="Calibri" pitchFamily="34"/>
                         </a:rPr>
                         <a:t>Outcome / Next Step</a:t>
                       </a:r>
@@ -3783,7 +3801,7 @@
                   <a:tcPr marL="91440" marR="91440" marT="45720" marB="45720" anchor="ctr">
                     <a:lnL w="9525" cap="flat" cmpd="sng" algn="ctr">
                       <a:solidFill>
-                        <a:srgbClr val="D9D9D9"/>
+                        <a:srgbClr val="D5D9E0"/>
                       </a:solidFill>
                       <a:prstDash val="solid"/>
                       <a:round/>
@@ -3792,7 +3810,7 @@
                     </a:lnL>
                     <a:lnR w="9525" cap="flat" cmpd="sng" algn="ctr">
                       <a:solidFill>
-                        <a:srgbClr val="D9D9D9"/>
+                        <a:srgbClr val="D5D9E0"/>
                       </a:solidFill>
                       <a:prstDash val="solid"/>
                       <a:round/>
@@ -3801,7 +3819,7 @@
                     </a:lnR>
                     <a:lnT w="9525" cap="flat" cmpd="sng" algn="ctr">
                       <a:solidFill>
-                        <a:srgbClr val="D9D9D9"/>
+                        <a:srgbClr val="D5D9E0"/>
                       </a:solidFill>
                       <a:prstDash val="solid"/>
                       <a:round/>
@@ -3810,7 +3828,7 @@
                     </a:lnT>
                     <a:lnB w="9525" cap="flat" cmpd="sng" algn="ctr">
                       <a:solidFill>
-                        <a:srgbClr val="D9D9D9"/>
+                        <a:srgbClr val="D5D9E0"/>
                       </a:solidFill>
                       <a:prstDash val="solid"/>
                       <a:round/>
@@ -3823,7 +3841,7 @@
                   </a:tcPr>
                 </a:tc>
               </a:tr>
-              <a:tr h="658368">
+              <a:tr h="0">
                 <a:tc>
                   <a:txBody>
                     <a:bodyPr/>
@@ -3833,27 +3851,27 @@
                         <a:buNone/>
                       </a:pPr>
                       <a:r>
-                        <a:rPr lang="en-US" sz="1050" dirty="0">
+                        <a:rPr lang="en-US" sz="1100" dirty="0">
                           <a:solidFill>
-                            <a:srgbClr val="202020"/>
+                            <a:srgbClr val="222533"/>
                           </a:solidFill>
-                          <a:latin typeface="Calibri" pitchFamily="34" charset="0"/>
-                          <a:ea typeface="Calibri" pitchFamily="34" charset="-122"/>
-                          <a:cs typeface="Calibri" pitchFamily="34" charset="-120"/>
+                          <a:latin typeface="Courier New" pitchFamily="34" charset="0"/>
+                          <a:ea typeface="Courier New" pitchFamily="34"/>
+                          <a:cs typeface="Courier New" pitchFamily="34"/>
                         </a:rPr>
                         <a:t>1</a:t>
                       </a:r>
-                      <a:endParaRPr lang="en-US" sz="1050" dirty="0">
-                        <a:latin typeface="Calibri" charset="0"/>
-                        <a:ea typeface="Calibri" charset="0"/>
-                        <a:cs typeface="Calibri" charset="0"/>
+                      <a:endParaRPr lang="en-US" sz="1100" dirty="0">
+                        <a:latin typeface="Courier New" charset="0"/>
+                        <a:ea typeface="Courier New" charset="0"/>
+                        <a:cs typeface="Courier New" charset="0"/>
                       </a:endParaRPr>
                     </a:p>
                   </a:txBody>
                   <a:tcPr marL="91440" marR="91440" marT="45720" marB="45720" anchor="ctr">
                     <a:lnL w="9525" cap="flat" cmpd="sng" algn="ctr">
                       <a:solidFill>
-                        <a:srgbClr val="D9D9D9"/>
+                        <a:srgbClr val="D5D9E0"/>
                       </a:solidFill>
                       <a:prstDash val="solid"/>
                       <a:round/>
@@ -3862,7 +3880,7 @@
                     </a:lnL>
                     <a:lnR w="9525" cap="flat" cmpd="sng" algn="ctr">
                       <a:solidFill>
-                        <a:srgbClr val="D9D9D9"/>
+                        <a:srgbClr val="D5D9E0"/>
                       </a:solidFill>
                       <a:prstDash val="solid"/>
                       <a:round/>
@@ -3871,7 +3889,7 @@
                     </a:lnR>
                     <a:lnT w="9525" cap="flat" cmpd="sng" algn="ctr">
                       <a:solidFill>
-                        <a:srgbClr val="D9D9D9"/>
+                        <a:srgbClr val="D5D9E0"/>
                       </a:solidFill>
                       <a:prstDash val="solid"/>
                       <a:round/>
@@ -3880,7 +3898,7 @@
                     </a:lnT>
                     <a:lnB w="9525" cap="flat" cmpd="sng" algn="ctr">
                       <a:solidFill>
-                        <a:srgbClr val="D9D9D9"/>
+                        <a:srgbClr val="D5D9E0"/>
                       </a:solidFill>
                       <a:prstDash val="solid"/>
                       <a:round/>
@@ -3901,17 +3919,17 @@
                         <a:buNone/>
                       </a:pPr>
                       <a:r>
-                        <a:rPr lang="en-US" sz="1050" dirty="0">
+                        <a:rPr lang="en-US" sz="1150" dirty="0">
                           <a:solidFill>
-                            <a:srgbClr val="202020"/>
+                            <a:srgbClr val="222533"/>
                           </a:solidFill>
                           <a:latin typeface="Calibri" pitchFamily="34" charset="0"/>
-                          <a:ea typeface="Calibri" pitchFamily="34" charset="-122"/>
-                          <a:cs typeface="Calibri" pitchFamily="34" charset="-120"/>
+                          <a:ea typeface="Calibri" pitchFamily="34"/>
+                          <a:cs typeface="Calibri" pitchFamily="34"/>
                         </a:rPr>
                         <a:t>Customer</a:t>
                       </a:r>
-                      <a:endParaRPr lang="en-US" sz="1050" dirty="0">
+                      <a:endParaRPr lang="en-US" sz="1150" dirty="0">
                         <a:latin typeface="Calibri" charset="0"/>
                         <a:ea typeface="Calibri" charset="0"/>
                         <a:cs typeface="Calibri" charset="0"/>
@@ -3921,7 +3939,7 @@
                   <a:tcPr marL="91440" marR="91440" marT="45720" marB="45720" anchor="ctr">
                     <a:lnL w="9525" cap="flat" cmpd="sng" algn="ctr">
                       <a:solidFill>
-                        <a:srgbClr val="D9D9D9"/>
+                        <a:srgbClr val="D5D9E0"/>
                       </a:solidFill>
                       <a:prstDash val="solid"/>
                       <a:round/>
@@ -3930,7 +3948,7 @@
                     </a:lnL>
                     <a:lnR w="9525" cap="flat" cmpd="sng" algn="ctr">
                       <a:solidFill>
-                        <a:srgbClr val="D9D9D9"/>
+                        <a:srgbClr val="D5D9E0"/>
                       </a:solidFill>
                       <a:prstDash val="solid"/>
                       <a:round/>
@@ -3939,7 +3957,7 @@
                     </a:lnR>
                     <a:lnT w="9525" cap="flat" cmpd="sng" algn="ctr">
                       <a:solidFill>
-                        <a:srgbClr val="D9D9D9"/>
+                        <a:srgbClr val="D5D9E0"/>
                       </a:solidFill>
                       <a:prstDash val="solid"/>
                       <a:round/>
@@ -3948,7 +3966,7 @@
                     </a:lnT>
                     <a:lnB w="9525" cap="flat" cmpd="sng" algn="ctr">
                       <a:solidFill>
-                        <a:srgbClr val="D9D9D9"/>
+                        <a:srgbClr val="D5D9E0"/>
                       </a:solidFill>
                       <a:prstDash val="solid"/>
                       <a:round/>
@@ -3969,17 +3987,17 @@
                         <a:buNone/>
                       </a:pPr>
                       <a:r>
-                        <a:rPr lang="en-US" sz="1050" dirty="0">
+                        <a:rPr lang="en-US" sz="1150" dirty="0">
                           <a:solidFill>
-                            <a:srgbClr val="202020"/>
+                            <a:srgbClr val="222533"/>
                           </a:solidFill>
                           <a:latin typeface="Calibri" pitchFamily="34" charset="0"/>
-                          <a:ea typeface="Calibri" pitchFamily="34" charset="-122"/>
-                          <a:cs typeface="Calibri" pitchFamily="34" charset="-120"/>
+                          <a:ea typeface="Calibri" pitchFamily="34"/>
+                          <a:cs typeface="Calibri" pitchFamily="34"/>
                         </a:rPr>
                         <a:t>Submits return request (customer ID, order #, SKU, qty, reason, resolution)</a:t>
                       </a:r>
-                      <a:endParaRPr lang="en-US" sz="1050" dirty="0">
+                      <a:endParaRPr lang="en-US" sz="1150" dirty="0">
                         <a:latin typeface="Calibri" charset="0"/>
                         <a:ea typeface="Calibri" charset="0"/>
                         <a:cs typeface="Calibri" charset="0"/>
@@ -3989,7 +4007,7 @@
                   <a:tcPr marL="91440" marR="91440" marT="45720" marB="45720" anchor="ctr">
                     <a:lnL w="9525" cap="flat" cmpd="sng" algn="ctr">
                       <a:solidFill>
-                        <a:srgbClr val="D9D9D9"/>
+                        <a:srgbClr val="D5D9E0"/>
                       </a:solidFill>
                       <a:prstDash val="solid"/>
                       <a:round/>
@@ -3998,7 +4016,7 @@
                     </a:lnL>
                     <a:lnR w="9525" cap="flat" cmpd="sng" algn="ctr">
                       <a:solidFill>
-                        <a:srgbClr val="D9D9D9"/>
+                        <a:srgbClr val="D5D9E0"/>
                       </a:solidFill>
                       <a:prstDash val="solid"/>
                       <a:round/>
@@ -4007,7 +4025,7 @@
                     </a:lnR>
                     <a:lnT w="9525" cap="flat" cmpd="sng" algn="ctr">
                       <a:solidFill>
-                        <a:srgbClr val="D9D9D9"/>
+                        <a:srgbClr val="D5D9E0"/>
                       </a:solidFill>
                       <a:prstDash val="solid"/>
                       <a:round/>
@@ -4016,7 +4034,7 @@
                     </a:lnT>
                     <a:lnB w="9525" cap="flat" cmpd="sng" algn="ctr">
                       <a:solidFill>
-                        <a:srgbClr val="D9D9D9"/>
+                        <a:srgbClr val="D5D9E0"/>
                       </a:solidFill>
                       <a:prstDash val="solid"/>
                       <a:round/>
@@ -4037,17 +4055,17 @@
                         <a:buNone/>
                       </a:pPr>
                       <a:r>
-                        <a:rPr lang="en-US" sz="1050" dirty="0">
+                        <a:rPr lang="en-US" sz="1150" dirty="0">
                           <a:solidFill>
-                            <a:srgbClr val="202020"/>
+                            <a:srgbClr val="222533"/>
                           </a:solidFill>
                           <a:latin typeface="Calibri" pitchFamily="34" charset="0"/>
-                          <a:ea typeface="Calibri" pitchFamily="34" charset="-122"/>
-                          <a:cs typeface="Calibri" pitchFamily="34" charset="-120"/>
+                          <a:ea typeface="Calibri" pitchFamily="34"/>
+                          <a:cs typeface="Calibri" pitchFamily="34"/>
                         </a:rPr>
                         <a:t>Required fields present?</a:t>
                       </a:r>
-                      <a:endParaRPr lang="en-US" sz="1050" dirty="0">
+                      <a:endParaRPr lang="en-US" sz="1150" dirty="0">
                         <a:latin typeface="Calibri" charset="0"/>
                         <a:ea typeface="Calibri" charset="0"/>
                         <a:cs typeface="Calibri" charset="0"/>
@@ -4057,7 +4075,7 @@
                   <a:tcPr marL="91440" marR="91440" marT="45720" marB="45720" anchor="ctr">
                     <a:lnL w="9525" cap="flat" cmpd="sng" algn="ctr">
                       <a:solidFill>
-                        <a:srgbClr val="D9D9D9"/>
+                        <a:srgbClr val="D5D9E0"/>
                       </a:solidFill>
                       <a:prstDash val="solid"/>
                       <a:round/>
@@ -4066,7 +4084,7 @@
                     </a:lnL>
                     <a:lnR w="9525" cap="flat" cmpd="sng" algn="ctr">
                       <a:solidFill>
-                        <a:srgbClr val="D9D9D9"/>
+                        <a:srgbClr val="D5D9E0"/>
                       </a:solidFill>
                       <a:prstDash val="solid"/>
                       <a:round/>
@@ -4075,7 +4093,7 @@
                     </a:lnR>
                     <a:lnT w="9525" cap="flat" cmpd="sng" algn="ctr">
                       <a:solidFill>
-                        <a:srgbClr val="D9D9D9"/>
+                        <a:srgbClr val="D5D9E0"/>
                       </a:solidFill>
                       <a:prstDash val="solid"/>
                       <a:round/>
@@ -4084,7 +4102,7 @@
                     </a:lnT>
                     <a:lnB w="9525" cap="flat" cmpd="sng" algn="ctr">
                       <a:solidFill>
-                        <a:srgbClr val="D9D9D9"/>
+                        <a:srgbClr val="D5D9E0"/>
                       </a:solidFill>
                       <a:prstDash val="solid"/>
                       <a:round/>
@@ -4105,17 +4123,17 @@
                         <a:buNone/>
                       </a:pPr>
                       <a:r>
-                        <a:rPr lang="en-US" sz="1050" dirty="0">
+                        <a:rPr lang="en-US" sz="1150" dirty="0">
                           <a:solidFill>
-                            <a:srgbClr val="202020"/>
+                            <a:srgbClr val="222533"/>
                           </a:solidFill>
                           <a:latin typeface="Calibri" pitchFamily="34" charset="0"/>
-                          <a:ea typeface="Calibri" pitchFamily="34" charset="-122"/>
-                          <a:cs typeface="Calibri" pitchFamily="34" charset="-120"/>
+                          <a:ea typeface="Calibri" pitchFamily="34"/>
+                          <a:cs typeface="Calibri" pitchFamily="34"/>
                         </a:rPr>
                         <a:t>If missing → reject and flag field; if complete → continue</a:t>
                       </a:r>
-                      <a:endParaRPr lang="en-US" sz="1050" dirty="0">
+                      <a:endParaRPr lang="en-US" sz="1150" dirty="0">
                         <a:latin typeface="Calibri" charset="0"/>
                         <a:ea typeface="Calibri" charset="0"/>
                         <a:cs typeface="Calibri" charset="0"/>
@@ -4125,7 +4143,7 @@
                   <a:tcPr marL="91440" marR="91440" marT="45720" marB="45720" anchor="ctr">
                     <a:lnL w="9525" cap="flat" cmpd="sng" algn="ctr">
                       <a:solidFill>
-                        <a:srgbClr val="D9D9D9"/>
+                        <a:srgbClr val="D5D9E0"/>
                       </a:solidFill>
                       <a:prstDash val="solid"/>
                       <a:round/>
@@ -4134,7 +4152,7 @@
                     </a:lnL>
                     <a:lnR w="9525" cap="flat" cmpd="sng" algn="ctr">
                       <a:solidFill>
-                        <a:srgbClr val="D9D9D9"/>
+                        <a:srgbClr val="D5D9E0"/>
                       </a:solidFill>
                       <a:prstDash val="solid"/>
                       <a:round/>
@@ -4143,7 +4161,7 @@
                     </a:lnR>
                     <a:lnT w="9525" cap="flat" cmpd="sng" algn="ctr">
                       <a:solidFill>
-                        <a:srgbClr val="D9D9D9"/>
+                        <a:srgbClr val="D5D9E0"/>
                       </a:solidFill>
                       <a:prstDash val="solid"/>
                       <a:round/>
@@ -4152,7 +4170,7 @@
                     </a:lnT>
                     <a:lnB w="9525" cap="flat" cmpd="sng" algn="ctr">
                       <a:solidFill>
-                        <a:srgbClr val="D9D9D9"/>
+                        <a:srgbClr val="D5D9E0"/>
                       </a:solidFill>
                       <a:prstDash val="solid"/>
                       <a:round/>
@@ -4165,7 +4183,7 @@
                   </a:tcPr>
                 </a:tc>
               </a:tr>
-              <a:tr h="658368">
+              <a:tr h="0">
                 <a:tc>
                   <a:txBody>
                     <a:bodyPr/>
@@ -4175,27 +4193,27 @@
                         <a:buNone/>
                       </a:pPr>
                       <a:r>
-                        <a:rPr lang="en-US" sz="1050" dirty="0">
+                        <a:rPr lang="en-US" sz="1100" dirty="0">
                           <a:solidFill>
-                            <a:srgbClr val="202020"/>
+                            <a:srgbClr val="222533"/>
                           </a:solidFill>
-                          <a:latin typeface="Calibri" pitchFamily="34" charset="0"/>
-                          <a:ea typeface="Calibri" pitchFamily="34" charset="-122"/>
-                          <a:cs typeface="Calibri" pitchFamily="34" charset="-120"/>
+                          <a:latin typeface="Courier New" pitchFamily="34" charset="0"/>
+                          <a:ea typeface="Courier New" pitchFamily="34"/>
+                          <a:cs typeface="Courier New" pitchFamily="34"/>
                         </a:rPr>
                         <a:t>2</a:t>
                       </a:r>
-                      <a:endParaRPr lang="en-US" sz="1050" dirty="0">
-                        <a:latin typeface="Calibri" charset="0"/>
-                        <a:ea typeface="Calibri" charset="0"/>
-                        <a:cs typeface="Calibri" charset="0"/>
+                      <a:endParaRPr lang="en-US" sz="1100" dirty="0">
+                        <a:latin typeface="Courier New" charset="0"/>
+                        <a:ea typeface="Courier New" charset="0"/>
+                        <a:cs typeface="Courier New" charset="0"/>
                       </a:endParaRPr>
                     </a:p>
                   </a:txBody>
                   <a:tcPr marL="91440" marR="91440" marT="45720" marB="45720" anchor="ctr">
                     <a:lnL w="9525" cap="flat" cmpd="sng" algn="ctr">
                       <a:solidFill>
-                        <a:srgbClr val="D9D9D9"/>
+                        <a:srgbClr val="D5D9E0"/>
                       </a:solidFill>
                       <a:prstDash val="solid"/>
                       <a:round/>
@@ -4204,7 +4222,7 @@
                     </a:lnL>
                     <a:lnR w="9525" cap="flat" cmpd="sng" algn="ctr">
                       <a:solidFill>
-                        <a:srgbClr val="D9D9D9"/>
+                        <a:srgbClr val="D5D9E0"/>
                       </a:solidFill>
                       <a:prstDash val="solid"/>
                       <a:round/>
@@ -4213,7 +4231,7 @@
                     </a:lnR>
                     <a:lnT w="9525" cap="flat" cmpd="sng" algn="ctr">
                       <a:solidFill>
-                        <a:srgbClr val="D9D9D9"/>
+                        <a:srgbClr val="D5D9E0"/>
                       </a:solidFill>
                       <a:prstDash val="solid"/>
                       <a:round/>
@@ -4222,7 +4240,7 @@
                     </a:lnT>
                     <a:lnB w="9525" cap="flat" cmpd="sng" algn="ctr">
                       <a:solidFill>
-                        <a:srgbClr val="D9D9D9"/>
+                        <a:srgbClr val="D5D9E0"/>
                       </a:solidFill>
                       <a:prstDash val="solid"/>
                       <a:round/>
@@ -4230,7 +4248,7 @@
                       <a:tailEnd type="none" w="med" len="med"/>
                     </a:lnB>
                     <a:solidFill>
-                      <a:srgbClr val="F4F6FC"/>
+                      <a:srgbClr val="F7F8FA"/>
                     </a:solidFill>
                   </a:tcPr>
                 </a:tc>
@@ -4243,17 +4261,17 @@
                         <a:buNone/>
                       </a:pPr>
                       <a:r>
-                        <a:rPr lang="en-US" sz="1050" dirty="0">
+                        <a:rPr lang="en-US" sz="1150" dirty="0">
                           <a:solidFill>
-                            <a:srgbClr val="202020"/>
+                            <a:srgbClr val="222533"/>
                           </a:solidFill>
                           <a:latin typeface="Calibri" pitchFamily="34" charset="0"/>
-                          <a:ea typeface="Calibri" pitchFamily="34" charset="-122"/>
-                          <a:cs typeface="Calibri" pitchFamily="34" charset="-120"/>
+                          <a:ea typeface="Calibri" pitchFamily="34"/>
+                          <a:cs typeface="Calibri" pitchFamily="34"/>
                         </a:rPr>
                         <a:t>System</a:t>
                       </a:r>
-                      <a:endParaRPr lang="en-US" sz="1050" dirty="0">
+                      <a:endParaRPr lang="en-US" sz="1150" dirty="0">
                         <a:latin typeface="Calibri" charset="0"/>
                         <a:ea typeface="Calibri" charset="0"/>
                         <a:cs typeface="Calibri" charset="0"/>
@@ -4263,7 +4281,7 @@
                   <a:tcPr marL="91440" marR="91440" marT="45720" marB="45720" anchor="ctr">
                     <a:lnL w="9525" cap="flat" cmpd="sng" algn="ctr">
                       <a:solidFill>
-                        <a:srgbClr val="D9D9D9"/>
+                        <a:srgbClr val="D5D9E0"/>
                       </a:solidFill>
                       <a:prstDash val="solid"/>
                       <a:round/>
@@ -4272,7 +4290,7 @@
                     </a:lnL>
                     <a:lnR w="9525" cap="flat" cmpd="sng" algn="ctr">
                       <a:solidFill>
-                        <a:srgbClr val="D9D9D9"/>
+                        <a:srgbClr val="D5D9E0"/>
                       </a:solidFill>
                       <a:prstDash val="solid"/>
                       <a:round/>
@@ -4281,7 +4299,7 @@
                     </a:lnR>
                     <a:lnT w="9525" cap="flat" cmpd="sng" algn="ctr">
                       <a:solidFill>
-                        <a:srgbClr val="D9D9D9"/>
+                        <a:srgbClr val="D5D9E0"/>
                       </a:solidFill>
                       <a:prstDash val="solid"/>
                       <a:round/>
@@ -4290,7 +4308,7 @@
                     </a:lnT>
                     <a:lnB w="9525" cap="flat" cmpd="sng" algn="ctr">
                       <a:solidFill>
-                        <a:srgbClr val="D9D9D9"/>
+                        <a:srgbClr val="D5D9E0"/>
                       </a:solidFill>
                       <a:prstDash val="solid"/>
                       <a:round/>
@@ -4298,7 +4316,7 @@
                       <a:tailEnd type="none" w="med" len="med"/>
                     </a:lnB>
                     <a:solidFill>
-                      <a:srgbClr val="F4F6FC"/>
+                      <a:srgbClr val="F7F8FA"/>
                     </a:solidFill>
                   </a:tcPr>
                 </a:tc>
@@ -4311,17 +4329,17 @@
                         <a:buNone/>
                       </a:pPr>
                       <a:r>
-                        <a:rPr lang="en-US" sz="1050" dirty="0">
+                        <a:rPr lang="en-US" sz="1150" dirty="0">
                           <a:solidFill>
-                            <a:srgbClr val="202020"/>
+                            <a:srgbClr val="222533"/>
                           </a:solidFill>
                           <a:latin typeface="Calibri" pitchFamily="34" charset="0"/>
-                          <a:ea typeface="Calibri" pitchFamily="34" charset="-122"/>
-                          <a:cs typeface="Calibri" pitchFamily="34" charset="-120"/>
+                          <a:ea typeface="Calibri" pitchFamily="34"/>
+                          <a:cs typeface="Calibri" pitchFamily="34"/>
                         </a:rPr>
                         <a:t>Validates order exists and quantity ≤ purchased quantity</a:t>
                       </a:r>
-                      <a:endParaRPr lang="en-US" sz="1050" dirty="0">
+                      <a:endParaRPr lang="en-US" sz="1150" dirty="0">
                         <a:latin typeface="Calibri" charset="0"/>
                         <a:ea typeface="Calibri" charset="0"/>
                         <a:cs typeface="Calibri" charset="0"/>
@@ -4331,7 +4349,7 @@
                   <a:tcPr marL="91440" marR="91440" marT="45720" marB="45720" anchor="ctr">
                     <a:lnL w="9525" cap="flat" cmpd="sng" algn="ctr">
                       <a:solidFill>
-                        <a:srgbClr val="D9D9D9"/>
+                        <a:srgbClr val="D5D9E0"/>
                       </a:solidFill>
                       <a:prstDash val="solid"/>
                       <a:round/>
@@ -4340,7 +4358,7 @@
                     </a:lnL>
                     <a:lnR w="9525" cap="flat" cmpd="sng" algn="ctr">
                       <a:solidFill>
-                        <a:srgbClr val="D9D9D9"/>
+                        <a:srgbClr val="D5D9E0"/>
                       </a:solidFill>
                       <a:prstDash val="solid"/>
                       <a:round/>
@@ -4349,7 +4367,7 @@
                     </a:lnR>
                     <a:lnT w="9525" cap="flat" cmpd="sng" algn="ctr">
                       <a:solidFill>
-                        <a:srgbClr val="D9D9D9"/>
+                        <a:srgbClr val="D5D9E0"/>
                       </a:solidFill>
                       <a:prstDash val="solid"/>
                       <a:round/>
@@ -4358,7 +4376,7 @@
                     </a:lnT>
                     <a:lnB w="9525" cap="flat" cmpd="sng" algn="ctr">
                       <a:solidFill>
-                        <a:srgbClr val="D9D9D9"/>
+                        <a:srgbClr val="D5D9E0"/>
                       </a:solidFill>
                       <a:prstDash val="solid"/>
                       <a:round/>
@@ -4366,7 +4384,7 @@
                       <a:tailEnd type="none" w="med" len="med"/>
                     </a:lnB>
                     <a:solidFill>
-                      <a:srgbClr val="F4F6FC"/>
+                      <a:srgbClr val="F7F8FA"/>
                     </a:solidFill>
                   </a:tcPr>
                 </a:tc>
@@ -4379,17 +4397,17 @@
                         <a:buNone/>
                       </a:pPr>
                       <a:r>
-                        <a:rPr lang="en-US" sz="1050" dirty="0">
+                        <a:rPr lang="en-US" sz="1150" dirty="0">
                           <a:solidFill>
-                            <a:srgbClr val="202020"/>
+                            <a:srgbClr val="222533"/>
                           </a:solidFill>
                           <a:latin typeface="Calibri" pitchFamily="34" charset="0"/>
-                          <a:ea typeface="Calibri" pitchFamily="34" charset="-122"/>
-                          <a:cs typeface="Calibri" pitchFamily="34" charset="-120"/>
+                          <a:ea typeface="Calibri" pitchFamily="34"/>
+                          <a:cs typeface="Calibri" pitchFamily="34"/>
                         </a:rPr>
                         <a:t>Order/quantity valid?</a:t>
                       </a:r>
-                      <a:endParaRPr lang="en-US" sz="1050" dirty="0">
+                      <a:endParaRPr lang="en-US" sz="1150" dirty="0">
                         <a:latin typeface="Calibri" charset="0"/>
                         <a:ea typeface="Calibri" charset="0"/>
                         <a:cs typeface="Calibri" charset="0"/>
@@ -4399,7 +4417,7 @@
                   <a:tcPr marL="91440" marR="91440" marT="45720" marB="45720" anchor="ctr">
                     <a:lnL w="9525" cap="flat" cmpd="sng" algn="ctr">
                       <a:solidFill>
-                        <a:srgbClr val="D9D9D9"/>
+                        <a:srgbClr val="D5D9E0"/>
                       </a:solidFill>
                       <a:prstDash val="solid"/>
                       <a:round/>
@@ -4408,7 +4426,7 @@
                     </a:lnL>
                     <a:lnR w="9525" cap="flat" cmpd="sng" algn="ctr">
                       <a:solidFill>
-                        <a:srgbClr val="D9D9D9"/>
+                        <a:srgbClr val="D5D9E0"/>
                       </a:solidFill>
                       <a:prstDash val="solid"/>
                       <a:round/>
@@ -4417,7 +4435,7 @@
                     </a:lnR>
                     <a:lnT w="9525" cap="flat" cmpd="sng" algn="ctr">
                       <a:solidFill>
-                        <a:srgbClr val="D9D9D9"/>
+                        <a:srgbClr val="D5D9E0"/>
                       </a:solidFill>
                       <a:prstDash val="solid"/>
                       <a:round/>
@@ -4426,7 +4444,7 @@
                     </a:lnT>
                     <a:lnB w="9525" cap="flat" cmpd="sng" algn="ctr">
                       <a:solidFill>
-                        <a:srgbClr val="D9D9D9"/>
+                        <a:srgbClr val="D5D9E0"/>
                       </a:solidFill>
                       <a:prstDash val="solid"/>
                       <a:round/>
@@ -4434,7 +4452,7 @@
                       <a:tailEnd type="none" w="med" len="med"/>
                     </a:lnB>
                     <a:solidFill>
-                      <a:srgbClr val="F4F6FC"/>
+                      <a:srgbClr val="F7F8FA"/>
                     </a:solidFill>
                   </a:tcPr>
                 </a:tc>
@@ -4447,17 +4465,17 @@
                         <a:buNone/>
                       </a:pPr>
                       <a:r>
-                        <a:rPr lang="en-US" sz="1050" dirty="0">
+                        <a:rPr lang="en-US" sz="1150" dirty="0">
                           <a:solidFill>
-                            <a:srgbClr val="202020"/>
+                            <a:srgbClr val="222533"/>
                           </a:solidFill>
                           <a:latin typeface="Calibri" pitchFamily="34" charset="0"/>
-                          <a:ea typeface="Calibri" pitchFamily="34" charset="-122"/>
-                          <a:cs typeface="Calibri" pitchFamily="34" charset="-120"/>
+                          <a:ea typeface="Calibri" pitchFamily="34"/>
+                          <a:cs typeface="Calibri" pitchFamily="34"/>
                         </a:rPr>
                         <a:t>If invalid → auto-reject; if valid → continue</a:t>
                       </a:r>
-                      <a:endParaRPr lang="en-US" sz="1050" dirty="0">
+                      <a:endParaRPr lang="en-US" sz="1150" dirty="0">
                         <a:latin typeface="Calibri" charset="0"/>
                         <a:ea typeface="Calibri" charset="0"/>
                         <a:cs typeface="Calibri" charset="0"/>
@@ -4467,7 +4485,7 @@
                   <a:tcPr marL="91440" marR="91440" marT="45720" marB="45720" anchor="ctr">
                     <a:lnL w="9525" cap="flat" cmpd="sng" algn="ctr">
                       <a:solidFill>
-                        <a:srgbClr val="D9D9D9"/>
+                        <a:srgbClr val="D5D9E0"/>
                       </a:solidFill>
                       <a:prstDash val="solid"/>
                       <a:round/>
@@ -4476,7 +4494,7 @@
                     </a:lnL>
                     <a:lnR w="9525" cap="flat" cmpd="sng" algn="ctr">
                       <a:solidFill>
-                        <a:srgbClr val="D9D9D9"/>
+                        <a:srgbClr val="D5D9E0"/>
                       </a:solidFill>
                       <a:prstDash val="solid"/>
                       <a:round/>
@@ -4485,7 +4503,7 @@
                     </a:lnR>
                     <a:lnT w="9525" cap="flat" cmpd="sng" algn="ctr">
                       <a:solidFill>
-                        <a:srgbClr val="D9D9D9"/>
+                        <a:srgbClr val="D5D9E0"/>
                       </a:solidFill>
                       <a:prstDash val="solid"/>
                       <a:round/>
@@ -4494,7 +4512,7 @@
                     </a:lnT>
                     <a:lnB w="9525" cap="flat" cmpd="sng" algn="ctr">
                       <a:solidFill>
-                        <a:srgbClr val="D9D9D9"/>
+                        <a:srgbClr val="D5D9E0"/>
                       </a:solidFill>
                       <a:prstDash val="solid"/>
                       <a:round/>
@@ -4502,12 +4520,12 @@
                       <a:tailEnd type="none" w="med" len="med"/>
                     </a:lnB>
                     <a:solidFill>
-                      <a:srgbClr val="F4F6FC"/>
+                      <a:srgbClr val="F7F8FA"/>
                     </a:solidFill>
                   </a:tcPr>
                 </a:tc>
               </a:tr>
-              <a:tr h="658368">
+              <a:tr h="0">
                 <a:tc>
                   <a:txBody>
                     <a:bodyPr/>
@@ -4517,27 +4535,27 @@
                         <a:buNone/>
                       </a:pPr>
                       <a:r>
-                        <a:rPr lang="en-US" sz="1050" dirty="0">
+                        <a:rPr lang="en-US" sz="1100" dirty="0">
                           <a:solidFill>
-                            <a:srgbClr val="202020"/>
+                            <a:srgbClr val="222533"/>
                           </a:solidFill>
-                          <a:latin typeface="Calibri" pitchFamily="34" charset="0"/>
-                          <a:ea typeface="Calibri" pitchFamily="34" charset="-122"/>
-                          <a:cs typeface="Calibri" pitchFamily="34" charset="-120"/>
+                          <a:latin typeface="Courier New" pitchFamily="34" charset="0"/>
+                          <a:ea typeface="Courier New" pitchFamily="34"/>
+                          <a:cs typeface="Courier New" pitchFamily="34"/>
                         </a:rPr>
                         <a:t>3</a:t>
                       </a:r>
-                      <a:endParaRPr lang="en-US" sz="1050" dirty="0">
-                        <a:latin typeface="Calibri" charset="0"/>
-                        <a:ea typeface="Calibri" charset="0"/>
-                        <a:cs typeface="Calibri" charset="0"/>
+                      <a:endParaRPr lang="en-US" sz="1100" dirty="0">
+                        <a:latin typeface="Courier New" charset="0"/>
+                        <a:ea typeface="Courier New" charset="0"/>
+                        <a:cs typeface="Courier New" charset="0"/>
                       </a:endParaRPr>
                     </a:p>
                   </a:txBody>
                   <a:tcPr marL="91440" marR="91440" marT="45720" marB="45720" anchor="ctr">
                     <a:lnL w="9525" cap="flat" cmpd="sng" algn="ctr">
                       <a:solidFill>
-                        <a:srgbClr val="D9D9D9"/>
+                        <a:srgbClr val="D5D9E0"/>
                       </a:solidFill>
                       <a:prstDash val="solid"/>
                       <a:round/>
@@ -4546,7 +4564,7 @@
                     </a:lnL>
                     <a:lnR w="9525" cap="flat" cmpd="sng" algn="ctr">
                       <a:solidFill>
-                        <a:srgbClr val="D9D9D9"/>
+                        <a:srgbClr val="D5D9E0"/>
                       </a:solidFill>
                       <a:prstDash val="solid"/>
                       <a:round/>
@@ -4555,7 +4573,7 @@
                     </a:lnR>
                     <a:lnT w="9525" cap="flat" cmpd="sng" algn="ctr">
                       <a:solidFill>
-                        <a:srgbClr val="D9D9D9"/>
+                        <a:srgbClr val="D5D9E0"/>
                       </a:solidFill>
                       <a:prstDash val="solid"/>
                       <a:round/>
@@ -4564,7 +4582,7 @@
                     </a:lnT>
                     <a:lnB w="9525" cap="flat" cmpd="sng" algn="ctr">
                       <a:solidFill>
-                        <a:srgbClr val="D9D9D9"/>
+                        <a:srgbClr val="D5D9E0"/>
                       </a:solidFill>
                       <a:prstDash val="solid"/>
                       <a:round/>
@@ -4585,17 +4603,17 @@
                         <a:buNone/>
                       </a:pPr>
                       <a:r>
-                        <a:rPr lang="en-US" sz="1050" dirty="0">
+                        <a:rPr lang="en-US" sz="1150" dirty="0">
                           <a:solidFill>
-                            <a:srgbClr val="202020"/>
+                            <a:srgbClr val="222533"/>
                           </a:solidFill>
                           <a:latin typeface="Calibri" pitchFamily="34" charset="0"/>
-                          <a:ea typeface="Calibri" pitchFamily="34" charset="-122"/>
-                          <a:cs typeface="Calibri" pitchFamily="34" charset="-120"/>
+                          <a:ea typeface="Calibri" pitchFamily="34"/>
+                          <a:cs typeface="Calibri" pitchFamily="34"/>
                         </a:rPr>
                         <a:t>System</a:t>
                       </a:r>
-                      <a:endParaRPr lang="en-US" sz="1050" dirty="0">
+                      <a:endParaRPr lang="en-US" sz="1150" dirty="0">
                         <a:latin typeface="Calibri" charset="0"/>
                         <a:ea typeface="Calibri" charset="0"/>
                         <a:cs typeface="Calibri" charset="0"/>
@@ -4605,7 +4623,7 @@
                   <a:tcPr marL="91440" marR="91440" marT="45720" marB="45720" anchor="ctr">
                     <a:lnL w="9525" cap="flat" cmpd="sng" algn="ctr">
                       <a:solidFill>
-                        <a:srgbClr val="D9D9D9"/>
+                        <a:srgbClr val="D5D9E0"/>
                       </a:solidFill>
                       <a:prstDash val="solid"/>
                       <a:round/>
@@ -4614,7 +4632,7 @@
                     </a:lnL>
                     <a:lnR w="9525" cap="flat" cmpd="sng" algn="ctr">
                       <a:solidFill>
-                        <a:srgbClr val="D9D9D9"/>
+                        <a:srgbClr val="D5D9E0"/>
                       </a:solidFill>
                       <a:prstDash val="solid"/>
                       <a:round/>
@@ -4623,7 +4641,7 @@
                     </a:lnR>
                     <a:lnT w="9525" cap="flat" cmpd="sng" algn="ctr">
                       <a:solidFill>
-                        <a:srgbClr val="D9D9D9"/>
+                        <a:srgbClr val="D5D9E0"/>
                       </a:solidFill>
                       <a:prstDash val="solid"/>
                       <a:round/>
@@ -4632,7 +4650,7 @@
                     </a:lnT>
                     <a:lnB w="9525" cap="flat" cmpd="sng" algn="ctr">
                       <a:solidFill>
-                        <a:srgbClr val="D9D9D9"/>
+                        <a:srgbClr val="D5D9E0"/>
                       </a:solidFill>
                       <a:prstDash val="solid"/>
                       <a:round/>
@@ -4653,17 +4671,17 @@
                         <a:buNone/>
                       </a:pPr>
                       <a:r>
-                        <a:rPr lang="en-US" sz="1050" dirty="0">
+                        <a:rPr lang="en-US" sz="1150" dirty="0">
                           <a:solidFill>
-                            <a:srgbClr val="202020"/>
+                            <a:srgbClr val="222533"/>
                           </a:solidFill>
                           <a:latin typeface="Calibri" pitchFamily="34" charset="0"/>
-                          <a:ea typeface="Calibri" pitchFamily="34" charset="-122"/>
-                          <a:cs typeface="Calibri" pitchFamily="34" charset="-120"/>
+                          <a:ea typeface="Calibri" pitchFamily="34"/>
+                          <a:cs typeface="Calibri" pitchFamily="34"/>
                         </a:rPr>
                         <a:t>Checks purchase date against 30-day policy and final-sale flag</a:t>
                       </a:r>
-                      <a:endParaRPr lang="en-US" sz="1050" dirty="0">
+                      <a:endParaRPr lang="en-US" sz="1150" dirty="0">
                         <a:latin typeface="Calibri" charset="0"/>
                         <a:ea typeface="Calibri" charset="0"/>
                         <a:cs typeface="Calibri" charset="0"/>
@@ -4673,7 +4691,7 @@
                   <a:tcPr marL="91440" marR="91440" marT="45720" marB="45720" anchor="ctr">
                     <a:lnL w="9525" cap="flat" cmpd="sng" algn="ctr">
                       <a:solidFill>
-                        <a:srgbClr val="D9D9D9"/>
+                        <a:srgbClr val="D5D9E0"/>
                       </a:solidFill>
                       <a:prstDash val="solid"/>
                       <a:round/>
@@ -4682,7 +4700,7 @@
                     </a:lnL>
                     <a:lnR w="9525" cap="flat" cmpd="sng" algn="ctr">
                       <a:solidFill>
-                        <a:srgbClr val="D9D9D9"/>
+                        <a:srgbClr val="D5D9E0"/>
                       </a:solidFill>
                       <a:prstDash val="solid"/>
                       <a:round/>
@@ -4691,7 +4709,7 @@
                     </a:lnR>
                     <a:lnT w="9525" cap="flat" cmpd="sng" algn="ctr">
                       <a:solidFill>
-                        <a:srgbClr val="D9D9D9"/>
+                        <a:srgbClr val="D5D9E0"/>
                       </a:solidFill>
                       <a:prstDash val="solid"/>
                       <a:round/>
@@ -4700,7 +4718,7 @@
                     </a:lnT>
                     <a:lnB w="9525" cap="flat" cmpd="sng" algn="ctr">
                       <a:solidFill>
-                        <a:srgbClr val="D9D9D9"/>
+                        <a:srgbClr val="D5D9E0"/>
                       </a:solidFill>
                       <a:prstDash val="solid"/>
                       <a:round/>
@@ -4721,17 +4739,17 @@
                         <a:buNone/>
                       </a:pPr>
                       <a:r>
-                        <a:rPr lang="en-US" sz="1050" dirty="0">
+                        <a:rPr lang="en-US" sz="1150" dirty="0">
                           <a:solidFill>
-                            <a:srgbClr val="202020"/>
+                            <a:srgbClr val="222533"/>
                           </a:solidFill>
                           <a:latin typeface="Calibri" pitchFamily="34" charset="0"/>
-                          <a:ea typeface="Calibri" pitchFamily="34" charset="-122"/>
-                          <a:cs typeface="Calibri" pitchFamily="34" charset="-120"/>
+                          <a:ea typeface="Calibri" pitchFamily="34"/>
+                          <a:cs typeface="Calibri" pitchFamily="34"/>
                         </a:rPr>
                         <a:t>Within window and not final-sale?</a:t>
                       </a:r>
-                      <a:endParaRPr lang="en-US" sz="1050" dirty="0">
+                      <a:endParaRPr lang="en-US" sz="1150" dirty="0">
                         <a:latin typeface="Calibri" charset="0"/>
                         <a:ea typeface="Calibri" charset="0"/>
                         <a:cs typeface="Calibri" charset="0"/>
@@ -4741,7 +4759,7 @@
                   <a:tcPr marL="91440" marR="91440" marT="45720" marB="45720" anchor="ctr">
                     <a:lnL w="9525" cap="flat" cmpd="sng" algn="ctr">
                       <a:solidFill>
-                        <a:srgbClr val="D9D9D9"/>
+                        <a:srgbClr val="D5D9E0"/>
                       </a:solidFill>
                       <a:prstDash val="solid"/>
                       <a:round/>
@@ -4750,7 +4768,7 @@
                     </a:lnL>
                     <a:lnR w="9525" cap="flat" cmpd="sng" algn="ctr">
                       <a:solidFill>
-                        <a:srgbClr val="D9D9D9"/>
+                        <a:srgbClr val="D5D9E0"/>
                       </a:solidFill>
                       <a:prstDash val="solid"/>
                       <a:round/>
@@ -4759,7 +4777,7 @@
                     </a:lnR>
                     <a:lnT w="9525" cap="flat" cmpd="sng" algn="ctr">
                       <a:solidFill>
-                        <a:srgbClr val="D9D9D9"/>
+                        <a:srgbClr val="D5D9E0"/>
                       </a:solidFill>
                       <a:prstDash val="solid"/>
                       <a:round/>
@@ -4768,7 +4786,7 @@
                     </a:lnT>
                     <a:lnB w="9525" cap="flat" cmpd="sng" algn="ctr">
                       <a:solidFill>
-                        <a:srgbClr val="D9D9D9"/>
+                        <a:srgbClr val="D5D9E0"/>
                       </a:solidFill>
                       <a:prstDash val="solid"/>
                       <a:round/>
@@ -4789,17 +4807,17 @@
                         <a:buNone/>
                       </a:pPr>
                       <a:r>
-                        <a:rPr lang="en-US" sz="1050" dirty="0">
+                        <a:rPr lang="en-US" sz="1150" dirty="0">
                           <a:solidFill>
-                            <a:srgbClr val="202020"/>
+                            <a:srgbClr val="222533"/>
                           </a:solidFill>
                           <a:latin typeface="Calibri" pitchFamily="34" charset="0"/>
-                          <a:ea typeface="Calibri" pitchFamily="34" charset="-122"/>
-                          <a:cs typeface="Calibri" pitchFamily="34" charset="-120"/>
+                          <a:ea typeface="Calibri" pitchFamily="34"/>
+                          <a:cs typeface="Calibri" pitchFamily="34"/>
                         </a:rPr>
                         <a:t>If no → auto-reject with reason (BR-1, BR-2); if yes → continue</a:t>
                       </a:r>
-                      <a:endParaRPr lang="en-US" sz="1050" dirty="0">
+                      <a:endParaRPr lang="en-US" sz="1150" dirty="0">
                         <a:latin typeface="Calibri" charset="0"/>
                         <a:ea typeface="Calibri" charset="0"/>
                         <a:cs typeface="Calibri" charset="0"/>
@@ -4809,7 +4827,7 @@
                   <a:tcPr marL="91440" marR="91440" marT="45720" marB="45720" anchor="ctr">
                     <a:lnL w="9525" cap="flat" cmpd="sng" algn="ctr">
                       <a:solidFill>
-                        <a:srgbClr val="D9D9D9"/>
+                        <a:srgbClr val="D5D9E0"/>
                       </a:solidFill>
                       <a:prstDash val="solid"/>
                       <a:round/>
@@ -4818,7 +4836,7 @@
                     </a:lnL>
                     <a:lnR w="9525" cap="flat" cmpd="sng" algn="ctr">
                       <a:solidFill>
-                        <a:srgbClr val="D9D9D9"/>
+                        <a:srgbClr val="D5D9E0"/>
                       </a:solidFill>
                       <a:prstDash val="solid"/>
                       <a:round/>
@@ -4827,7 +4845,7 @@
                     </a:lnR>
                     <a:lnT w="9525" cap="flat" cmpd="sng" algn="ctr">
                       <a:solidFill>
-                        <a:srgbClr val="D9D9D9"/>
+                        <a:srgbClr val="D5D9E0"/>
                       </a:solidFill>
                       <a:prstDash val="solid"/>
                       <a:round/>
@@ -4836,7 +4854,7 @@
                     </a:lnT>
                     <a:lnB w="9525" cap="flat" cmpd="sng" algn="ctr">
                       <a:solidFill>
-                        <a:srgbClr val="D9D9D9"/>
+                        <a:srgbClr val="D5D9E0"/>
                       </a:solidFill>
                       <a:prstDash val="solid"/>
                       <a:round/>
@@ -4849,7 +4867,7 @@
                   </a:tcPr>
                 </a:tc>
               </a:tr>
-              <a:tr h="658368">
+              <a:tr h="0">
                 <a:tc>
                   <a:txBody>
                     <a:bodyPr/>
@@ -4859,27 +4877,27 @@
                         <a:buNone/>
                       </a:pPr>
                       <a:r>
-                        <a:rPr lang="en-US" sz="1050" dirty="0">
+                        <a:rPr lang="en-US" sz="1100" dirty="0">
                           <a:solidFill>
-                            <a:srgbClr val="202020"/>
+                            <a:srgbClr val="222533"/>
                           </a:solidFill>
-                          <a:latin typeface="Calibri" pitchFamily="34" charset="0"/>
-                          <a:ea typeface="Calibri" pitchFamily="34" charset="-122"/>
-                          <a:cs typeface="Calibri" pitchFamily="34" charset="-120"/>
+                          <a:latin typeface="Courier New" pitchFamily="34" charset="0"/>
+                          <a:ea typeface="Courier New" pitchFamily="34"/>
+                          <a:cs typeface="Courier New" pitchFamily="34"/>
                         </a:rPr>
                         <a:t>4</a:t>
                       </a:r>
-                      <a:endParaRPr lang="en-US" sz="1050" dirty="0">
-                        <a:latin typeface="Calibri" charset="0"/>
-                        <a:ea typeface="Calibri" charset="0"/>
-                        <a:cs typeface="Calibri" charset="0"/>
+                      <a:endParaRPr lang="en-US" sz="1100" dirty="0">
+                        <a:latin typeface="Courier New" charset="0"/>
+                        <a:ea typeface="Courier New" charset="0"/>
+                        <a:cs typeface="Courier New" charset="0"/>
                       </a:endParaRPr>
                     </a:p>
                   </a:txBody>
                   <a:tcPr marL="91440" marR="91440" marT="45720" marB="45720" anchor="ctr">
                     <a:lnL w="9525" cap="flat" cmpd="sng" algn="ctr">
                       <a:solidFill>
-                        <a:srgbClr val="D9D9D9"/>
+                        <a:srgbClr val="D5D9E0"/>
                       </a:solidFill>
                       <a:prstDash val="solid"/>
                       <a:round/>
@@ -4888,7 +4906,7 @@
                     </a:lnL>
                     <a:lnR w="9525" cap="flat" cmpd="sng" algn="ctr">
                       <a:solidFill>
-                        <a:srgbClr val="D9D9D9"/>
+                        <a:srgbClr val="D5D9E0"/>
                       </a:solidFill>
                       <a:prstDash val="solid"/>
                       <a:round/>
@@ -4897,7 +4915,7 @@
                     </a:lnR>
                     <a:lnT w="9525" cap="flat" cmpd="sng" algn="ctr">
                       <a:solidFill>
-                        <a:srgbClr val="D9D9D9"/>
+                        <a:srgbClr val="D5D9E0"/>
                       </a:solidFill>
                       <a:prstDash val="solid"/>
                       <a:round/>
@@ -4906,7 +4924,7 @@
                     </a:lnT>
                     <a:lnB w="9525" cap="flat" cmpd="sng" algn="ctr">
                       <a:solidFill>
-                        <a:srgbClr val="D9D9D9"/>
+                        <a:srgbClr val="D5D9E0"/>
                       </a:solidFill>
                       <a:prstDash val="solid"/>
                       <a:round/>
@@ -4914,7 +4932,7 @@
                       <a:tailEnd type="none" w="med" len="med"/>
                     </a:lnB>
                     <a:solidFill>
-                      <a:srgbClr val="F4F6FC"/>
+                      <a:srgbClr val="F7F8FA"/>
                     </a:solidFill>
                   </a:tcPr>
                 </a:tc>
@@ -4927,17 +4945,17 @@
                         <a:buNone/>
                       </a:pPr>
                       <a:r>
-                        <a:rPr lang="en-US" sz="1050" dirty="0">
+                        <a:rPr lang="en-US" sz="1150" dirty="0">
                           <a:solidFill>
-                            <a:srgbClr val="202020"/>
+                            <a:srgbClr val="222533"/>
                           </a:solidFill>
                           <a:latin typeface="Calibri" pitchFamily="34" charset="0"/>
-                          <a:ea typeface="Calibri" pitchFamily="34" charset="-122"/>
-                          <a:cs typeface="Calibri" pitchFamily="34" charset="-120"/>
+                          <a:ea typeface="Calibri" pitchFamily="34"/>
+                          <a:cs typeface="Calibri" pitchFamily="34"/>
                         </a:rPr>
                         <a:t>System</a:t>
                       </a:r>
-                      <a:endParaRPr lang="en-US" sz="1050" dirty="0">
+                      <a:endParaRPr lang="en-US" sz="1150" dirty="0">
                         <a:latin typeface="Calibri" charset="0"/>
                         <a:ea typeface="Calibri" charset="0"/>
                         <a:cs typeface="Calibri" charset="0"/>
@@ -4947,7 +4965,7 @@
                   <a:tcPr marL="91440" marR="91440" marT="45720" marB="45720" anchor="ctr">
                     <a:lnL w="9525" cap="flat" cmpd="sng" algn="ctr">
                       <a:solidFill>
-                        <a:srgbClr val="D9D9D9"/>
+                        <a:srgbClr val="D5D9E0"/>
                       </a:solidFill>
                       <a:prstDash val="solid"/>
                       <a:round/>
@@ -4956,7 +4974,7 @@
                     </a:lnL>
                     <a:lnR w="9525" cap="flat" cmpd="sng" algn="ctr">
                       <a:solidFill>
-                        <a:srgbClr val="D9D9D9"/>
+                        <a:srgbClr val="D5D9E0"/>
                       </a:solidFill>
                       <a:prstDash val="solid"/>
                       <a:round/>
@@ -4965,7 +4983,7 @@
                     </a:lnR>
                     <a:lnT w="9525" cap="flat" cmpd="sng" algn="ctr">
                       <a:solidFill>
-                        <a:srgbClr val="D9D9D9"/>
+                        <a:srgbClr val="D5D9E0"/>
                       </a:solidFill>
                       <a:prstDash val="solid"/>
                       <a:round/>
@@ -4974,7 +4992,7 @@
                     </a:lnT>
                     <a:lnB w="9525" cap="flat" cmpd="sng" algn="ctr">
                       <a:solidFill>
-                        <a:srgbClr val="D9D9D9"/>
+                        <a:srgbClr val="D5D9E0"/>
                       </a:solidFill>
                       <a:prstDash val="solid"/>
                       <a:round/>
@@ -4982,7 +5000,7 @@
                       <a:tailEnd type="none" w="med" len="med"/>
                     </a:lnB>
                     <a:solidFill>
-                      <a:srgbClr val="F4F6FC"/>
+                      <a:srgbClr val="F7F8FA"/>
                     </a:solidFill>
                   </a:tcPr>
                 </a:tc>
@@ -4995,17 +5013,17 @@
                         <a:buNone/>
                       </a:pPr>
                       <a:r>
-                        <a:rPr lang="en-US" sz="1050" dirty="0">
+                        <a:rPr lang="en-US" sz="1150" dirty="0">
                           <a:solidFill>
-                            <a:srgbClr val="202020"/>
+                            <a:srgbClr val="222533"/>
                           </a:solidFill>
                           <a:latin typeface="Calibri" pitchFamily="34" charset="0"/>
-                          <a:ea typeface="Calibri" pitchFamily="34" charset="-122"/>
-                          <a:cs typeface="Calibri" pitchFamily="34" charset="-120"/>
+                          <a:ea typeface="Calibri" pitchFamily="34"/>
+                          <a:cs typeface="Calibri" pitchFamily="34"/>
                         </a:rPr>
                         <a:t>Evaluates reason code and item value</a:t>
                       </a:r>
-                      <a:endParaRPr lang="en-US" sz="1050" dirty="0">
+                      <a:endParaRPr lang="en-US" sz="1150" dirty="0">
                         <a:latin typeface="Calibri" charset="0"/>
                         <a:ea typeface="Calibri" charset="0"/>
                         <a:cs typeface="Calibri" charset="0"/>
@@ -5015,7 +5033,7 @@
                   <a:tcPr marL="91440" marR="91440" marT="45720" marB="45720" anchor="ctr">
                     <a:lnL w="9525" cap="flat" cmpd="sng" algn="ctr">
                       <a:solidFill>
-                        <a:srgbClr val="D9D9D9"/>
+                        <a:srgbClr val="D5D9E0"/>
                       </a:solidFill>
                       <a:prstDash val="solid"/>
                       <a:round/>
@@ -5024,7 +5042,7 @@
                     </a:lnL>
                     <a:lnR w="9525" cap="flat" cmpd="sng" algn="ctr">
                       <a:solidFill>
-                        <a:srgbClr val="D9D9D9"/>
+                        <a:srgbClr val="D5D9E0"/>
                       </a:solidFill>
                       <a:prstDash val="solid"/>
                       <a:round/>
@@ -5033,7 +5051,7 @@
                     </a:lnR>
                     <a:lnT w="9525" cap="flat" cmpd="sng" algn="ctr">
                       <a:solidFill>
-                        <a:srgbClr val="D9D9D9"/>
+                        <a:srgbClr val="D5D9E0"/>
                       </a:solidFill>
                       <a:prstDash val="solid"/>
                       <a:round/>
@@ -5042,7 +5060,7 @@
                     </a:lnT>
                     <a:lnB w="9525" cap="flat" cmpd="sng" algn="ctr">
                       <a:solidFill>
-                        <a:srgbClr val="D9D9D9"/>
+                        <a:srgbClr val="D5D9E0"/>
                       </a:solidFill>
                       <a:prstDash val="solid"/>
                       <a:round/>
@@ -5050,7 +5068,7 @@
                       <a:tailEnd type="none" w="med" len="med"/>
                     </a:lnB>
                     <a:solidFill>
-                      <a:srgbClr val="F4F6FC"/>
+                      <a:srgbClr val="F7F8FA"/>
                     </a:solidFill>
                   </a:tcPr>
                 </a:tc>
@@ -5063,17 +5081,17 @@
                         <a:buNone/>
                       </a:pPr>
                       <a:r>
-                        <a:rPr lang="en-US" sz="1050" dirty="0">
+                        <a:rPr lang="en-US" sz="1150" dirty="0">
                           <a:solidFill>
-                            <a:srgbClr val="202020"/>
+                            <a:srgbClr val="222533"/>
                           </a:solidFill>
                           <a:latin typeface="Calibri" pitchFamily="34" charset="0"/>
-                          <a:ea typeface="Calibri" pitchFamily="34" charset="-122"/>
-                          <a:cs typeface="Calibri" pitchFamily="34" charset="-120"/>
+                          <a:ea typeface="Calibri" pitchFamily="34"/>
+                          <a:cs typeface="Calibri" pitchFamily="34"/>
                         </a:rPr>
                         <a:t>Reason = “Defective” AND value &gt; $200?</a:t>
                       </a:r>
-                      <a:endParaRPr lang="en-US" sz="1050" dirty="0">
+                      <a:endParaRPr lang="en-US" sz="1150" dirty="0">
                         <a:latin typeface="Calibri" charset="0"/>
                         <a:ea typeface="Calibri" charset="0"/>
                         <a:cs typeface="Calibri" charset="0"/>
@@ -5083,7 +5101,7 @@
                   <a:tcPr marL="91440" marR="91440" marT="45720" marB="45720" anchor="ctr">
                     <a:lnL w="9525" cap="flat" cmpd="sng" algn="ctr">
                       <a:solidFill>
-                        <a:srgbClr val="D9D9D9"/>
+                        <a:srgbClr val="D5D9E0"/>
                       </a:solidFill>
                       <a:prstDash val="solid"/>
                       <a:round/>
@@ -5092,7 +5110,7 @@
                     </a:lnL>
                     <a:lnR w="9525" cap="flat" cmpd="sng" algn="ctr">
                       <a:solidFill>
-                        <a:srgbClr val="D9D9D9"/>
+                        <a:srgbClr val="D5D9E0"/>
                       </a:solidFill>
                       <a:prstDash val="solid"/>
                       <a:round/>
@@ -5101,7 +5119,7 @@
                     </a:lnR>
                     <a:lnT w="9525" cap="flat" cmpd="sng" algn="ctr">
                       <a:solidFill>
-                        <a:srgbClr val="D9D9D9"/>
+                        <a:srgbClr val="D5D9E0"/>
                       </a:solidFill>
                       <a:prstDash val="solid"/>
                       <a:round/>
@@ -5110,7 +5128,7 @@
                     </a:lnT>
                     <a:lnB w="9525" cap="flat" cmpd="sng" algn="ctr">
                       <a:solidFill>
-                        <a:srgbClr val="D9D9D9"/>
+                        <a:srgbClr val="D5D9E0"/>
                       </a:solidFill>
                       <a:prstDash val="solid"/>
                       <a:round/>
@@ -5118,7 +5136,7 @@
                       <a:tailEnd type="none" w="med" len="med"/>
                     </a:lnB>
                     <a:solidFill>
-                      <a:srgbClr val="F4F6FC"/>
+                      <a:srgbClr val="F7F8FA"/>
                     </a:solidFill>
                   </a:tcPr>
                 </a:tc>
@@ -5131,17 +5149,17 @@
                         <a:buNone/>
                       </a:pPr>
                       <a:r>
-                        <a:rPr lang="en-US" sz="1050" dirty="0">
+                        <a:rPr lang="en-US" sz="1150" dirty="0">
                           <a:solidFill>
-                            <a:srgbClr val="202020"/>
+                            <a:srgbClr val="222533"/>
                           </a:solidFill>
                           <a:latin typeface="Calibri" pitchFamily="34" charset="0"/>
-                          <a:ea typeface="Calibri" pitchFamily="34" charset="-122"/>
-                          <a:cs typeface="Calibri" pitchFamily="34" charset="-120"/>
+                          <a:ea typeface="Calibri" pitchFamily="34"/>
+                          <a:cs typeface="Calibri" pitchFamily="34"/>
                         </a:rPr>
                         <a:t>If yes → route to supervisor; if no → auto-approve</a:t>
                       </a:r>
-                      <a:endParaRPr lang="en-US" sz="1050" dirty="0">
+                      <a:endParaRPr lang="en-US" sz="1150" dirty="0">
                         <a:latin typeface="Calibri" charset="0"/>
                         <a:ea typeface="Calibri" charset="0"/>
                         <a:cs typeface="Calibri" charset="0"/>
@@ -5151,7 +5169,7 @@
                   <a:tcPr marL="91440" marR="91440" marT="45720" marB="45720" anchor="ctr">
                     <a:lnL w="9525" cap="flat" cmpd="sng" algn="ctr">
                       <a:solidFill>
-                        <a:srgbClr val="D9D9D9"/>
+                        <a:srgbClr val="D5D9E0"/>
                       </a:solidFill>
                       <a:prstDash val="solid"/>
                       <a:round/>
@@ -5160,7 +5178,7 @@
                     </a:lnL>
                     <a:lnR w="9525" cap="flat" cmpd="sng" algn="ctr">
                       <a:solidFill>
-                        <a:srgbClr val="D9D9D9"/>
+                        <a:srgbClr val="D5D9E0"/>
                       </a:solidFill>
                       <a:prstDash val="solid"/>
                       <a:round/>
@@ -5169,7 +5187,7 @@
                     </a:lnR>
                     <a:lnT w="9525" cap="flat" cmpd="sng" algn="ctr">
                       <a:solidFill>
-                        <a:srgbClr val="D9D9D9"/>
+                        <a:srgbClr val="D5D9E0"/>
                       </a:solidFill>
                       <a:prstDash val="solid"/>
                       <a:round/>
@@ -5178,7 +5196,7 @@
                     </a:lnT>
                     <a:lnB w="9525" cap="flat" cmpd="sng" algn="ctr">
                       <a:solidFill>
-                        <a:srgbClr val="D9D9D9"/>
+                        <a:srgbClr val="D5D9E0"/>
                       </a:solidFill>
                       <a:prstDash val="solid"/>
                       <a:round/>
@@ -5186,7 +5204,7 @@
                       <a:tailEnd type="none" w="med" len="med"/>
                     </a:lnB>
                     <a:solidFill>
-                      <a:srgbClr val="F4F6FC"/>
+                      <a:srgbClr val="F7F8FA"/>
                     </a:solidFill>
                   </a:tcPr>
                 </a:tc>
@@ -5235,8 +5253,8 @@
         </p:nvSpPr>
         <p:spPr>
           <a:xfrm>
-            <a:off x="548640" y="320040"/>
-            <a:ext cx="11091672" cy="548640"/>
+            <a:off x="457200" y="320040"/>
+            <a:ext cx="11247120" cy="548640"/>
           </a:xfrm>
           <a:prstGeom prst="rect">
             <a:avLst/>
@@ -5256,9 +5274,9 @@
                 <a:solidFill>
                   <a:srgbClr val="1E2761"/>
                 </a:solidFill>
-                <a:latin typeface="Cambria" pitchFamily="34" charset="0"/>
-                <a:ea typeface="Cambria" pitchFamily="34" charset="-122"/>
-                <a:cs typeface="Cambria" pitchFamily="34" charset="-120"/>
+                <a:latin typeface="Arial" pitchFamily="34" charset="0"/>
+                <a:ea typeface="Arial" pitchFamily="34"/>
+                <a:cs typeface="Arial" pitchFamily="34"/>
               </a:rPr>
               <a:t>Workflow Worksheet (2 of 2)</a:t>
             </a:r>
@@ -5274,8 +5292,8 @@
         </p:nvSpPr>
         <p:spPr>
           <a:xfrm>
-            <a:off x="548640" y="868680"/>
-            <a:ext cx="11091672" cy="320040"/>
+            <a:off x="457200" y="868680"/>
+            <a:ext cx="11247120" cy="320040"/>
           </a:xfrm>
           <a:prstGeom prst="rect">
             <a:avLst/>
@@ -5291,17 +5309,17 @@
               <a:buNone/>
             </a:pPr>
             <a:r>
-              <a:rPr lang="en-US" sz="1400" dirty="0">
+              <a:rPr lang="en-US" sz="1300" dirty="0">
                 <a:solidFill>
-                  <a:srgbClr val="555555"/>
+                  <a:srgbClr val="5B6072"/>
                 </a:solidFill>
                 <a:latin typeface="Calibri" pitchFamily="34" charset="0"/>
-                <a:ea typeface="Calibri" pitchFamily="34" charset="-122"/>
-                <a:cs typeface="Calibri" pitchFamily="34" charset="-120"/>
+                <a:ea typeface="Calibri" pitchFamily="34"/>
+                <a:cs typeface="Calibri" pitchFamily="34"/>
               </a:rPr>
               <a:t>Columns: # | Actor | Action | Decision / Condition | Outcome / Next Step</a:t>
             </a:r>
-            <a:endParaRPr lang="en-US" sz="1400" dirty="0"/>
+            <a:endParaRPr lang="en-US" sz="1300" dirty="0"/>
           </a:p>
         </p:txBody>
       </p:sp>
@@ -5320,21 +5338,21 @@
           </p:nvPr>
         </p:nvGraphicFramePr>
         <p:xfrm>
-          <a:off x="457200" y="1371600"/>
-          <a:ext cx="11274552" cy="914400"/>
+          <a:off x="457200" y="1554480"/>
+          <a:ext cx="11247120" cy="914400"/>
         </p:xfrm>
         <a:graphic>
           <a:graphicData uri="http://schemas.openxmlformats.org/drawingml/2006/table">
             <a:tbl>
               <a:tblPr/>
               <a:tblGrid>
-                <a:gridCol w="457200"/>
-                <a:gridCol w="1554480"/>
+                <a:gridCol w="548640"/>
+                <a:gridCol w="1371600"/>
+                <a:gridCol w="3291840"/>
                 <a:gridCol w="3017520"/>
                 <a:gridCol w="3017520"/>
-                <a:gridCol w="3291840"/>
               </a:tblGrid>
-              <a:tr h="658368">
+              <a:tr h="0">
                 <a:tc>
                   <a:txBody>
                     <a:bodyPr/>
@@ -5349,8 +5367,8 @@
                             <a:srgbClr val="FFFFFF"/>
                           </a:solidFill>
                           <a:latin typeface="Calibri" pitchFamily="34" charset="0"/>
-                          <a:ea typeface="Calibri" pitchFamily="34" charset="-122"/>
-                          <a:cs typeface="Calibri" pitchFamily="34" charset="-120"/>
+                          <a:ea typeface="Calibri" pitchFamily="34"/>
+                          <a:cs typeface="Calibri" pitchFamily="34"/>
                         </a:rPr>
                         <a:t>#</a:t>
                       </a:r>
@@ -5364,7 +5382,7 @@
                   <a:tcPr marL="91440" marR="91440" marT="45720" marB="45720" anchor="ctr">
                     <a:lnL w="9525" cap="flat" cmpd="sng" algn="ctr">
                       <a:solidFill>
-                        <a:srgbClr val="D9D9D9"/>
+                        <a:srgbClr val="D5D9E0"/>
                       </a:solidFill>
                       <a:prstDash val="solid"/>
                       <a:round/>
@@ -5373,7 +5391,7 @@
                     </a:lnL>
                     <a:lnR w="9525" cap="flat" cmpd="sng" algn="ctr">
                       <a:solidFill>
-                        <a:srgbClr val="D9D9D9"/>
+                        <a:srgbClr val="D5D9E0"/>
                       </a:solidFill>
                       <a:prstDash val="solid"/>
                       <a:round/>
@@ -5382,7 +5400,7 @@
                     </a:lnR>
                     <a:lnT w="9525" cap="flat" cmpd="sng" algn="ctr">
                       <a:solidFill>
-                        <a:srgbClr val="D9D9D9"/>
+                        <a:srgbClr val="D5D9E0"/>
                       </a:solidFill>
                       <a:prstDash val="solid"/>
                       <a:round/>
@@ -5391,7 +5409,7 @@
                     </a:lnT>
                     <a:lnB w="9525" cap="flat" cmpd="sng" algn="ctr">
                       <a:solidFill>
-                        <a:srgbClr val="D9D9D9"/>
+                        <a:srgbClr val="D5D9E0"/>
                       </a:solidFill>
                       <a:prstDash val="solid"/>
                       <a:round/>
@@ -5417,8 +5435,8 @@
                             <a:srgbClr val="FFFFFF"/>
                           </a:solidFill>
                           <a:latin typeface="Calibri" pitchFamily="34" charset="0"/>
-                          <a:ea typeface="Calibri" pitchFamily="34" charset="-122"/>
-                          <a:cs typeface="Calibri" pitchFamily="34" charset="-120"/>
+                          <a:ea typeface="Calibri" pitchFamily="34"/>
+                          <a:cs typeface="Calibri" pitchFamily="34"/>
                         </a:rPr>
                         <a:t>Actor</a:t>
                       </a:r>
@@ -5432,7 +5450,7 @@
                   <a:tcPr marL="91440" marR="91440" marT="45720" marB="45720" anchor="ctr">
                     <a:lnL w="9525" cap="flat" cmpd="sng" algn="ctr">
                       <a:solidFill>
-                        <a:srgbClr val="D9D9D9"/>
+                        <a:srgbClr val="D5D9E0"/>
                       </a:solidFill>
                       <a:prstDash val="solid"/>
                       <a:round/>
@@ -5441,7 +5459,7 @@
                     </a:lnL>
                     <a:lnR w="9525" cap="flat" cmpd="sng" algn="ctr">
                       <a:solidFill>
-                        <a:srgbClr val="D9D9D9"/>
+                        <a:srgbClr val="D5D9E0"/>
                       </a:solidFill>
                       <a:prstDash val="solid"/>
                       <a:round/>
@@ -5450,7 +5468,7 @@
                     </a:lnR>
                     <a:lnT w="9525" cap="flat" cmpd="sng" algn="ctr">
                       <a:solidFill>
-                        <a:srgbClr val="D9D9D9"/>
+                        <a:srgbClr val="D5D9E0"/>
                       </a:solidFill>
                       <a:prstDash val="solid"/>
                       <a:round/>
@@ -5459,7 +5477,7 @@
                     </a:lnT>
                     <a:lnB w="9525" cap="flat" cmpd="sng" algn="ctr">
                       <a:solidFill>
-                        <a:srgbClr val="D9D9D9"/>
+                        <a:srgbClr val="D5D9E0"/>
                       </a:solidFill>
                       <a:prstDash val="solid"/>
                       <a:round/>
@@ -5485,8 +5503,8 @@
                             <a:srgbClr val="FFFFFF"/>
                           </a:solidFill>
                           <a:latin typeface="Calibri" pitchFamily="34" charset="0"/>
-                          <a:ea typeface="Calibri" pitchFamily="34" charset="-122"/>
-                          <a:cs typeface="Calibri" pitchFamily="34" charset="-120"/>
+                          <a:ea typeface="Calibri" pitchFamily="34"/>
+                          <a:cs typeface="Calibri" pitchFamily="34"/>
                         </a:rPr>
                         <a:t>Action</a:t>
                       </a:r>
@@ -5500,7 +5518,7 @@
                   <a:tcPr marL="91440" marR="91440" marT="45720" marB="45720" anchor="ctr">
                     <a:lnL w="9525" cap="flat" cmpd="sng" algn="ctr">
                       <a:solidFill>
-                        <a:srgbClr val="D9D9D9"/>
+                        <a:srgbClr val="D5D9E0"/>
                       </a:solidFill>
                       <a:prstDash val="solid"/>
                       <a:round/>
@@ -5509,7 +5527,7 @@
                     </a:lnL>
                     <a:lnR w="9525" cap="flat" cmpd="sng" algn="ctr">
                       <a:solidFill>
-                        <a:srgbClr val="D9D9D9"/>
+                        <a:srgbClr val="D5D9E0"/>
                       </a:solidFill>
                       <a:prstDash val="solid"/>
                       <a:round/>
@@ -5518,7 +5536,7 @@
                     </a:lnR>
                     <a:lnT w="9525" cap="flat" cmpd="sng" algn="ctr">
                       <a:solidFill>
-                        <a:srgbClr val="D9D9D9"/>
+                        <a:srgbClr val="D5D9E0"/>
                       </a:solidFill>
                       <a:prstDash val="solid"/>
                       <a:round/>
@@ -5527,7 +5545,7 @@
                     </a:lnT>
                     <a:lnB w="9525" cap="flat" cmpd="sng" algn="ctr">
                       <a:solidFill>
-                        <a:srgbClr val="D9D9D9"/>
+                        <a:srgbClr val="D5D9E0"/>
                       </a:solidFill>
                       <a:prstDash val="solid"/>
                       <a:round/>
@@ -5553,8 +5571,8 @@
                             <a:srgbClr val="FFFFFF"/>
                           </a:solidFill>
                           <a:latin typeface="Calibri" pitchFamily="34" charset="0"/>
-                          <a:ea typeface="Calibri" pitchFamily="34" charset="-122"/>
-                          <a:cs typeface="Calibri" pitchFamily="34" charset="-120"/>
+                          <a:ea typeface="Calibri" pitchFamily="34"/>
+                          <a:cs typeface="Calibri" pitchFamily="34"/>
                         </a:rPr>
                         <a:t>Decision / Condition</a:t>
                       </a:r>
@@ -5568,7 +5586,7 @@
                   <a:tcPr marL="91440" marR="91440" marT="45720" marB="45720" anchor="ctr">
                     <a:lnL w="9525" cap="flat" cmpd="sng" algn="ctr">
                       <a:solidFill>
-                        <a:srgbClr val="D9D9D9"/>
+                        <a:srgbClr val="D5D9E0"/>
                       </a:solidFill>
                       <a:prstDash val="solid"/>
                       <a:round/>
@@ -5577,7 +5595,7 @@
                     </a:lnL>
                     <a:lnR w="9525" cap="flat" cmpd="sng" algn="ctr">
                       <a:solidFill>
-                        <a:srgbClr val="D9D9D9"/>
+                        <a:srgbClr val="D5D9E0"/>
                       </a:solidFill>
                       <a:prstDash val="solid"/>
                       <a:round/>
@@ -5586,7 +5604,7 @@
                     </a:lnR>
                     <a:lnT w="9525" cap="flat" cmpd="sng" algn="ctr">
                       <a:solidFill>
-                        <a:srgbClr val="D9D9D9"/>
+                        <a:srgbClr val="D5D9E0"/>
                       </a:solidFill>
                       <a:prstDash val="solid"/>
                       <a:round/>
@@ -5595,7 +5613,7 @@
                     </a:lnT>
                     <a:lnB w="9525" cap="flat" cmpd="sng" algn="ctr">
                       <a:solidFill>
-                        <a:srgbClr val="D9D9D9"/>
+                        <a:srgbClr val="D5D9E0"/>
                       </a:solidFill>
                       <a:prstDash val="solid"/>
                       <a:round/>
@@ -5621,8 +5639,8 @@
                             <a:srgbClr val="FFFFFF"/>
                           </a:solidFill>
                           <a:latin typeface="Calibri" pitchFamily="34" charset="0"/>
-                          <a:ea typeface="Calibri" pitchFamily="34" charset="-122"/>
-                          <a:cs typeface="Calibri" pitchFamily="34" charset="-120"/>
+                          <a:ea typeface="Calibri" pitchFamily="34"/>
+                          <a:cs typeface="Calibri" pitchFamily="34"/>
                         </a:rPr>
                         <a:t>Outcome / Next Step</a:t>
                       </a:r>
@@ -5636,7 +5654,7 @@
                   <a:tcPr marL="91440" marR="91440" marT="45720" marB="45720" anchor="ctr">
                     <a:lnL w="9525" cap="flat" cmpd="sng" algn="ctr">
                       <a:solidFill>
-                        <a:srgbClr val="D9D9D9"/>
+                        <a:srgbClr val="D5D9E0"/>
                       </a:solidFill>
                       <a:prstDash val="solid"/>
                       <a:round/>
@@ -5645,7 +5663,7 @@
                     </a:lnL>
                     <a:lnR w="9525" cap="flat" cmpd="sng" algn="ctr">
                       <a:solidFill>
-                        <a:srgbClr val="D9D9D9"/>
+                        <a:srgbClr val="D5D9E0"/>
                       </a:solidFill>
                       <a:prstDash val="solid"/>
                       <a:round/>
@@ -5654,7 +5672,7 @@
                     </a:lnR>
                     <a:lnT w="9525" cap="flat" cmpd="sng" algn="ctr">
                       <a:solidFill>
-                        <a:srgbClr val="D9D9D9"/>
+                        <a:srgbClr val="D5D9E0"/>
                       </a:solidFill>
                       <a:prstDash val="solid"/>
                       <a:round/>
@@ -5663,7 +5681,7 @@
                     </a:lnT>
                     <a:lnB w="9525" cap="flat" cmpd="sng" algn="ctr">
                       <a:solidFill>
-                        <a:srgbClr val="D9D9D9"/>
+                        <a:srgbClr val="D5D9E0"/>
                       </a:solidFill>
                       <a:prstDash val="solid"/>
                       <a:round/>
@@ -5676,7 +5694,7 @@
                   </a:tcPr>
                 </a:tc>
               </a:tr>
-              <a:tr h="658368">
+              <a:tr h="0">
                 <a:tc>
                   <a:txBody>
                     <a:bodyPr/>
@@ -5686,27 +5704,27 @@
                         <a:buNone/>
                       </a:pPr>
                       <a:r>
-                        <a:rPr lang="en-US" sz="1050" dirty="0">
+                        <a:rPr lang="en-US" sz="1100" dirty="0">
                           <a:solidFill>
-                            <a:srgbClr val="202020"/>
+                            <a:srgbClr val="222533"/>
                           </a:solidFill>
-                          <a:latin typeface="Calibri" pitchFamily="34" charset="0"/>
-                          <a:ea typeface="Calibri" pitchFamily="34" charset="-122"/>
-                          <a:cs typeface="Calibri" pitchFamily="34" charset="-120"/>
+                          <a:latin typeface="Courier New" pitchFamily="34" charset="0"/>
+                          <a:ea typeface="Courier New" pitchFamily="34"/>
+                          <a:cs typeface="Courier New" pitchFamily="34"/>
                         </a:rPr>
                         <a:t>5</a:t>
                       </a:r>
-                      <a:endParaRPr lang="en-US" sz="1050" dirty="0">
-                        <a:latin typeface="Calibri" charset="0"/>
-                        <a:ea typeface="Calibri" charset="0"/>
-                        <a:cs typeface="Calibri" charset="0"/>
+                      <a:endParaRPr lang="en-US" sz="1100" dirty="0">
+                        <a:latin typeface="Courier New" charset="0"/>
+                        <a:ea typeface="Courier New" charset="0"/>
+                        <a:cs typeface="Courier New" charset="0"/>
                       </a:endParaRPr>
                     </a:p>
                   </a:txBody>
                   <a:tcPr marL="91440" marR="91440" marT="45720" marB="45720" anchor="ctr">
                     <a:lnL w="9525" cap="flat" cmpd="sng" algn="ctr">
                       <a:solidFill>
-                        <a:srgbClr val="D9D9D9"/>
+                        <a:srgbClr val="D5D9E0"/>
                       </a:solidFill>
                       <a:prstDash val="solid"/>
                       <a:round/>
@@ -5715,7 +5733,7 @@
                     </a:lnL>
                     <a:lnR w="9525" cap="flat" cmpd="sng" algn="ctr">
                       <a:solidFill>
-                        <a:srgbClr val="D9D9D9"/>
+                        <a:srgbClr val="D5D9E0"/>
                       </a:solidFill>
                       <a:prstDash val="solid"/>
                       <a:round/>
@@ -5724,7 +5742,7 @@
                     </a:lnR>
                     <a:lnT w="9525" cap="flat" cmpd="sng" algn="ctr">
                       <a:solidFill>
-                        <a:srgbClr val="D9D9D9"/>
+                        <a:srgbClr val="D5D9E0"/>
                       </a:solidFill>
                       <a:prstDash val="solid"/>
                       <a:round/>
@@ -5733,7 +5751,7 @@
                     </a:lnT>
                     <a:lnB w="9525" cap="flat" cmpd="sng" algn="ctr">
                       <a:solidFill>
-                        <a:srgbClr val="D9D9D9"/>
+                        <a:srgbClr val="D5D9E0"/>
                       </a:solidFill>
                       <a:prstDash val="solid"/>
                       <a:round/>
@@ -5754,17 +5772,17 @@
                         <a:buNone/>
                       </a:pPr>
                       <a:r>
-                        <a:rPr lang="en-US" sz="1050" dirty="0">
+                        <a:rPr lang="en-US" sz="1150" dirty="0">
                           <a:solidFill>
-                            <a:srgbClr val="202020"/>
+                            <a:srgbClr val="222533"/>
                           </a:solidFill>
                           <a:latin typeface="Calibri" pitchFamily="34" charset="0"/>
-                          <a:ea typeface="Calibri" pitchFamily="34" charset="-122"/>
-                          <a:cs typeface="Calibri" pitchFamily="34" charset="-120"/>
+                          <a:ea typeface="Calibri" pitchFamily="34"/>
+                          <a:cs typeface="Calibri" pitchFamily="34"/>
                         </a:rPr>
                         <a:t>Supervisor</a:t>
                       </a:r>
-                      <a:endParaRPr lang="en-US" sz="1050" dirty="0">
+                      <a:endParaRPr lang="en-US" sz="1150" dirty="0">
                         <a:latin typeface="Calibri" charset="0"/>
                         <a:ea typeface="Calibri" charset="0"/>
                         <a:cs typeface="Calibri" charset="0"/>
@@ -5774,7 +5792,7 @@
                   <a:tcPr marL="91440" marR="91440" marT="45720" marB="45720" anchor="ctr">
                     <a:lnL w="9525" cap="flat" cmpd="sng" algn="ctr">
                       <a:solidFill>
-                        <a:srgbClr val="D9D9D9"/>
+                        <a:srgbClr val="D5D9E0"/>
                       </a:solidFill>
                       <a:prstDash val="solid"/>
                       <a:round/>
@@ -5783,7 +5801,7 @@
                     </a:lnL>
                     <a:lnR w="9525" cap="flat" cmpd="sng" algn="ctr">
                       <a:solidFill>
-                        <a:srgbClr val="D9D9D9"/>
+                        <a:srgbClr val="D5D9E0"/>
                       </a:solidFill>
                       <a:prstDash val="solid"/>
                       <a:round/>
@@ -5792,7 +5810,7 @@
                     </a:lnR>
                     <a:lnT w="9525" cap="flat" cmpd="sng" algn="ctr">
                       <a:solidFill>
-                        <a:srgbClr val="D9D9D9"/>
+                        <a:srgbClr val="D5D9E0"/>
                       </a:solidFill>
                       <a:prstDash val="solid"/>
                       <a:round/>
@@ -5801,7 +5819,7 @@
                     </a:lnT>
                     <a:lnB w="9525" cap="flat" cmpd="sng" algn="ctr">
                       <a:solidFill>
-                        <a:srgbClr val="D9D9D9"/>
+                        <a:srgbClr val="D5D9E0"/>
                       </a:solidFill>
                       <a:prstDash val="solid"/>
                       <a:round/>
@@ -5822,17 +5840,17 @@
                         <a:buNone/>
                       </a:pPr>
                       <a:r>
-                        <a:rPr lang="en-US" sz="1050" dirty="0">
+                        <a:rPr lang="en-US" sz="1150" dirty="0">
                           <a:solidFill>
-                            <a:srgbClr val="202020"/>
+                            <a:srgbClr val="222533"/>
                           </a:solidFill>
                           <a:latin typeface="Calibri" pitchFamily="34" charset="0"/>
-                          <a:ea typeface="Calibri" pitchFamily="34" charset="-122"/>
-                          <a:cs typeface="Calibri" pitchFamily="34" charset="-120"/>
+                          <a:ea typeface="Calibri" pitchFamily="34"/>
+                          <a:cs typeface="Calibri" pitchFamily="34"/>
                         </a:rPr>
                         <a:t>Reviews high-value defective return</a:t>
                       </a:r>
-                      <a:endParaRPr lang="en-US" sz="1050" dirty="0">
+                      <a:endParaRPr lang="en-US" sz="1150" dirty="0">
                         <a:latin typeface="Calibri" charset="0"/>
                         <a:ea typeface="Calibri" charset="0"/>
                         <a:cs typeface="Calibri" charset="0"/>
@@ -5842,7 +5860,7 @@
                   <a:tcPr marL="91440" marR="91440" marT="45720" marB="45720" anchor="ctr">
                     <a:lnL w="9525" cap="flat" cmpd="sng" algn="ctr">
                       <a:solidFill>
-                        <a:srgbClr val="D9D9D9"/>
+                        <a:srgbClr val="D5D9E0"/>
                       </a:solidFill>
                       <a:prstDash val="solid"/>
                       <a:round/>
@@ -5851,7 +5869,7 @@
                     </a:lnL>
                     <a:lnR w="9525" cap="flat" cmpd="sng" algn="ctr">
                       <a:solidFill>
-                        <a:srgbClr val="D9D9D9"/>
+                        <a:srgbClr val="D5D9E0"/>
                       </a:solidFill>
                       <a:prstDash val="solid"/>
                       <a:round/>
@@ -5860,7 +5878,7 @@
                     </a:lnR>
                     <a:lnT w="9525" cap="flat" cmpd="sng" algn="ctr">
                       <a:solidFill>
-                        <a:srgbClr val="D9D9D9"/>
+                        <a:srgbClr val="D5D9E0"/>
                       </a:solidFill>
                       <a:prstDash val="solid"/>
                       <a:round/>
@@ -5869,7 +5887,7 @@
                     </a:lnT>
                     <a:lnB w="9525" cap="flat" cmpd="sng" algn="ctr">
                       <a:solidFill>
-                        <a:srgbClr val="D9D9D9"/>
+                        <a:srgbClr val="D5D9E0"/>
                       </a:solidFill>
                       <a:prstDash val="solid"/>
                       <a:round/>
@@ -5890,17 +5908,17 @@
                         <a:buNone/>
                       </a:pPr>
                       <a:r>
-                        <a:rPr lang="en-US" sz="1050" dirty="0">
+                        <a:rPr lang="en-US" sz="1150" dirty="0">
                           <a:solidFill>
-                            <a:srgbClr val="202020"/>
+                            <a:srgbClr val="222533"/>
                           </a:solidFill>
                           <a:latin typeface="Calibri" pitchFamily="34" charset="0"/>
-                          <a:ea typeface="Calibri" pitchFamily="34" charset="-122"/>
-                          <a:cs typeface="Calibri" pitchFamily="34" charset="-120"/>
+                          <a:ea typeface="Calibri" pitchFamily="34"/>
+                          <a:cs typeface="Calibri" pitchFamily="34"/>
                         </a:rPr>
                         <a:t>Approve or reject?</a:t>
                       </a:r>
-                      <a:endParaRPr lang="en-US" sz="1050" dirty="0">
+                      <a:endParaRPr lang="en-US" sz="1150" dirty="0">
                         <a:latin typeface="Calibri" charset="0"/>
                         <a:ea typeface="Calibri" charset="0"/>
                         <a:cs typeface="Calibri" charset="0"/>
@@ -5910,7 +5928,7 @@
                   <a:tcPr marL="91440" marR="91440" marT="45720" marB="45720" anchor="ctr">
                     <a:lnL w="9525" cap="flat" cmpd="sng" algn="ctr">
                       <a:solidFill>
-                        <a:srgbClr val="D9D9D9"/>
+                        <a:srgbClr val="D5D9E0"/>
                       </a:solidFill>
                       <a:prstDash val="solid"/>
                       <a:round/>
@@ -5919,7 +5937,7 @@
                     </a:lnL>
                     <a:lnR w="9525" cap="flat" cmpd="sng" algn="ctr">
                       <a:solidFill>
-                        <a:srgbClr val="D9D9D9"/>
+                        <a:srgbClr val="D5D9E0"/>
                       </a:solidFill>
                       <a:prstDash val="solid"/>
                       <a:round/>
@@ -5928,7 +5946,7 @@
                     </a:lnR>
                     <a:lnT w="9525" cap="flat" cmpd="sng" algn="ctr">
                       <a:solidFill>
-                        <a:srgbClr val="D9D9D9"/>
+                        <a:srgbClr val="D5D9E0"/>
                       </a:solidFill>
                       <a:prstDash val="solid"/>
                       <a:round/>
@@ -5937,7 +5955,7 @@
                     </a:lnT>
                     <a:lnB w="9525" cap="flat" cmpd="sng" algn="ctr">
                       <a:solidFill>
-                        <a:srgbClr val="D9D9D9"/>
+                        <a:srgbClr val="D5D9E0"/>
                       </a:solidFill>
                       <a:prstDash val="solid"/>
                       <a:round/>
@@ -5958,17 +5976,17 @@
                         <a:buNone/>
                       </a:pPr>
                       <a:r>
-                        <a:rPr lang="en-US" sz="1050" dirty="0">
+                        <a:rPr lang="en-US" sz="1150" dirty="0">
                           <a:solidFill>
-                            <a:srgbClr val="202020"/>
+                            <a:srgbClr val="222533"/>
                           </a:solidFill>
                           <a:latin typeface="Calibri" pitchFamily="34" charset="0"/>
-                          <a:ea typeface="Calibri" pitchFamily="34" charset="-122"/>
-                          <a:cs typeface="Calibri" pitchFamily="34" charset="-120"/>
+                          <a:ea typeface="Calibri" pitchFamily="34"/>
+                          <a:cs typeface="Calibri" pitchFamily="34"/>
                         </a:rPr>
                         <a:t>Approve → status Approved; Reject → status Rejected</a:t>
                       </a:r>
-                      <a:endParaRPr lang="en-US" sz="1050" dirty="0">
+                      <a:endParaRPr lang="en-US" sz="1150" dirty="0">
                         <a:latin typeface="Calibri" charset="0"/>
                         <a:ea typeface="Calibri" charset="0"/>
                         <a:cs typeface="Calibri" charset="0"/>
@@ -5978,7 +5996,7 @@
                   <a:tcPr marL="91440" marR="91440" marT="45720" marB="45720" anchor="ctr">
                     <a:lnL w="9525" cap="flat" cmpd="sng" algn="ctr">
                       <a:solidFill>
-                        <a:srgbClr val="D9D9D9"/>
+                        <a:srgbClr val="D5D9E0"/>
                       </a:solidFill>
                       <a:prstDash val="solid"/>
                       <a:round/>
@@ -5987,7 +6005,7 @@
                     </a:lnL>
                     <a:lnR w="9525" cap="flat" cmpd="sng" algn="ctr">
                       <a:solidFill>
-                        <a:srgbClr val="D9D9D9"/>
+                        <a:srgbClr val="D5D9E0"/>
                       </a:solidFill>
                       <a:prstDash val="solid"/>
                       <a:round/>
@@ -5996,7 +6014,7 @@
                     </a:lnR>
                     <a:lnT w="9525" cap="flat" cmpd="sng" algn="ctr">
                       <a:solidFill>
-                        <a:srgbClr val="D9D9D9"/>
+                        <a:srgbClr val="D5D9E0"/>
                       </a:solidFill>
                       <a:prstDash val="solid"/>
                       <a:round/>
@@ -6005,7 +6023,7 @@
                     </a:lnT>
                     <a:lnB w="9525" cap="flat" cmpd="sng" algn="ctr">
                       <a:solidFill>
-                        <a:srgbClr val="D9D9D9"/>
+                        <a:srgbClr val="D5D9E0"/>
                       </a:solidFill>
                       <a:prstDash val="solid"/>
                       <a:round/>
@@ -6018,7 +6036,7 @@
                   </a:tcPr>
                 </a:tc>
               </a:tr>
-              <a:tr h="658368">
+              <a:tr h="0">
                 <a:tc>
                   <a:txBody>
                     <a:bodyPr/>
@@ -6028,27 +6046,27 @@
                         <a:buNone/>
                       </a:pPr>
                       <a:r>
-                        <a:rPr lang="en-US" sz="1050" dirty="0">
+                        <a:rPr lang="en-US" sz="1100" dirty="0">
                           <a:solidFill>
-                            <a:srgbClr val="202020"/>
+                            <a:srgbClr val="222533"/>
                           </a:solidFill>
-                          <a:latin typeface="Calibri" pitchFamily="34" charset="0"/>
-                          <a:ea typeface="Calibri" pitchFamily="34" charset="-122"/>
-                          <a:cs typeface="Calibri" pitchFamily="34" charset="-120"/>
+                          <a:latin typeface="Courier New" pitchFamily="34" charset="0"/>
+                          <a:ea typeface="Courier New" pitchFamily="34"/>
+                          <a:cs typeface="Courier New" pitchFamily="34"/>
                         </a:rPr>
                         <a:t>6</a:t>
                       </a:r>
-                      <a:endParaRPr lang="en-US" sz="1050" dirty="0">
-                        <a:latin typeface="Calibri" charset="0"/>
-                        <a:ea typeface="Calibri" charset="0"/>
-                        <a:cs typeface="Calibri" charset="0"/>
+                      <a:endParaRPr lang="en-US" sz="1100" dirty="0">
+                        <a:latin typeface="Courier New" charset="0"/>
+                        <a:ea typeface="Courier New" charset="0"/>
+                        <a:cs typeface="Courier New" charset="0"/>
                       </a:endParaRPr>
                     </a:p>
                   </a:txBody>
                   <a:tcPr marL="91440" marR="91440" marT="45720" marB="45720" anchor="ctr">
                     <a:lnL w="9525" cap="flat" cmpd="sng" algn="ctr">
                       <a:solidFill>
-                        <a:srgbClr val="D9D9D9"/>
+                        <a:srgbClr val="D5D9E0"/>
                       </a:solidFill>
                       <a:prstDash val="solid"/>
                       <a:round/>
@@ -6057,7 +6075,7 @@
                     </a:lnL>
                     <a:lnR w="9525" cap="flat" cmpd="sng" algn="ctr">
                       <a:solidFill>
-                        <a:srgbClr val="D9D9D9"/>
+                        <a:srgbClr val="D5D9E0"/>
                       </a:solidFill>
                       <a:prstDash val="solid"/>
                       <a:round/>
@@ -6066,7 +6084,7 @@
                     </a:lnR>
                     <a:lnT w="9525" cap="flat" cmpd="sng" algn="ctr">
                       <a:solidFill>
-                        <a:srgbClr val="D9D9D9"/>
+                        <a:srgbClr val="D5D9E0"/>
                       </a:solidFill>
                       <a:prstDash val="solid"/>
                       <a:round/>
@@ -6075,7 +6093,7 @@
                     </a:lnT>
                     <a:lnB w="9525" cap="flat" cmpd="sng" algn="ctr">
                       <a:solidFill>
-                        <a:srgbClr val="D9D9D9"/>
+                        <a:srgbClr val="D5D9E0"/>
                       </a:solidFill>
                       <a:prstDash val="solid"/>
                       <a:round/>
@@ -6083,7 +6101,7 @@
                       <a:tailEnd type="none" w="med" len="med"/>
                     </a:lnB>
                     <a:solidFill>
-                      <a:srgbClr val="F4F6FC"/>
+                      <a:srgbClr val="F7F8FA"/>
                     </a:solidFill>
                   </a:tcPr>
                 </a:tc>
@@ -6096,17 +6114,17 @@
                         <a:buNone/>
                       </a:pPr>
                       <a:r>
-                        <a:rPr lang="en-US" sz="1050" dirty="0">
+                        <a:rPr lang="en-US" sz="1150" dirty="0">
                           <a:solidFill>
-                            <a:srgbClr val="202020"/>
+                            <a:srgbClr val="222533"/>
                           </a:solidFill>
                           <a:latin typeface="Calibri" pitchFamily="34" charset="0"/>
-                          <a:ea typeface="Calibri" pitchFamily="34" charset="-122"/>
-                          <a:cs typeface="Calibri" pitchFamily="34" charset="-120"/>
+                          <a:ea typeface="Calibri" pitchFamily="34"/>
+                          <a:cs typeface="Calibri" pitchFamily="34"/>
                         </a:rPr>
                         <a:t>System</a:t>
                       </a:r>
-                      <a:endParaRPr lang="en-US" sz="1050" dirty="0">
+                      <a:endParaRPr lang="en-US" sz="1150" dirty="0">
                         <a:latin typeface="Calibri" charset="0"/>
                         <a:ea typeface="Calibri" charset="0"/>
                         <a:cs typeface="Calibri" charset="0"/>
@@ -6116,7 +6134,7 @@
                   <a:tcPr marL="91440" marR="91440" marT="45720" marB="45720" anchor="ctr">
                     <a:lnL w="9525" cap="flat" cmpd="sng" algn="ctr">
                       <a:solidFill>
-                        <a:srgbClr val="D9D9D9"/>
+                        <a:srgbClr val="D5D9E0"/>
                       </a:solidFill>
                       <a:prstDash val="solid"/>
                       <a:round/>
@@ -6125,7 +6143,7 @@
                     </a:lnL>
                     <a:lnR w="9525" cap="flat" cmpd="sng" algn="ctr">
                       <a:solidFill>
-                        <a:srgbClr val="D9D9D9"/>
+                        <a:srgbClr val="D5D9E0"/>
                       </a:solidFill>
                       <a:prstDash val="solid"/>
                       <a:round/>
@@ -6134,7 +6152,7 @@
                     </a:lnR>
                     <a:lnT w="9525" cap="flat" cmpd="sng" algn="ctr">
                       <a:solidFill>
-                        <a:srgbClr val="D9D9D9"/>
+                        <a:srgbClr val="D5D9E0"/>
                       </a:solidFill>
                       <a:prstDash val="solid"/>
                       <a:round/>
@@ -6143,7 +6161,7 @@
                     </a:lnT>
                     <a:lnB w="9525" cap="flat" cmpd="sng" algn="ctr">
                       <a:solidFill>
-                        <a:srgbClr val="D9D9D9"/>
+                        <a:srgbClr val="D5D9E0"/>
                       </a:solidFill>
                       <a:prstDash val="solid"/>
                       <a:round/>
@@ -6151,7 +6169,7 @@
                       <a:tailEnd type="none" w="med" len="med"/>
                     </a:lnB>
                     <a:solidFill>
-                      <a:srgbClr val="F4F6FC"/>
+                      <a:srgbClr val="F7F8FA"/>
                     </a:solidFill>
                   </a:tcPr>
                 </a:tc>
@@ -6164,17 +6182,17 @@
                         <a:buNone/>
                       </a:pPr>
                       <a:r>
-                        <a:rPr lang="en-US" sz="1050" dirty="0">
+                        <a:rPr lang="en-US" sz="1150" dirty="0">
                           <a:solidFill>
-                            <a:srgbClr val="202020"/>
+                            <a:srgbClr val="222533"/>
                           </a:solidFill>
                           <a:latin typeface="Calibri" pitchFamily="34" charset="0"/>
-                          <a:ea typeface="Calibri" pitchFamily="34" charset="-122"/>
-                          <a:cs typeface="Calibri" pitchFamily="34" charset="-120"/>
+                          <a:ea typeface="Calibri" pitchFamily="34"/>
+                          <a:cs typeface="Calibri" pitchFamily="34"/>
                         </a:rPr>
                         <a:t>Assigns Return ID and sets initial status</a:t>
                       </a:r>
-                      <a:endParaRPr lang="en-US" sz="1050" dirty="0">
+                      <a:endParaRPr lang="en-US" sz="1150" dirty="0">
                         <a:latin typeface="Calibri" charset="0"/>
                         <a:ea typeface="Calibri" charset="0"/>
                         <a:cs typeface="Calibri" charset="0"/>
@@ -6184,7 +6202,7 @@
                   <a:tcPr marL="91440" marR="91440" marT="45720" marB="45720" anchor="ctr">
                     <a:lnL w="9525" cap="flat" cmpd="sng" algn="ctr">
                       <a:solidFill>
-                        <a:srgbClr val="D9D9D9"/>
+                        <a:srgbClr val="D5D9E0"/>
                       </a:solidFill>
                       <a:prstDash val="solid"/>
                       <a:round/>
@@ -6193,7 +6211,7 @@
                     </a:lnL>
                     <a:lnR w="9525" cap="flat" cmpd="sng" algn="ctr">
                       <a:solidFill>
-                        <a:srgbClr val="D9D9D9"/>
+                        <a:srgbClr val="D5D9E0"/>
                       </a:solidFill>
                       <a:prstDash val="solid"/>
                       <a:round/>
@@ -6202,7 +6220,7 @@
                     </a:lnR>
                     <a:lnT w="9525" cap="flat" cmpd="sng" algn="ctr">
                       <a:solidFill>
-                        <a:srgbClr val="D9D9D9"/>
+                        <a:srgbClr val="D5D9E0"/>
                       </a:solidFill>
                       <a:prstDash val="solid"/>
                       <a:round/>
@@ -6211,7 +6229,7 @@
                     </a:lnT>
                     <a:lnB w="9525" cap="flat" cmpd="sng" algn="ctr">
                       <a:solidFill>
-                        <a:srgbClr val="D9D9D9"/>
+                        <a:srgbClr val="D5D9E0"/>
                       </a:solidFill>
                       <a:prstDash val="solid"/>
                       <a:round/>
@@ -6219,7 +6237,7 @@
                       <a:tailEnd type="none" w="med" len="med"/>
                     </a:lnB>
                     <a:solidFill>
-                      <a:srgbClr val="F4F6FC"/>
+                      <a:srgbClr val="F7F8FA"/>
                     </a:solidFill>
                   </a:tcPr>
                 </a:tc>
@@ -6232,17 +6250,17 @@
                         <a:buNone/>
                       </a:pPr>
                       <a:r>
-                        <a:rPr lang="en-US" sz="1050" dirty="0">
+                        <a:rPr lang="en-US" sz="1150" dirty="0">
                           <a:solidFill>
-                            <a:srgbClr val="202020"/>
+                            <a:srgbClr val="222533"/>
                           </a:solidFill>
                           <a:latin typeface="Calibri" pitchFamily="34" charset="0"/>
-                          <a:ea typeface="Calibri" pitchFamily="34" charset="-122"/>
-                          <a:cs typeface="Calibri" pitchFamily="34" charset="-120"/>
+                          <a:ea typeface="Calibri" pitchFamily="34"/>
+                          <a:cs typeface="Calibri" pitchFamily="34"/>
                         </a:rPr>
                         <a:t>—</a:t>
                       </a:r>
-                      <a:endParaRPr lang="en-US" sz="1050" dirty="0">
+                      <a:endParaRPr lang="en-US" sz="1150" dirty="0">
                         <a:latin typeface="Calibri" charset="0"/>
                         <a:ea typeface="Calibri" charset="0"/>
                         <a:cs typeface="Calibri" charset="0"/>
@@ -6252,7 +6270,7 @@
                   <a:tcPr marL="91440" marR="91440" marT="45720" marB="45720" anchor="ctr">
                     <a:lnL w="9525" cap="flat" cmpd="sng" algn="ctr">
                       <a:solidFill>
-                        <a:srgbClr val="D9D9D9"/>
+                        <a:srgbClr val="D5D9E0"/>
                       </a:solidFill>
                       <a:prstDash val="solid"/>
                       <a:round/>
@@ -6261,7 +6279,7 @@
                     </a:lnL>
                     <a:lnR w="9525" cap="flat" cmpd="sng" algn="ctr">
                       <a:solidFill>
-                        <a:srgbClr val="D9D9D9"/>
+                        <a:srgbClr val="D5D9E0"/>
                       </a:solidFill>
                       <a:prstDash val="solid"/>
                       <a:round/>
@@ -6270,7 +6288,7 @@
                     </a:lnR>
                     <a:lnT w="9525" cap="flat" cmpd="sng" algn="ctr">
                       <a:solidFill>
-                        <a:srgbClr val="D9D9D9"/>
+                        <a:srgbClr val="D5D9E0"/>
                       </a:solidFill>
                       <a:prstDash val="solid"/>
                       <a:round/>
@@ -6279,7 +6297,7 @@
                     </a:lnT>
                     <a:lnB w="9525" cap="flat" cmpd="sng" algn="ctr">
                       <a:solidFill>
-                        <a:srgbClr val="D9D9D9"/>
+                        <a:srgbClr val="D5D9E0"/>
                       </a:solidFill>
                       <a:prstDash val="solid"/>
                       <a:round/>
@@ -6287,7 +6305,7 @@
                       <a:tailEnd type="none" w="med" len="med"/>
                     </a:lnB>
                     <a:solidFill>
-                      <a:srgbClr val="F4F6FC"/>
+                      <a:srgbClr val="F7F8FA"/>
                     </a:solidFill>
                   </a:tcPr>
                 </a:tc>
@@ -6300,17 +6318,17 @@
                         <a:buNone/>
                       </a:pPr>
                       <a:r>
-                        <a:rPr lang="en-US" sz="1050" dirty="0">
+                        <a:rPr lang="en-US" sz="1150" dirty="0">
                           <a:solidFill>
-                            <a:srgbClr val="202020"/>
+                            <a:srgbClr val="222533"/>
                           </a:solidFill>
                           <a:latin typeface="Calibri" pitchFamily="34" charset="0"/>
-                          <a:ea typeface="Calibri" pitchFamily="34" charset="-122"/>
-                          <a:cs typeface="Calibri" pitchFamily="34" charset="-120"/>
+                          <a:ea typeface="Calibri" pitchFamily="34"/>
+                          <a:cs typeface="Calibri" pitchFamily="34"/>
                         </a:rPr>
                         <a:t>Return ID + status shown to customer</a:t>
                       </a:r>
-                      <a:endParaRPr lang="en-US" sz="1050" dirty="0">
+                      <a:endParaRPr lang="en-US" sz="1150" dirty="0">
                         <a:latin typeface="Calibri" charset="0"/>
                         <a:ea typeface="Calibri" charset="0"/>
                         <a:cs typeface="Calibri" charset="0"/>
@@ -6320,7 +6338,7 @@
                   <a:tcPr marL="91440" marR="91440" marT="45720" marB="45720" anchor="ctr">
                     <a:lnL w="9525" cap="flat" cmpd="sng" algn="ctr">
                       <a:solidFill>
-                        <a:srgbClr val="D9D9D9"/>
+                        <a:srgbClr val="D5D9E0"/>
                       </a:solidFill>
                       <a:prstDash val="solid"/>
                       <a:round/>
@@ -6329,7 +6347,7 @@
                     </a:lnL>
                     <a:lnR w="9525" cap="flat" cmpd="sng" algn="ctr">
                       <a:solidFill>
-                        <a:srgbClr val="D9D9D9"/>
+                        <a:srgbClr val="D5D9E0"/>
                       </a:solidFill>
                       <a:prstDash val="solid"/>
                       <a:round/>
@@ -6338,7 +6356,7 @@
                     </a:lnR>
                     <a:lnT w="9525" cap="flat" cmpd="sng" algn="ctr">
                       <a:solidFill>
-                        <a:srgbClr val="D9D9D9"/>
+                        <a:srgbClr val="D5D9E0"/>
                       </a:solidFill>
                       <a:prstDash val="solid"/>
                       <a:round/>
@@ -6347,7 +6365,7 @@
                     </a:lnT>
                     <a:lnB w="9525" cap="flat" cmpd="sng" algn="ctr">
                       <a:solidFill>
-                        <a:srgbClr val="D9D9D9"/>
+                        <a:srgbClr val="D5D9E0"/>
                       </a:solidFill>
                       <a:prstDash val="solid"/>
                       <a:round/>
@@ -6355,12 +6373,12 @@
                       <a:tailEnd type="none" w="med" len="med"/>
                     </a:lnB>
                     <a:solidFill>
-                      <a:srgbClr val="F4F6FC"/>
+                      <a:srgbClr val="F7F8FA"/>
                     </a:solidFill>
                   </a:tcPr>
                 </a:tc>
               </a:tr>
-              <a:tr h="658368">
+              <a:tr h="0">
                 <a:tc>
                   <a:txBody>
                     <a:bodyPr/>
@@ -6370,27 +6388,27 @@
                         <a:buNone/>
                       </a:pPr>
                       <a:r>
-                        <a:rPr lang="en-US" sz="1050" dirty="0">
+                        <a:rPr lang="en-US" sz="1100" dirty="0">
                           <a:solidFill>
-                            <a:srgbClr val="202020"/>
+                            <a:srgbClr val="222533"/>
                           </a:solidFill>
-                          <a:latin typeface="Calibri" pitchFamily="34" charset="0"/>
-                          <a:ea typeface="Calibri" pitchFamily="34" charset="-122"/>
-                          <a:cs typeface="Calibri" pitchFamily="34" charset="-120"/>
+                          <a:latin typeface="Courier New" pitchFamily="34" charset="0"/>
+                          <a:ea typeface="Courier New" pitchFamily="34"/>
+                          <a:cs typeface="Courier New" pitchFamily="34"/>
                         </a:rPr>
                         <a:t>7</a:t>
                       </a:r>
-                      <a:endParaRPr lang="en-US" sz="1050" dirty="0">
-                        <a:latin typeface="Calibri" charset="0"/>
-                        <a:ea typeface="Calibri" charset="0"/>
-                        <a:cs typeface="Calibri" charset="0"/>
+                      <a:endParaRPr lang="en-US" sz="1100" dirty="0">
+                        <a:latin typeface="Courier New" charset="0"/>
+                        <a:ea typeface="Courier New" charset="0"/>
+                        <a:cs typeface="Courier New" charset="0"/>
                       </a:endParaRPr>
                     </a:p>
                   </a:txBody>
                   <a:tcPr marL="91440" marR="91440" marT="45720" marB="45720" anchor="ctr">
                     <a:lnL w="9525" cap="flat" cmpd="sng" algn="ctr">
                       <a:solidFill>
-                        <a:srgbClr val="D9D9D9"/>
+                        <a:srgbClr val="D5D9E0"/>
                       </a:solidFill>
                       <a:prstDash val="solid"/>
                       <a:round/>
@@ -6399,7 +6417,7 @@
                     </a:lnL>
                     <a:lnR w="9525" cap="flat" cmpd="sng" algn="ctr">
                       <a:solidFill>
-                        <a:srgbClr val="D9D9D9"/>
+                        <a:srgbClr val="D5D9E0"/>
                       </a:solidFill>
                       <a:prstDash val="solid"/>
                       <a:round/>
@@ -6408,7 +6426,7 @@
                     </a:lnR>
                     <a:lnT w="9525" cap="flat" cmpd="sng" algn="ctr">
                       <a:solidFill>
-                        <a:srgbClr val="D9D9D9"/>
+                        <a:srgbClr val="D5D9E0"/>
                       </a:solidFill>
                       <a:prstDash val="solid"/>
                       <a:round/>
@@ -6417,7 +6435,7 @@
                     </a:lnT>
                     <a:lnB w="9525" cap="flat" cmpd="sng" algn="ctr">
                       <a:solidFill>
-                        <a:srgbClr val="D9D9D9"/>
+                        <a:srgbClr val="D5D9E0"/>
                       </a:solidFill>
                       <a:prstDash val="solid"/>
                       <a:round/>
@@ -6438,17 +6456,17 @@
                         <a:buNone/>
                       </a:pPr>
                       <a:r>
-                        <a:rPr lang="en-US" sz="1050" dirty="0">
+                        <a:rPr lang="en-US" sz="1150" dirty="0">
                           <a:solidFill>
-                            <a:srgbClr val="202020"/>
+                            <a:srgbClr val="222533"/>
                           </a:solidFill>
                           <a:latin typeface="Calibri" pitchFamily="34" charset="0"/>
-                          <a:ea typeface="Calibri" pitchFamily="34" charset="-122"/>
-                          <a:cs typeface="Calibri" pitchFamily="34" charset="-120"/>
+                          <a:ea typeface="Calibri" pitchFamily="34"/>
+                          <a:cs typeface="Calibri" pitchFamily="34"/>
                         </a:rPr>
                         <a:t>System</a:t>
                       </a:r>
-                      <a:endParaRPr lang="en-US" sz="1050" dirty="0">
+                      <a:endParaRPr lang="en-US" sz="1150" dirty="0">
                         <a:latin typeface="Calibri" charset="0"/>
                         <a:ea typeface="Calibri" charset="0"/>
                         <a:cs typeface="Calibri" charset="0"/>
@@ -6458,7 +6476,7 @@
                   <a:tcPr marL="91440" marR="91440" marT="45720" marB="45720" anchor="ctr">
                     <a:lnL w="9525" cap="flat" cmpd="sng" algn="ctr">
                       <a:solidFill>
-                        <a:srgbClr val="D9D9D9"/>
+                        <a:srgbClr val="D5D9E0"/>
                       </a:solidFill>
                       <a:prstDash val="solid"/>
                       <a:round/>
@@ -6467,7 +6485,7 @@
                     </a:lnL>
                     <a:lnR w="9525" cap="flat" cmpd="sng" algn="ctr">
                       <a:solidFill>
-                        <a:srgbClr val="D9D9D9"/>
+                        <a:srgbClr val="D5D9E0"/>
                       </a:solidFill>
                       <a:prstDash val="solid"/>
                       <a:round/>
@@ -6476,7 +6494,7 @@
                     </a:lnR>
                     <a:lnT w="9525" cap="flat" cmpd="sng" algn="ctr">
                       <a:solidFill>
-                        <a:srgbClr val="D9D9D9"/>
+                        <a:srgbClr val="D5D9E0"/>
                       </a:solidFill>
                       <a:prstDash val="solid"/>
                       <a:round/>
@@ -6485,7 +6503,7 @@
                     </a:lnT>
                     <a:lnB w="9525" cap="flat" cmpd="sng" algn="ctr">
                       <a:solidFill>
-                        <a:srgbClr val="D9D9D9"/>
+                        <a:srgbClr val="D5D9E0"/>
                       </a:solidFill>
                       <a:prstDash val="solid"/>
                       <a:round/>
@@ -6506,17 +6524,17 @@
                         <a:buNone/>
                       </a:pPr>
                       <a:r>
-                        <a:rPr lang="en-US" sz="1050" dirty="0">
+                        <a:rPr lang="en-US" sz="1150" dirty="0">
                           <a:solidFill>
-                            <a:srgbClr val="202020"/>
+                            <a:srgbClr val="222533"/>
                           </a:solidFill>
                           <a:latin typeface="Calibri" pitchFamily="34" charset="0"/>
-                          <a:ea typeface="Calibri" pitchFamily="34" charset="-122"/>
-                          <a:cs typeface="Calibri" pitchFamily="34" charset="-120"/>
+                          <a:ea typeface="Calibri" pitchFamily="34"/>
+                          <a:cs typeface="Calibri" pitchFamily="34"/>
                         </a:rPr>
                         <a:t>Updates status as request moves through workflow</a:t>
                       </a:r>
-                      <a:endParaRPr lang="en-US" sz="1050" dirty="0">
+                      <a:endParaRPr lang="en-US" sz="1150" dirty="0">
                         <a:latin typeface="Calibri" charset="0"/>
                         <a:ea typeface="Calibri" charset="0"/>
                         <a:cs typeface="Calibri" charset="0"/>
@@ -6526,7 +6544,7 @@
                   <a:tcPr marL="91440" marR="91440" marT="45720" marB="45720" anchor="ctr">
                     <a:lnL w="9525" cap="flat" cmpd="sng" algn="ctr">
                       <a:solidFill>
-                        <a:srgbClr val="D9D9D9"/>
+                        <a:srgbClr val="D5D9E0"/>
                       </a:solidFill>
                       <a:prstDash val="solid"/>
                       <a:round/>
@@ -6535,7 +6553,7 @@
                     </a:lnL>
                     <a:lnR w="9525" cap="flat" cmpd="sng" algn="ctr">
                       <a:solidFill>
-                        <a:srgbClr val="D9D9D9"/>
+                        <a:srgbClr val="D5D9E0"/>
                       </a:solidFill>
                       <a:prstDash val="solid"/>
                       <a:round/>
@@ -6544,7 +6562,7 @@
                     </a:lnR>
                     <a:lnT w="9525" cap="flat" cmpd="sng" algn="ctr">
                       <a:solidFill>
-                        <a:srgbClr val="D9D9D9"/>
+                        <a:srgbClr val="D5D9E0"/>
                       </a:solidFill>
                       <a:prstDash val="solid"/>
                       <a:round/>
@@ -6553,7 +6571,7 @@
                     </a:lnT>
                     <a:lnB w="9525" cap="flat" cmpd="sng" algn="ctr">
                       <a:solidFill>
-                        <a:srgbClr val="D9D9D9"/>
+                        <a:srgbClr val="D5D9E0"/>
                       </a:solidFill>
                       <a:prstDash val="solid"/>
                       <a:round/>
@@ -6574,17 +6592,17 @@
                         <a:buNone/>
                       </a:pPr>
                       <a:r>
-                        <a:rPr lang="en-US" sz="1050" dirty="0">
+                        <a:rPr lang="en-US" sz="1150" dirty="0">
                           <a:solidFill>
-                            <a:srgbClr val="202020"/>
+                            <a:srgbClr val="222533"/>
                           </a:solidFill>
                           <a:latin typeface="Calibri" pitchFamily="34" charset="0"/>
-                          <a:ea typeface="Calibri" pitchFamily="34" charset="-122"/>
-                          <a:cs typeface="Calibri" pitchFamily="34" charset="-120"/>
+                          <a:ea typeface="Calibri" pitchFamily="34"/>
+                          <a:cs typeface="Calibri" pitchFamily="34"/>
                         </a:rPr>
                         <a:t>—</a:t>
                       </a:r>
-                      <a:endParaRPr lang="en-US" sz="1050" dirty="0">
+                      <a:endParaRPr lang="en-US" sz="1150" dirty="0">
                         <a:latin typeface="Calibri" charset="0"/>
                         <a:ea typeface="Calibri" charset="0"/>
                         <a:cs typeface="Calibri" charset="0"/>
@@ -6594,7 +6612,7 @@
                   <a:tcPr marL="91440" marR="91440" marT="45720" marB="45720" anchor="ctr">
                     <a:lnL w="9525" cap="flat" cmpd="sng" algn="ctr">
                       <a:solidFill>
-                        <a:srgbClr val="D9D9D9"/>
+                        <a:srgbClr val="D5D9E0"/>
                       </a:solidFill>
                       <a:prstDash val="solid"/>
                       <a:round/>
@@ -6603,7 +6621,7 @@
                     </a:lnL>
                     <a:lnR w="9525" cap="flat" cmpd="sng" algn="ctr">
                       <a:solidFill>
-                        <a:srgbClr val="D9D9D9"/>
+                        <a:srgbClr val="D5D9E0"/>
                       </a:solidFill>
                       <a:prstDash val="solid"/>
                       <a:round/>
@@ -6612,7 +6630,7 @@
                     </a:lnR>
                     <a:lnT w="9525" cap="flat" cmpd="sng" algn="ctr">
                       <a:solidFill>
-                        <a:srgbClr val="D9D9D9"/>
+                        <a:srgbClr val="D5D9E0"/>
                       </a:solidFill>
                       <a:prstDash val="solid"/>
                       <a:round/>
@@ -6621,7 +6639,7 @@
                     </a:lnT>
                     <a:lnB w="9525" cap="flat" cmpd="sng" algn="ctr">
                       <a:solidFill>
-                        <a:srgbClr val="D9D9D9"/>
+                        <a:srgbClr val="D5D9E0"/>
                       </a:solidFill>
                       <a:prstDash val="solid"/>
                       <a:round/>
@@ -6642,17 +6660,17 @@
                         <a:buNone/>
                       </a:pPr>
                       <a:r>
-                        <a:rPr lang="en-US" sz="1050" dirty="0">
+                        <a:rPr lang="en-US" sz="1150" dirty="0">
                           <a:solidFill>
-                            <a:srgbClr val="202020"/>
+                            <a:srgbClr val="222533"/>
                           </a:solidFill>
                           <a:latin typeface="Calibri" pitchFamily="34" charset="0"/>
-                          <a:ea typeface="Calibri" pitchFamily="34" charset="-122"/>
-                          <a:cs typeface="Calibri" pitchFamily="34" charset="-120"/>
+                          <a:ea typeface="Calibri" pitchFamily="34"/>
+                          <a:cs typeface="Calibri" pitchFamily="34"/>
                         </a:rPr>
                         <a:t>Customer can check status at any time</a:t>
                       </a:r>
-                      <a:endParaRPr lang="en-US" sz="1050" dirty="0">
+                      <a:endParaRPr lang="en-US" sz="1150" dirty="0">
                         <a:latin typeface="Calibri" charset="0"/>
                         <a:ea typeface="Calibri" charset="0"/>
                         <a:cs typeface="Calibri" charset="0"/>
@@ -6662,7 +6680,7 @@
                   <a:tcPr marL="91440" marR="91440" marT="45720" marB="45720" anchor="ctr">
                     <a:lnL w="9525" cap="flat" cmpd="sng" algn="ctr">
                       <a:solidFill>
-                        <a:srgbClr val="D9D9D9"/>
+                        <a:srgbClr val="D5D9E0"/>
                       </a:solidFill>
                       <a:prstDash val="solid"/>
                       <a:round/>
@@ -6671,7 +6689,7 @@
                     </a:lnL>
                     <a:lnR w="9525" cap="flat" cmpd="sng" algn="ctr">
                       <a:solidFill>
-                        <a:srgbClr val="D9D9D9"/>
+                        <a:srgbClr val="D5D9E0"/>
                       </a:solidFill>
                       <a:prstDash val="solid"/>
                       <a:round/>
@@ -6680,7 +6698,7 @@
                     </a:lnR>
                     <a:lnT w="9525" cap="flat" cmpd="sng" algn="ctr">
                       <a:solidFill>
-                        <a:srgbClr val="D9D9D9"/>
+                        <a:srgbClr val="D5D9E0"/>
                       </a:solidFill>
                       <a:prstDash val="solid"/>
                       <a:round/>
@@ -6689,7 +6707,7 @@
                     </a:lnT>
                     <a:lnB w="9525" cap="flat" cmpd="sng" algn="ctr">
                       <a:solidFill>
-                        <a:srgbClr val="D9D9D9"/>
+                        <a:srgbClr val="D5D9E0"/>
                       </a:solidFill>
                       <a:prstDash val="solid"/>
                       <a:round/>
@@ -6702,7 +6720,7 @@
                   </a:tcPr>
                 </a:tc>
               </a:tr>
-              <a:tr h="658368">
+              <a:tr h="0">
                 <a:tc>
                   <a:txBody>
                     <a:bodyPr/>
@@ -6712,27 +6730,27 @@
                         <a:buNone/>
                       </a:pPr>
                       <a:r>
-                        <a:rPr lang="en-US" sz="1050" dirty="0">
+                        <a:rPr lang="en-US" sz="1100" dirty="0">
                           <a:solidFill>
-                            <a:srgbClr val="202020"/>
+                            <a:srgbClr val="222533"/>
                           </a:solidFill>
-                          <a:latin typeface="Calibri" pitchFamily="34" charset="0"/>
-                          <a:ea typeface="Calibri" pitchFamily="34" charset="-122"/>
-                          <a:cs typeface="Calibri" pitchFamily="34" charset="-120"/>
+                          <a:latin typeface="Courier New" pitchFamily="34" charset="0"/>
+                          <a:ea typeface="Courier New" pitchFamily="34"/>
+                          <a:cs typeface="Courier New" pitchFamily="34"/>
                         </a:rPr>
                         <a:t>8</a:t>
                       </a:r>
-                      <a:endParaRPr lang="en-US" sz="1050" dirty="0">
-                        <a:latin typeface="Calibri" charset="0"/>
-                        <a:ea typeface="Calibri" charset="0"/>
-                        <a:cs typeface="Calibri" charset="0"/>
+                      <a:endParaRPr lang="en-US" sz="1100" dirty="0">
+                        <a:latin typeface="Courier New" charset="0"/>
+                        <a:ea typeface="Courier New" charset="0"/>
+                        <a:cs typeface="Courier New" charset="0"/>
                       </a:endParaRPr>
                     </a:p>
                   </a:txBody>
                   <a:tcPr marL="91440" marR="91440" marT="45720" marB="45720" anchor="ctr">
                     <a:lnL w="9525" cap="flat" cmpd="sng" algn="ctr">
                       <a:solidFill>
-                        <a:srgbClr val="D9D9D9"/>
+                        <a:srgbClr val="D5D9E0"/>
                       </a:solidFill>
                       <a:prstDash val="solid"/>
                       <a:round/>
@@ -6741,7 +6759,7 @@
                     </a:lnL>
                     <a:lnR w="9525" cap="flat" cmpd="sng" algn="ctr">
                       <a:solidFill>
-                        <a:srgbClr val="D9D9D9"/>
+                        <a:srgbClr val="D5D9E0"/>
                       </a:solidFill>
                       <a:prstDash val="solid"/>
                       <a:round/>
@@ -6750,7 +6768,7 @@
                     </a:lnR>
                     <a:lnT w="9525" cap="flat" cmpd="sng" algn="ctr">
                       <a:solidFill>
-                        <a:srgbClr val="D9D9D9"/>
+                        <a:srgbClr val="D5D9E0"/>
                       </a:solidFill>
                       <a:prstDash val="solid"/>
                       <a:round/>
@@ -6759,7 +6777,7 @@
                     </a:lnT>
                     <a:lnB w="9525" cap="flat" cmpd="sng" algn="ctr">
                       <a:solidFill>
-                        <a:srgbClr val="D9D9D9"/>
+                        <a:srgbClr val="D5D9E0"/>
                       </a:solidFill>
                       <a:prstDash val="solid"/>
                       <a:round/>
@@ -6767,7 +6785,7 @@
                       <a:tailEnd type="none" w="med" len="med"/>
                     </a:lnB>
                     <a:solidFill>
-                      <a:srgbClr val="F4F6FC"/>
+                      <a:srgbClr val="F7F8FA"/>
                     </a:solidFill>
                   </a:tcPr>
                 </a:tc>
@@ -6780,17 +6798,17 @@
                         <a:buNone/>
                       </a:pPr>
                       <a:r>
-                        <a:rPr lang="en-US" sz="1050" dirty="0">
+                        <a:rPr lang="en-US" sz="1150" dirty="0">
                           <a:solidFill>
-                            <a:srgbClr val="202020"/>
+                            <a:srgbClr val="222533"/>
                           </a:solidFill>
                           <a:latin typeface="Calibri" pitchFamily="34" charset="0"/>
-                          <a:ea typeface="Calibri" pitchFamily="34" charset="-122"/>
-                          <a:cs typeface="Calibri" pitchFamily="34" charset="-120"/>
+                          <a:ea typeface="Calibri" pitchFamily="34"/>
+                          <a:cs typeface="Calibri" pitchFamily="34"/>
                         </a:rPr>
                         <a:t>Customer</a:t>
                       </a:r>
-                      <a:endParaRPr lang="en-US" sz="1050" dirty="0">
+                      <a:endParaRPr lang="en-US" sz="1150" dirty="0">
                         <a:latin typeface="Calibri" charset="0"/>
                         <a:ea typeface="Calibri" charset="0"/>
                         <a:cs typeface="Calibri" charset="0"/>
@@ -6800,7 +6818,7 @@
                   <a:tcPr marL="91440" marR="91440" marT="45720" marB="45720" anchor="ctr">
                     <a:lnL w="9525" cap="flat" cmpd="sng" algn="ctr">
                       <a:solidFill>
-                        <a:srgbClr val="D9D9D9"/>
+                        <a:srgbClr val="D5D9E0"/>
                       </a:solidFill>
                       <a:prstDash val="solid"/>
                       <a:round/>
@@ -6809,7 +6827,7 @@
                     </a:lnL>
                     <a:lnR w="9525" cap="flat" cmpd="sng" algn="ctr">
                       <a:solidFill>
-                        <a:srgbClr val="D9D9D9"/>
+                        <a:srgbClr val="D5D9E0"/>
                       </a:solidFill>
                       <a:prstDash val="solid"/>
                       <a:round/>
@@ -6818,7 +6836,7 @@
                     </a:lnR>
                     <a:lnT w="9525" cap="flat" cmpd="sng" algn="ctr">
                       <a:solidFill>
-                        <a:srgbClr val="D9D9D9"/>
+                        <a:srgbClr val="D5D9E0"/>
                       </a:solidFill>
                       <a:prstDash val="solid"/>
                       <a:round/>
@@ -6827,7 +6845,7 @@
                     </a:lnT>
                     <a:lnB w="9525" cap="flat" cmpd="sng" algn="ctr">
                       <a:solidFill>
-                        <a:srgbClr val="D9D9D9"/>
+                        <a:srgbClr val="D5D9E0"/>
                       </a:solidFill>
                       <a:prstDash val="solid"/>
                       <a:round/>
@@ -6835,7 +6853,7 @@
                       <a:tailEnd type="none" w="med" len="med"/>
                     </a:lnB>
                     <a:solidFill>
-                      <a:srgbClr val="F4F6FC"/>
+                      <a:srgbClr val="F7F8FA"/>
                     </a:solidFill>
                   </a:tcPr>
                 </a:tc>
@@ -6848,17 +6866,17 @@
                         <a:buNone/>
                       </a:pPr>
                       <a:r>
-                        <a:rPr lang="en-US" sz="1050" dirty="0">
+                        <a:rPr lang="en-US" sz="1150" dirty="0">
                           <a:solidFill>
-                            <a:srgbClr val="202020"/>
+                            <a:srgbClr val="222533"/>
                           </a:solidFill>
                           <a:latin typeface="Calibri" pitchFamily="34" charset="0"/>
-                          <a:ea typeface="Calibri" pitchFamily="34" charset="-122"/>
-                          <a:cs typeface="Calibri" pitchFamily="34" charset="-120"/>
+                          <a:ea typeface="Calibri" pitchFamily="34"/>
+                          <a:cs typeface="Calibri" pitchFamily="34"/>
                         </a:rPr>
                         <a:t>Ships item / receives resolution per approved request</a:t>
                       </a:r>
-                      <a:endParaRPr lang="en-US" sz="1050" dirty="0">
+                      <a:endParaRPr lang="en-US" sz="1150" dirty="0">
                         <a:latin typeface="Calibri" charset="0"/>
                         <a:ea typeface="Calibri" charset="0"/>
                         <a:cs typeface="Calibri" charset="0"/>
@@ -6868,7 +6886,7 @@
                   <a:tcPr marL="91440" marR="91440" marT="45720" marB="45720" anchor="ctr">
                     <a:lnL w="9525" cap="flat" cmpd="sng" algn="ctr">
                       <a:solidFill>
-                        <a:srgbClr val="D9D9D9"/>
+                        <a:srgbClr val="D5D9E0"/>
                       </a:solidFill>
                       <a:prstDash val="solid"/>
                       <a:round/>
@@ -6877,7 +6895,7 @@
                     </a:lnL>
                     <a:lnR w="9525" cap="flat" cmpd="sng" algn="ctr">
                       <a:solidFill>
-                        <a:srgbClr val="D9D9D9"/>
+                        <a:srgbClr val="D5D9E0"/>
                       </a:solidFill>
                       <a:prstDash val="solid"/>
                       <a:round/>
@@ -6886,7 +6904,7 @@
                     </a:lnR>
                     <a:lnT w="9525" cap="flat" cmpd="sng" algn="ctr">
                       <a:solidFill>
-                        <a:srgbClr val="D9D9D9"/>
+                        <a:srgbClr val="D5D9E0"/>
                       </a:solidFill>
                       <a:prstDash val="solid"/>
                       <a:round/>
@@ -6895,7 +6913,7 @@
                     </a:lnT>
                     <a:lnB w="9525" cap="flat" cmpd="sng" algn="ctr">
                       <a:solidFill>
-                        <a:srgbClr val="D9D9D9"/>
+                        <a:srgbClr val="D5D9E0"/>
                       </a:solidFill>
                       <a:prstDash val="solid"/>
                       <a:round/>
@@ -6903,7 +6921,7 @@
                       <a:tailEnd type="none" w="med" len="med"/>
                     </a:lnB>
                     <a:solidFill>
-                      <a:srgbClr val="F4F6FC"/>
+                      <a:srgbClr val="F7F8FA"/>
                     </a:solidFill>
                   </a:tcPr>
                 </a:tc>
@@ -6916,17 +6934,17 @@
                         <a:buNone/>
                       </a:pPr>
                       <a:r>
-                        <a:rPr lang="en-US" sz="1050" dirty="0">
+                        <a:rPr lang="en-US" sz="1150" dirty="0">
                           <a:solidFill>
-                            <a:srgbClr val="202020"/>
+                            <a:srgbClr val="222533"/>
                           </a:solidFill>
                           <a:latin typeface="Calibri" pitchFamily="34" charset="0"/>
-                          <a:ea typeface="Calibri" pitchFamily="34" charset="-122"/>
-                          <a:cs typeface="Calibri" pitchFamily="34" charset="-120"/>
+                          <a:ea typeface="Calibri" pitchFamily="34"/>
+                          <a:cs typeface="Calibri" pitchFamily="34"/>
                         </a:rPr>
                         <a:t>—</a:t>
                       </a:r>
-                      <a:endParaRPr lang="en-US" sz="1050" dirty="0">
+                      <a:endParaRPr lang="en-US" sz="1150" dirty="0">
                         <a:latin typeface="Calibri" charset="0"/>
                         <a:ea typeface="Calibri" charset="0"/>
                         <a:cs typeface="Calibri" charset="0"/>
@@ -6936,7 +6954,7 @@
                   <a:tcPr marL="91440" marR="91440" marT="45720" marB="45720" anchor="ctr">
                     <a:lnL w="9525" cap="flat" cmpd="sng" algn="ctr">
                       <a:solidFill>
-                        <a:srgbClr val="D9D9D9"/>
+                        <a:srgbClr val="D5D9E0"/>
                       </a:solidFill>
                       <a:prstDash val="solid"/>
                       <a:round/>
@@ -6945,7 +6963,7 @@
                     </a:lnL>
                     <a:lnR w="9525" cap="flat" cmpd="sng" algn="ctr">
                       <a:solidFill>
-                        <a:srgbClr val="D9D9D9"/>
+                        <a:srgbClr val="D5D9E0"/>
                       </a:solidFill>
                       <a:prstDash val="solid"/>
                       <a:round/>
@@ -6954,7 +6972,7 @@
                     </a:lnR>
                     <a:lnT w="9525" cap="flat" cmpd="sng" algn="ctr">
                       <a:solidFill>
-                        <a:srgbClr val="D9D9D9"/>
+                        <a:srgbClr val="D5D9E0"/>
                       </a:solidFill>
                       <a:prstDash val="solid"/>
                       <a:round/>
@@ -6963,7 +6981,7 @@
                     </a:lnT>
                     <a:lnB w="9525" cap="flat" cmpd="sng" algn="ctr">
                       <a:solidFill>
-                        <a:srgbClr val="D9D9D9"/>
+                        <a:srgbClr val="D5D9E0"/>
                       </a:solidFill>
                       <a:prstDash val="solid"/>
                       <a:round/>
@@ -6971,7 +6989,7 @@
                       <a:tailEnd type="none" w="med" len="med"/>
                     </a:lnB>
                     <a:solidFill>
-                      <a:srgbClr val="F4F6FC"/>
+                      <a:srgbClr val="F7F8FA"/>
                     </a:solidFill>
                   </a:tcPr>
                 </a:tc>
@@ -6984,17 +7002,17 @@
                         <a:buNone/>
                       </a:pPr>
                       <a:r>
-                        <a:rPr lang="en-US" sz="1050" dirty="0">
+                        <a:rPr lang="en-US" sz="1150" dirty="0">
                           <a:solidFill>
-                            <a:srgbClr val="202020"/>
+                            <a:srgbClr val="222533"/>
                           </a:solidFill>
                           <a:latin typeface="Calibri" pitchFamily="34" charset="0"/>
-                          <a:ea typeface="Calibri" pitchFamily="34" charset="-122"/>
-                          <a:cs typeface="Calibri" pitchFamily="34" charset="-120"/>
+                          <a:ea typeface="Calibri" pitchFamily="34"/>
+                          <a:cs typeface="Calibri" pitchFamily="34"/>
                         </a:rPr>
                         <a:t>Status set to Completed</a:t>
                       </a:r>
-                      <a:endParaRPr lang="en-US" sz="1050" dirty="0">
+                      <a:endParaRPr lang="en-US" sz="1150" dirty="0">
                         <a:latin typeface="Calibri" charset="0"/>
                         <a:ea typeface="Calibri" charset="0"/>
                         <a:cs typeface="Calibri" charset="0"/>
@@ -7004,7 +7022,7 @@
                   <a:tcPr marL="91440" marR="91440" marT="45720" marB="45720" anchor="ctr">
                     <a:lnL w="9525" cap="flat" cmpd="sng" algn="ctr">
                       <a:solidFill>
-                        <a:srgbClr val="D9D9D9"/>
+                        <a:srgbClr val="D5D9E0"/>
                       </a:solidFill>
                       <a:prstDash val="solid"/>
                       <a:round/>
@@ -7013,7 +7031,7 @@
                     </a:lnL>
                     <a:lnR w="9525" cap="flat" cmpd="sng" algn="ctr">
                       <a:solidFill>
-                        <a:srgbClr val="D9D9D9"/>
+                        <a:srgbClr val="D5D9E0"/>
                       </a:solidFill>
                       <a:prstDash val="solid"/>
                       <a:round/>
@@ -7022,7 +7040,7 @@
                     </a:lnR>
                     <a:lnT w="9525" cap="flat" cmpd="sng" algn="ctr">
                       <a:solidFill>
-                        <a:srgbClr val="D9D9D9"/>
+                        <a:srgbClr val="D5D9E0"/>
                       </a:solidFill>
                       <a:prstDash val="solid"/>
                       <a:round/>
@@ -7031,7 +7049,7 @@
                     </a:lnT>
                     <a:lnB w="9525" cap="flat" cmpd="sng" algn="ctr">
                       <a:solidFill>
-                        <a:srgbClr val="D9D9D9"/>
+                        <a:srgbClr val="D5D9E0"/>
                       </a:solidFill>
                       <a:prstDash val="solid"/>
                       <a:round/>
@@ -7039,7 +7057,7 @@
                       <a:tailEnd type="none" w="med" len="med"/>
                     </a:lnB>
                     <a:solidFill>
-                      <a:srgbClr val="F4F6FC"/>
+                      <a:srgbClr val="F7F8FA"/>
                     </a:solidFill>
                   </a:tcPr>
                 </a:tc>

--- a/docs/week3/workflow-v1.pptx
+++ b/docs/week3/workflow-v1.pptx
@@ -1988,7 +1988,7 @@
         </p:nvSpPr>
         <p:spPr>
           <a:xfrm>
-            <a:off x="5943600" y="1051560"/>
+            <a:off x="5943600" y="1581912"/>
             <a:ext cx="365760" cy="228600"/>
           </a:xfrm>
           <a:prstGeom prst="rect">
@@ -2051,7 +2051,7 @@
         </p:nvSpPr>
         <p:spPr>
           <a:xfrm>
-            <a:off x="7909560" y="1051560"/>
+            <a:off x="7909560" y="1581912"/>
             <a:ext cx="365760" cy="228600"/>
           </a:xfrm>
           <a:prstGeom prst="rect">
@@ -2280,8 +2280,8 @@
         </p:nvSpPr>
         <p:spPr>
           <a:xfrm>
-            <a:off x="3063240" y="2404872"/>
-            <a:ext cx="1645920" cy="228600"/>
+            <a:off x="5216652" y="2404872"/>
+            <a:ext cx="548640" cy="228600"/>
           </a:xfrm>
           <a:prstGeom prst="rect">
             <a:avLst/>
@@ -2343,8 +2343,8 @@
         </p:nvSpPr>
         <p:spPr>
           <a:xfrm>
-            <a:off x="7955280" y="2404872"/>
-            <a:ext cx="1645920" cy="228600"/>
+            <a:off x="7182612" y="2404872"/>
+            <a:ext cx="548640" cy="228600"/>
           </a:xfrm>
           <a:prstGeom prst="rect">
             <a:avLst/>
